--- a/Final_Paper/flowchart.pptx
+++ b/Final_Paper/flowchart.pptx
@@ -107,6 +107,11 @@
       </a:defRPr>
     </a:lvl9pPr>
   </p:defaultTextStyle>
+  <p:extLst>
+    <p:ext uri="{EFAFB233-063F-42B5-8137-9DF3F51BA10A}">
+      <p15:sldGuideLst xmlns:p15="http://schemas.microsoft.com/office/powerpoint/2012/main"/>
+    </p:ext>
+  </p:extLst>
 </p:presentation>
 </file>
 
@@ -192,7 +197,7 @@
           <a:p>
             <a:fld id="{0A1B1EB5-AD17-4B12-8CBC-EC8266648CFD}" type="datetimeFigureOut">
               <a:rPr lang="en-IN" smtClean="0"/>
-              <a:t>21-11-2025</a:t>
+              <a:t>22-11-2025</a:t>
             </a:fld>
             <a:endParaRPr lang="en-IN"/>
           </a:p>
@@ -693,7 +698,7 @@
           <a:p>
             <a:fld id="{7A059AC8-D1E1-47FC-89C7-8CFEDBB34742}" type="datetimeFigureOut">
               <a:rPr lang="en-IN" smtClean="0"/>
-              <a:t>21-11-2025</a:t>
+              <a:t>22-11-2025</a:t>
             </a:fld>
             <a:endParaRPr lang="en-IN"/>
           </a:p>
@@ -893,7 +898,7 @@
           <a:p>
             <a:fld id="{7A059AC8-D1E1-47FC-89C7-8CFEDBB34742}" type="datetimeFigureOut">
               <a:rPr lang="en-IN" smtClean="0"/>
-              <a:t>21-11-2025</a:t>
+              <a:t>22-11-2025</a:t>
             </a:fld>
             <a:endParaRPr lang="en-IN"/>
           </a:p>
@@ -1103,7 +1108,7 @@
           <a:p>
             <a:fld id="{7A059AC8-D1E1-47FC-89C7-8CFEDBB34742}" type="datetimeFigureOut">
               <a:rPr lang="en-IN" smtClean="0"/>
-              <a:t>21-11-2025</a:t>
+              <a:t>22-11-2025</a:t>
             </a:fld>
             <a:endParaRPr lang="en-IN"/>
           </a:p>
@@ -1303,7 +1308,7 @@
           <a:p>
             <a:fld id="{7A059AC8-D1E1-47FC-89C7-8CFEDBB34742}" type="datetimeFigureOut">
               <a:rPr lang="en-IN" smtClean="0"/>
-              <a:t>21-11-2025</a:t>
+              <a:t>22-11-2025</a:t>
             </a:fld>
             <a:endParaRPr lang="en-IN"/>
           </a:p>
@@ -1579,7 +1584,7 @@
           <a:p>
             <a:fld id="{7A059AC8-D1E1-47FC-89C7-8CFEDBB34742}" type="datetimeFigureOut">
               <a:rPr lang="en-IN" smtClean="0"/>
-              <a:t>21-11-2025</a:t>
+              <a:t>22-11-2025</a:t>
             </a:fld>
             <a:endParaRPr lang="en-IN"/>
           </a:p>
@@ -1847,7 +1852,7 @@
           <a:p>
             <a:fld id="{7A059AC8-D1E1-47FC-89C7-8CFEDBB34742}" type="datetimeFigureOut">
               <a:rPr lang="en-IN" smtClean="0"/>
-              <a:t>21-11-2025</a:t>
+              <a:t>22-11-2025</a:t>
             </a:fld>
             <a:endParaRPr lang="en-IN"/>
           </a:p>
@@ -2262,7 +2267,7 @@
           <a:p>
             <a:fld id="{7A059AC8-D1E1-47FC-89C7-8CFEDBB34742}" type="datetimeFigureOut">
               <a:rPr lang="en-IN" smtClean="0"/>
-              <a:t>21-11-2025</a:t>
+              <a:t>22-11-2025</a:t>
             </a:fld>
             <a:endParaRPr lang="en-IN"/>
           </a:p>
@@ -2404,7 +2409,7 @@
           <a:p>
             <a:fld id="{7A059AC8-D1E1-47FC-89C7-8CFEDBB34742}" type="datetimeFigureOut">
               <a:rPr lang="en-IN" smtClean="0"/>
-              <a:t>21-11-2025</a:t>
+              <a:t>22-11-2025</a:t>
             </a:fld>
             <a:endParaRPr lang="en-IN"/>
           </a:p>
@@ -2517,7 +2522,7 @@
           <a:p>
             <a:fld id="{7A059AC8-D1E1-47FC-89C7-8CFEDBB34742}" type="datetimeFigureOut">
               <a:rPr lang="en-IN" smtClean="0"/>
-              <a:t>21-11-2025</a:t>
+              <a:t>22-11-2025</a:t>
             </a:fld>
             <a:endParaRPr lang="en-IN"/>
           </a:p>
@@ -2830,7 +2835,7 @@
           <a:p>
             <a:fld id="{7A059AC8-D1E1-47FC-89C7-8CFEDBB34742}" type="datetimeFigureOut">
               <a:rPr lang="en-IN" smtClean="0"/>
-              <a:t>21-11-2025</a:t>
+              <a:t>22-11-2025</a:t>
             </a:fld>
             <a:endParaRPr lang="en-IN"/>
           </a:p>
@@ -3119,7 +3124,7 @@
           <a:p>
             <a:fld id="{7A059AC8-D1E1-47FC-89C7-8CFEDBB34742}" type="datetimeFigureOut">
               <a:rPr lang="en-IN" smtClean="0"/>
-              <a:t>21-11-2025</a:t>
+              <a:t>22-11-2025</a:t>
             </a:fld>
             <a:endParaRPr lang="en-IN"/>
           </a:p>
@@ -3362,7 +3367,7 @@
           <a:p>
             <a:fld id="{7A059AC8-D1E1-47FC-89C7-8CFEDBB34742}" type="datetimeFigureOut">
               <a:rPr lang="en-IN" smtClean="0"/>
-              <a:t>21-11-2025</a:t>
+              <a:t>22-11-2025</a:t>
             </a:fld>
             <a:endParaRPr lang="en-IN"/>
           </a:p>
@@ -3793,7 +3798,7 @@
         </p:nvSpPr>
         <p:spPr>
           <a:xfrm>
-            <a:off x="2057401" y="233666"/>
+            <a:off x="2743200" y="254077"/>
             <a:ext cx="1371600" cy="310620"/>
           </a:xfrm>
           <a:prstGeom prst="rect">
@@ -3841,7 +3846,7 @@
         </p:nvSpPr>
         <p:spPr>
           <a:xfrm>
-            <a:off x="8763001" y="233666"/>
+            <a:off x="8239662" y="254077"/>
             <a:ext cx="1371600" cy="310620"/>
           </a:xfrm>
           <a:prstGeom prst="rect">
@@ -3889,7 +3894,7 @@
         </p:nvSpPr>
         <p:spPr>
           <a:xfrm>
-            <a:off x="3876677" y="1672321"/>
+            <a:off x="2776539" y="1771260"/>
             <a:ext cx="1304924" cy="310620"/>
           </a:xfrm>
           <a:prstGeom prst="rect">
@@ -3937,7 +3942,7 @@
         </p:nvSpPr>
         <p:spPr>
           <a:xfrm>
-            <a:off x="7010400" y="1676213"/>
+            <a:off x="8168905" y="1771260"/>
             <a:ext cx="1513114" cy="310620"/>
           </a:xfrm>
           <a:prstGeom prst="rect">
@@ -3966,6 +3971,2874 @@
             <a:r>
               <a:rPr lang="en-US" sz="1400" dirty="0"/>
               <a:t>Background Mask</a:t>
+            </a:r>
+            <a:endParaRPr lang="en-IN" sz="1400" dirty="0"/>
+          </a:p>
+        </p:txBody>
+      </p:sp>
+      <p:sp>
+        <p:nvSpPr>
+          <p:cNvPr id="3" name="Flowchart: Summing Junction 2">
+            <a:extLst>
+              <a:ext uri="{FF2B5EF4-FFF2-40B4-BE49-F238E27FC236}">
+                <a16:creationId xmlns:a16="http://schemas.microsoft.com/office/drawing/2014/main" id="{4C619B03-3B9E-A686-F1E0-1A155A6C1B8E}"/>
+              </a:ext>
+            </a:extLst>
+          </p:cNvPr>
+          <p:cNvSpPr/>
+          <p:nvPr/>
+        </p:nvSpPr>
+        <p:spPr>
+          <a:xfrm>
+            <a:off x="1920505" y="1771260"/>
+            <a:ext cx="308954" cy="310620"/>
+          </a:xfrm>
+          <a:prstGeom prst="flowChartSummingJunction">
+            <a:avLst/>
+          </a:prstGeom>
+        </p:spPr>
+        <p:style>
+          <a:lnRef idx="2">
+            <a:schemeClr val="dk1"/>
+          </a:lnRef>
+          <a:fillRef idx="1">
+            <a:schemeClr val="lt1"/>
+          </a:fillRef>
+          <a:effectRef idx="0">
+            <a:schemeClr val="dk1"/>
+          </a:effectRef>
+          <a:fontRef idx="minor">
+            <a:schemeClr val="dk1"/>
+          </a:fontRef>
+        </p:style>
+        <p:txBody>
+          <a:bodyPr rtlCol="0" anchor="ctr"/>
+          <a:lstStyle/>
+          <a:p>
+            <a:pPr algn="ctr"/>
+            <a:endParaRPr lang="en-IN"/>
+          </a:p>
+        </p:txBody>
+      </p:sp>
+      <p:sp>
+        <p:nvSpPr>
+          <p:cNvPr id="4" name="Flowchart: Summing Junction 3">
+            <a:extLst>
+              <a:ext uri="{FF2B5EF4-FFF2-40B4-BE49-F238E27FC236}">
+                <a16:creationId xmlns:a16="http://schemas.microsoft.com/office/drawing/2014/main" id="{3CE3C62A-6D9D-9925-74C8-DBBDEBCA1D14}"/>
+              </a:ext>
+            </a:extLst>
+          </p:cNvPr>
+          <p:cNvSpPr/>
+          <p:nvPr/>
+        </p:nvSpPr>
+        <p:spPr>
+          <a:xfrm>
+            <a:off x="4628543" y="1771260"/>
+            <a:ext cx="308954" cy="310620"/>
+          </a:xfrm>
+          <a:prstGeom prst="flowChartSummingJunction">
+            <a:avLst/>
+          </a:prstGeom>
+        </p:spPr>
+        <p:style>
+          <a:lnRef idx="2">
+            <a:schemeClr val="dk1"/>
+          </a:lnRef>
+          <a:fillRef idx="1">
+            <a:schemeClr val="lt1"/>
+          </a:fillRef>
+          <a:effectRef idx="0">
+            <a:schemeClr val="dk1"/>
+          </a:effectRef>
+          <a:fontRef idx="minor">
+            <a:schemeClr val="dk1"/>
+          </a:fontRef>
+        </p:style>
+        <p:txBody>
+          <a:bodyPr rtlCol="0" anchor="ctr"/>
+          <a:lstStyle/>
+          <a:p>
+            <a:pPr algn="ctr"/>
+            <a:endParaRPr lang="en-IN"/>
+          </a:p>
+        </p:txBody>
+      </p:sp>
+      <p:sp>
+        <p:nvSpPr>
+          <p:cNvPr id="5" name="Flowchart: Summing Junction 4">
+            <a:extLst>
+              <a:ext uri="{FF2B5EF4-FFF2-40B4-BE49-F238E27FC236}">
+                <a16:creationId xmlns:a16="http://schemas.microsoft.com/office/drawing/2014/main" id="{BC097F26-48E6-E9A5-3EA1-4A1C34409389}"/>
+              </a:ext>
+            </a:extLst>
+          </p:cNvPr>
+          <p:cNvSpPr/>
+          <p:nvPr/>
+        </p:nvSpPr>
+        <p:spPr>
+          <a:xfrm>
+            <a:off x="7254505" y="1771260"/>
+            <a:ext cx="308954" cy="310620"/>
+          </a:xfrm>
+          <a:prstGeom prst="flowChartSummingJunction">
+            <a:avLst/>
+          </a:prstGeom>
+        </p:spPr>
+        <p:style>
+          <a:lnRef idx="2">
+            <a:schemeClr val="dk1"/>
+          </a:lnRef>
+          <a:fillRef idx="1">
+            <a:schemeClr val="lt1"/>
+          </a:fillRef>
+          <a:effectRef idx="0">
+            <a:schemeClr val="dk1"/>
+          </a:effectRef>
+          <a:fontRef idx="minor">
+            <a:schemeClr val="dk1"/>
+          </a:fontRef>
+        </p:style>
+        <p:txBody>
+          <a:bodyPr rtlCol="0" anchor="ctr"/>
+          <a:lstStyle/>
+          <a:p>
+            <a:pPr algn="ctr"/>
+            <a:endParaRPr lang="en-IN"/>
+          </a:p>
+        </p:txBody>
+      </p:sp>
+      <p:sp>
+        <p:nvSpPr>
+          <p:cNvPr id="6" name="Flowchart: Summing Junction 5">
+            <a:extLst>
+              <a:ext uri="{FF2B5EF4-FFF2-40B4-BE49-F238E27FC236}">
+                <a16:creationId xmlns:a16="http://schemas.microsoft.com/office/drawing/2014/main" id="{94405ABD-C800-9C4A-F4FC-51066EE6B756}"/>
+              </a:ext>
+            </a:extLst>
+          </p:cNvPr>
+          <p:cNvSpPr/>
+          <p:nvPr/>
+        </p:nvSpPr>
+        <p:spPr>
+          <a:xfrm>
+            <a:off x="10287465" y="1771260"/>
+            <a:ext cx="308954" cy="310620"/>
+          </a:xfrm>
+          <a:prstGeom prst="flowChartSummingJunction">
+            <a:avLst/>
+          </a:prstGeom>
+        </p:spPr>
+        <p:style>
+          <a:lnRef idx="2">
+            <a:schemeClr val="dk1"/>
+          </a:lnRef>
+          <a:fillRef idx="1">
+            <a:schemeClr val="lt1"/>
+          </a:fillRef>
+          <a:effectRef idx="0">
+            <a:schemeClr val="dk1"/>
+          </a:effectRef>
+          <a:fontRef idx="minor">
+            <a:schemeClr val="dk1"/>
+          </a:fontRef>
+        </p:style>
+        <p:txBody>
+          <a:bodyPr rtlCol="0" anchor="ctr"/>
+          <a:lstStyle/>
+          <a:p>
+            <a:pPr algn="ctr"/>
+            <a:endParaRPr lang="en-IN"/>
+          </a:p>
+        </p:txBody>
+      </p:sp>
+      <p:cxnSp>
+        <p:nvCxnSpPr>
+          <p:cNvPr id="11" name="Straight Connector 10">
+            <a:extLst>
+              <a:ext uri="{FF2B5EF4-FFF2-40B4-BE49-F238E27FC236}">
+                <a16:creationId xmlns:a16="http://schemas.microsoft.com/office/drawing/2014/main" id="{0675F37F-69FC-4ABA-883C-EB059F6EB370}"/>
+              </a:ext>
+            </a:extLst>
+          </p:cNvPr>
+          <p:cNvCxnSpPr>
+            <a:cxnSpLocks/>
+            <a:stCxn id="2" idx="1"/>
+          </p:cNvCxnSpPr>
+          <p:nvPr/>
+        </p:nvCxnSpPr>
+        <p:spPr>
+          <a:xfrm flipH="1">
+            <a:off x="2074982" y="409387"/>
+            <a:ext cx="668218" cy="0"/>
+          </a:xfrm>
+          <a:prstGeom prst="line">
+            <a:avLst/>
+          </a:prstGeom>
+        </p:spPr>
+        <p:style>
+          <a:lnRef idx="2">
+            <a:schemeClr val="dk1"/>
+          </a:lnRef>
+          <a:fillRef idx="1">
+            <a:schemeClr val="lt1"/>
+          </a:fillRef>
+          <a:effectRef idx="0">
+            <a:schemeClr val="dk1"/>
+          </a:effectRef>
+          <a:fontRef idx="minor">
+            <a:schemeClr val="dk1"/>
+          </a:fontRef>
+        </p:style>
+      </p:cxnSp>
+      <p:cxnSp>
+        <p:nvCxnSpPr>
+          <p:cNvPr id="18" name="Straight Arrow Connector 17">
+            <a:extLst>
+              <a:ext uri="{FF2B5EF4-FFF2-40B4-BE49-F238E27FC236}">
+                <a16:creationId xmlns:a16="http://schemas.microsoft.com/office/drawing/2014/main" id="{10CBE7E5-D62A-3323-8BE6-551A5F73DB37}"/>
+              </a:ext>
+            </a:extLst>
+          </p:cNvPr>
+          <p:cNvCxnSpPr>
+            <a:cxnSpLocks/>
+            <a:endCxn id="3" idx="0"/>
+          </p:cNvCxnSpPr>
+          <p:nvPr/>
+        </p:nvCxnSpPr>
+        <p:spPr>
+          <a:xfrm>
+            <a:off x="2074982" y="409387"/>
+            <a:ext cx="0" cy="1361873"/>
+          </a:xfrm>
+          <a:prstGeom prst="straightConnector1">
+            <a:avLst/>
+          </a:prstGeom>
+          <a:ln>
+            <a:tailEnd type="triangle"/>
+          </a:ln>
+        </p:spPr>
+        <p:style>
+          <a:lnRef idx="2">
+            <a:schemeClr val="dk1"/>
+          </a:lnRef>
+          <a:fillRef idx="1">
+            <a:schemeClr val="lt1"/>
+          </a:fillRef>
+          <a:effectRef idx="0">
+            <a:schemeClr val="dk1"/>
+          </a:effectRef>
+          <a:fontRef idx="minor">
+            <a:schemeClr val="dk1"/>
+          </a:fontRef>
+        </p:style>
+      </p:cxnSp>
+      <p:cxnSp>
+        <p:nvCxnSpPr>
+          <p:cNvPr id="21" name="Straight Arrow Connector 20">
+            <a:extLst>
+              <a:ext uri="{FF2B5EF4-FFF2-40B4-BE49-F238E27FC236}">
+                <a16:creationId xmlns:a16="http://schemas.microsoft.com/office/drawing/2014/main" id="{88445B19-BA65-E093-8726-11DD0DD3348D}"/>
+              </a:ext>
+            </a:extLst>
+          </p:cNvPr>
+          <p:cNvCxnSpPr>
+            <a:cxnSpLocks/>
+            <a:stCxn id="8" idx="1"/>
+          </p:cNvCxnSpPr>
+          <p:nvPr/>
+        </p:nvCxnSpPr>
+        <p:spPr>
+          <a:xfrm flipH="1" flipV="1">
+            <a:off x="2227382" y="1923660"/>
+            <a:ext cx="549157" cy="2910"/>
+          </a:xfrm>
+          <a:prstGeom prst="straightConnector1">
+            <a:avLst/>
+          </a:prstGeom>
+          <a:ln>
+            <a:tailEnd type="triangle"/>
+          </a:ln>
+        </p:spPr>
+        <p:style>
+          <a:lnRef idx="2">
+            <a:schemeClr val="dk1"/>
+          </a:lnRef>
+          <a:fillRef idx="1">
+            <a:schemeClr val="lt1"/>
+          </a:fillRef>
+          <a:effectRef idx="0">
+            <a:schemeClr val="dk1"/>
+          </a:effectRef>
+          <a:fontRef idx="minor">
+            <a:schemeClr val="dk1"/>
+          </a:fontRef>
+        </p:style>
+      </p:cxnSp>
+      <p:cxnSp>
+        <p:nvCxnSpPr>
+          <p:cNvPr id="23" name="Straight Arrow Connector 22">
+            <a:extLst>
+              <a:ext uri="{FF2B5EF4-FFF2-40B4-BE49-F238E27FC236}">
+                <a16:creationId xmlns:a16="http://schemas.microsoft.com/office/drawing/2014/main" id="{F88C1FDA-1285-C47F-7900-355579207775}"/>
+              </a:ext>
+            </a:extLst>
+          </p:cNvPr>
+          <p:cNvCxnSpPr>
+            <a:cxnSpLocks/>
+            <a:endCxn id="4" idx="2"/>
+          </p:cNvCxnSpPr>
+          <p:nvPr/>
+        </p:nvCxnSpPr>
+        <p:spPr>
+          <a:xfrm>
+            <a:off x="4081463" y="1923660"/>
+            <a:ext cx="547080" cy="2910"/>
+          </a:xfrm>
+          <a:prstGeom prst="straightConnector1">
+            <a:avLst/>
+          </a:prstGeom>
+          <a:ln>
+            <a:tailEnd type="triangle"/>
+          </a:ln>
+        </p:spPr>
+        <p:style>
+          <a:lnRef idx="2">
+            <a:schemeClr val="dk1"/>
+          </a:lnRef>
+          <a:fillRef idx="1">
+            <a:schemeClr val="lt1"/>
+          </a:fillRef>
+          <a:effectRef idx="0">
+            <a:schemeClr val="dk1"/>
+          </a:effectRef>
+          <a:fontRef idx="minor">
+            <a:schemeClr val="dk1"/>
+          </a:fontRef>
+        </p:style>
+      </p:cxnSp>
+      <p:cxnSp>
+        <p:nvCxnSpPr>
+          <p:cNvPr id="26" name="Straight Connector 25">
+            <a:extLst>
+              <a:ext uri="{FF2B5EF4-FFF2-40B4-BE49-F238E27FC236}">
+                <a16:creationId xmlns:a16="http://schemas.microsoft.com/office/drawing/2014/main" id="{DFCC9937-B759-A633-F031-5EECDB8C8F29}"/>
+              </a:ext>
+            </a:extLst>
+          </p:cNvPr>
+          <p:cNvCxnSpPr>
+            <a:cxnSpLocks/>
+          </p:cNvCxnSpPr>
+          <p:nvPr/>
+        </p:nvCxnSpPr>
+        <p:spPr>
+          <a:xfrm flipH="1">
+            <a:off x="9611262" y="409387"/>
+            <a:ext cx="836237" cy="0"/>
+          </a:xfrm>
+          <a:prstGeom prst="line">
+            <a:avLst/>
+          </a:prstGeom>
+        </p:spPr>
+        <p:style>
+          <a:lnRef idx="2">
+            <a:schemeClr val="dk1"/>
+          </a:lnRef>
+          <a:fillRef idx="1">
+            <a:schemeClr val="lt1"/>
+          </a:fillRef>
+          <a:effectRef idx="0">
+            <a:schemeClr val="dk1"/>
+          </a:effectRef>
+          <a:fontRef idx="minor">
+            <a:schemeClr val="dk1"/>
+          </a:fontRef>
+        </p:style>
+      </p:cxnSp>
+      <p:cxnSp>
+        <p:nvCxnSpPr>
+          <p:cNvPr id="27" name="Straight Arrow Connector 26">
+            <a:extLst>
+              <a:ext uri="{FF2B5EF4-FFF2-40B4-BE49-F238E27FC236}">
+                <a16:creationId xmlns:a16="http://schemas.microsoft.com/office/drawing/2014/main" id="{C674051C-69F6-0D35-3489-34248AF441AD}"/>
+              </a:ext>
+            </a:extLst>
+          </p:cNvPr>
+          <p:cNvCxnSpPr>
+            <a:cxnSpLocks/>
+          </p:cNvCxnSpPr>
+          <p:nvPr/>
+        </p:nvCxnSpPr>
+        <p:spPr>
+          <a:xfrm>
+            <a:off x="10441942" y="409387"/>
+            <a:ext cx="0" cy="1361873"/>
+          </a:xfrm>
+          <a:prstGeom prst="straightConnector1">
+            <a:avLst/>
+          </a:prstGeom>
+          <a:ln>
+            <a:tailEnd type="triangle"/>
+          </a:ln>
+        </p:spPr>
+        <p:style>
+          <a:lnRef idx="2">
+            <a:schemeClr val="dk1"/>
+          </a:lnRef>
+          <a:fillRef idx="1">
+            <a:schemeClr val="lt1"/>
+          </a:fillRef>
+          <a:effectRef idx="0">
+            <a:schemeClr val="dk1"/>
+          </a:effectRef>
+          <a:fontRef idx="minor">
+            <a:schemeClr val="dk1"/>
+          </a:fontRef>
+        </p:style>
+      </p:cxnSp>
+      <p:cxnSp>
+        <p:nvCxnSpPr>
+          <p:cNvPr id="29" name="Straight Arrow Connector 28">
+            <a:extLst>
+              <a:ext uri="{FF2B5EF4-FFF2-40B4-BE49-F238E27FC236}">
+                <a16:creationId xmlns:a16="http://schemas.microsoft.com/office/drawing/2014/main" id="{0B9725B6-B13F-44E1-6187-998CF2FA1922}"/>
+              </a:ext>
+            </a:extLst>
+          </p:cNvPr>
+          <p:cNvCxnSpPr>
+            <a:cxnSpLocks/>
+            <a:endCxn id="5" idx="6"/>
+          </p:cNvCxnSpPr>
+          <p:nvPr/>
+        </p:nvCxnSpPr>
+        <p:spPr>
+          <a:xfrm flipH="1">
+            <a:off x="7563459" y="1923660"/>
+            <a:ext cx="605446" cy="2910"/>
+          </a:xfrm>
+          <a:prstGeom prst="straightConnector1">
+            <a:avLst/>
+          </a:prstGeom>
+          <a:ln>
+            <a:tailEnd type="triangle"/>
+          </a:ln>
+        </p:spPr>
+        <p:style>
+          <a:lnRef idx="2">
+            <a:schemeClr val="dk1"/>
+          </a:lnRef>
+          <a:fillRef idx="1">
+            <a:schemeClr val="lt1"/>
+          </a:fillRef>
+          <a:effectRef idx="0">
+            <a:schemeClr val="dk1"/>
+          </a:effectRef>
+          <a:fontRef idx="minor">
+            <a:schemeClr val="dk1"/>
+          </a:fontRef>
+        </p:style>
+      </p:cxnSp>
+      <p:cxnSp>
+        <p:nvCxnSpPr>
+          <p:cNvPr id="31" name="Straight Arrow Connector 30">
+            <a:extLst>
+              <a:ext uri="{FF2B5EF4-FFF2-40B4-BE49-F238E27FC236}">
+                <a16:creationId xmlns:a16="http://schemas.microsoft.com/office/drawing/2014/main" id="{2797E659-F9A6-81BF-DABC-305764949F7C}"/>
+              </a:ext>
+            </a:extLst>
+          </p:cNvPr>
+          <p:cNvCxnSpPr>
+            <a:cxnSpLocks/>
+            <a:endCxn id="6" idx="2"/>
+          </p:cNvCxnSpPr>
+          <p:nvPr/>
+        </p:nvCxnSpPr>
+        <p:spPr>
+          <a:xfrm flipV="1">
+            <a:off x="9682019" y="1926570"/>
+            <a:ext cx="605446" cy="5471"/>
+          </a:xfrm>
+          <a:prstGeom prst="straightConnector1">
+            <a:avLst/>
+          </a:prstGeom>
+          <a:ln>
+            <a:tailEnd type="triangle"/>
+          </a:ln>
+        </p:spPr>
+        <p:style>
+          <a:lnRef idx="2">
+            <a:schemeClr val="dk1"/>
+          </a:lnRef>
+          <a:fillRef idx="1">
+            <a:schemeClr val="lt1"/>
+          </a:fillRef>
+          <a:effectRef idx="0">
+            <a:schemeClr val="dk1"/>
+          </a:effectRef>
+          <a:fontRef idx="minor">
+            <a:schemeClr val="dk1"/>
+          </a:fontRef>
+        </p:style>
+      </p:cxnSp>
+      <p:cxnSp>
+        <p:nvCxnSpPr>
+          <p:cNvPr id="33" name="Straight Arrow Connector 32">
+            <a:extLst>
+              <a:ext uri="{FF2B5EF4-FFF2-40B4-BE49-F238E27FC236}">
+                <a16:creationId xmlns:a16="http://schemas.microsoft.com/office/drawing/2014/main" id="{001E6985-83D9-D676-C0BC-14653CC75BBC}"/>
+              </a:ext>
+            </a:extLst>
+          </p:cNvPr>
+          <p:cNvCxnSpPr>
+            <a:cxnSpLocks/>
+          </p:cNvCxnSpPr>
+          <p:nvPr/>
+        </p:nvCxnSpPr>
+        <p:spPr>
+          <a:xfrm>
+            <a:off x="7408982" y="409387"/>
+            <a:ext cx="0" cy="1361873"/>
+          </a:xfrm>
+          <a:prstGeom prst="straightConnector1">
+            <a:avLst/>
+          </a:prstGeom>
+          <a:ln>
+            <a:tailEnd type="triangle"/>
+          </a:ln>
+        </p:spPr>
+        <p:style>
+          <a:lnRef idx="2">
+            <a:schemeClr val="dk1"/>
+          </a:lnRef>
+          <a:fillRef idx="1">
+            <a:schemeClr val="lt1"/>
+          </a:fillRef>
+          <a:effectRef idx="0">
+            <a:schemeClr val="dk1"/>
+          </a:effectRef>
+          <a:fontRef idx="minor">
+            <a:schemeClr val="dk1"/>
+          </a:fontRef>
+        </p:style>
+      </p:cxnSp>
+      <p:cxnSp>
+        <p:nvCxnSpPr>
+          <p:cNvPr id="35" name="Straight Connector 34">
+            <a:extLst>
+              <a:ext uri="{FF2B5EF4-FFF2-40B4-BE49-F238E27FC236}">
+                <a16:creationId xmlns:a16="http://schemas.microsoft.com/office/drawing/2014/main" id="{ADCEEFFA-431E-4552-F8D0-9214EEE3F8F3}"/>
+              </a:ext>
+            </a:extLst>
+          </p:cNvPr>
+          <p:cNvCxnSpPr>
+            <a:cxnSpLocks/>
+          </p:cNvCxnSpPr>
+          <p:nvPr/>
+        </p:nvCxnSpPr>
+        <p:spPr>
+          <a:xfrm flipH="1">
+            <a:off x="4114802" y="409387"/>
+            <a:ext cx="3294180" cy="0"/>
+          </a:xfrm>
+          <a:prstGeom prst="line">
+            <a:avLst/>
+          </a:prstGeom>
+        </p:spPr>
+        <p:style>
+          <a:lnRef idx="2">
+            <a:schemeClr val="dk1"/>
+          </a:lnRef>
+          <a:fillRef idx="1">
+            <a:schemeClr val="lt1"/>
+          </a:fillRef>
+          <a:effectRef idx="0">
+            <a:schemeClr val="dk1"/>
+          </a:effectRef>
+          <a:fontRef idx="minor">
+            <a:schemeClr val="dk1"/>
+          </a:fontRef>
+        </p:style>
+      </p:cxnSp>
+      <p:cxnSp>
+        <p:nvCxnSpPr>
+          <p:cNvPr id="38" name="Straight Connector 37">
+            <a:extLst>
+              <a:ext uri="{FF2B5EF4-FFF2-40B4-BE49-F238E27FC236}">
+                <a16:creationId xmlns:a16="http://schemas.microsoft.com/office/drawing/2014/main" id="{AEB639D5-2CAA-C316-7745-1E60FAA1893D}"/>
+              </a:ext>
+            </a:extLst>
+          </p:cNvPr>
+          <p:cNvCxnSpPr>
+            <a:cxnSpLocks/>
+          </p:cNvCxnSpPr>
+          <p:nvPr/>
+        </p:nvCxnSpPr>
+        <p:spPr>
+          <a:xfrm flipH="1">
+            <a:off x="7939825" y="417382"/>
+            <a:ext cx="299837" cy="0"/>
+          </a:xfrm>
+          <a:prstGeom prst="line">
+            <a:avLst/>
+          </a:prstGeom>
+        </p:spPr>
+        <p:style>
+          <a:lnRef idx="2">
+            <a:schemeClr val="dk1"/>
+          </a:lnRef>
+          <a:fillRef idx="1">
+            <a:schemeClr val="lt1"/>
+          </a:fillRef>
+          <a:effectRef idx="0">
+            <a:schemeClr val="dk1"/>
+          </a:effectRef>
+          <a:fontRef idx="minor">
+            <a:schemeClr val="dk1"/>
+          </a:fontRef>
+        </p:style>
+      </p:cxnSp>
+      <p:cxnSp>
+        <p:nvCxnSpPr>
+          <p:cNvPr id="40" name="Straight Connector 39">
+            <a:extLst>
+              <a:ext uri="{FF2B5EF4-FFF2-40B4-BE49-F238E27FC236}">
+                <a16:creationId xmlns:a16="http://schemas.microsoft.com/office/drawing/2014/main" id="{64530664-8B51-BEE2-7272-670DEC19801F}"/>
+              </a:ext>
+            </a:extLst>
+          </p:cNvPr>
+          <p:cNvCxnSpPr>
+            <a:cxnSpLocks/>
+          </p:cNvCxnSpPr>
+          <p:nvPr/>
+        </p:nvCxnSpPr>
+        <p:spPr>
+          <a:xfrm flipV="1">
+            <a:off x="7939825" y="417382"/>
+            <a:ext cx="0" cy="818990"/>
+          </a:xfrm>
+          <a:prstGeom prst="line">
+            <a:avLst/>
+          </a:prstGeom>
+        </p:spPr>
+        <p:style>
+          <a:lnRef idx="2">
+            <a:schemeClr val="dk1"/>
+          </a:lnRef>
+          <a:fillRef idx="1">
+            <a:schemeClr val="lt1"/>
+          </a:fillRef>
+          <a:effectRef idx="0">
+            <a:schemeClr val="dk1"/>
+          </a:effectRef>
+          <a:fontRef idx="minor">
+            <a:schemeClr val="dk1"/>
+          </a:fontRef>
+        </p:style>
+      </p:cxnSp>
+      <p:cxnSp>
+        <p:nvCxnSpPr>
+          <p:cNvPr id="51" name="Straight Connector 50">
+            <a:extLst>
+              <a:ext uri="{FF2B5EF4-FFF2-40B4-BE49-F238E27FC236}">
+                <a16:creationId xmlns:a16="http://schemas.microsoft.com/office/drawing/2014/main" id="{D8938EE4-994C-C416-4ED6-E23192724430}"/>
+              </a:ext>
+            </a:extLst>
+          </p:cNvPr>
+          <p:cNvCxnSpPr>
+            <a:cxnSpLocks/>
+          </p:cNvCxnSpPr>
+          <p:nvPr/>
+        </p:nvCxnSpPr>
+        <p:spPr>
+          <a:xfrm flipH="1">
+            <a:off x="4783020" y="1236372"/>
+            <a:ext cx="3156805" cy="0"/>
+          </a:xfrm>
+          <a:prstGeom prst="line">
+            <a:avLst/>
+          </a:prstGeom>
+        </p:spPr>
+        <p:style>
+          <a:lnRef idx="2">
+            <a:schemeClr val="dk1"/>
+          </a:lnRef>
+          <a:fillRef idx="1">
+            <a:schemeClr val="lt1"/>
+          </a:fillRef>
+          <a:effectRef idx="0">
+            <a:schemeClr val="dk1"/>
+          </a:effectRef>
+          <a:fontRef idx="minor">
+            <a:schemeClr val="dk1"/>
+          </a:fontRef>
+        </p:style>
+      </p:cxnSp>
+      <p:cxnSp>
+        <p:nvCxnSpPr>
+          <p:cNvPr id="53" name="Straight Arrow Connector 52">
+            <a:extLst>
+              <a:ext uri="{FF2B5EF4-FFF2-40B4-BE49-F238E27FC236}">
+                <a16:creationId xmlns:a16="http://schemas.microsoft.com/office/drawing/2014/main" id="{18632E69-5DDE-87DF-C53F-AD866CEA1E9B}"/>
+              </a:ext>
+            </a:extLst>
+          </p:cNvPr>
+          <p:cNvCxnSpPr>
+            <a:cxnSpLocks/>
+          </p:cNvCxnSpPr>
+          <p:nvPr/>
+        </p:nvCxnSpPr>
+        <p:spPr>
+          <a:xfrm>
+            <a:off x="4783020" y="1236372"/>
+            <a:ext cx="0" cy="542883"/>
+          </a:xfrm>
+          <a:prstGeom prst="straightConnector1">
+            <a:avLst/>
+          </a:prstGeom>
+          <a:ln>
+            <a:tailEnd type="triangle"/>
+          </a:ln>
+        </p:spPr>
+        <p:style>
+          <a:lnRef idx="2">
+            <a:schemeClr val="dk1"/>
+          </a:lnRef>
+          <a:fillRef idx="1">
+            <a:schemeClr val="lt1"/>
+          </a:fillRef>
+          <a:effectRef idx="0">
+            <a:schemeClr val="dk1"/>
+          </a:effectRef>
+          <a:fontRef idx="minor">
+            <a:schemeClr val="dk1"/>
+          </a:fontRef>
+        </p:style>
+      </p:cxnSp>
+      <p:sp>
+        <p:nvSpPr>
+          <p:cNvPr id="55" name="Rectangle 54">
+            <a:extLst>
+              <a:ext uri="{FF2B5EF4-FFF2-40B4-BE49-F238E27FC236}">
+                <a16:creationId xmlns:a16="http://schemas.microsoft.com/office/drawing/2014/main" id="{4A1ECF50-E1C3-B2A7-D8F4-94224D3AA2D9}"/>
+              </a:ext>
+            </a:extLst>
+          </p:cNvPr>
+          <p:cNvSpPr/>
+          <p:nvPr/>
+        </p:nvSpPr>
+        <p:spPr>
+          <a:xfrm>
+            <a:off x="1422520" y="2488023"/>
+            <a:ext cx="1304924" cy="310620"/>
+          </a:xfrm>
+          <a:prstGeom prst="rect">
+            <a:avLst/>
+          </a:prstGeom>
+        </p:spPr>
+        <p:style>
+          <a:lnRef idx="2">
+            <a:schemeClr val="dk1"/>
+          </a:lnRef>
+          <a:fillRef idx="1">
+            <a:schemeClr val="lt1"/>
+          </a:fillRef>
+          <a:effectRef idx="0">
+            <a:schemeClr val="dk1"/>
+          </a:effectRef>
+          <a:fontRef idx="minor">
+            <a:schemeClr val="dk1"/>
+          </a:fontRef>
+        </p:style>
+        <p:txBody>
+          <a:bodyPr rtlCol="0" anchor="ctr"/>
+          <a:lstStyle/>
+          <a:p>
+            <a:pPr algn="ctr"/>
+            <a:r>
+              <a:rPr lang="en-US" sz="1400" dirty="0"/>
+              <a:t>Image 1A</a:t>
+            </a:r>
+            <a:endParaRPr lang="en-IN" sz="1400" dirty="0"/>
+          </a:p>
+        </p:txBody>
+      </p:sp>
+      <p:sp>
+        <p:nvSpPr>
+          <p:cNvPr id="56" name="Rectangle 55">
+            <a:extLst>
+              <a:ext uri="{FF2B5EF4-FFF2-40B4-BE49-F238E27FC236}">
+                <a16:creationId xmlns:a16="http://schemas.microsoft.com/office/drawing/2014/main" id="{6ECD5E68-67E6-DC1E-C609-1A84028F6104}"/>
+              </a:ext>
+            </a:extLst>
+          </p:cNvPr>
+          <p:cNvSpPr/>
+          <p:nvPr/>
+        </p:nvSpPr>
+        <p:spPr>
+          <a:xfrm>
+            <a:off x="4130558" y="2490971"/>
+            <a:ext cx="1304924" cy="310620"/>
+          </a:xfrm>
+          <a:prstGeom prst="rect">
+            <a:avLst/>
+          </a:prstGeom>
+        </p:spPr>
+        <p:style>
+          <a:lnRef idx="2">
+            <a:schemeClr val="dk1"/>
+          </a:lnRef>
+          <a:fillRef idx="1">
+            <a:schemeClr val="lt1"/>
+          </a:fillRef>
+          <a:effectRef idx="0">
+            <a:schemeClr val="dk1"/>
+          </a:effectRef>
+          <a:fontRef idx="minor">
+            <a:schemeClr val="dk1"/>
+          </a:fontRef>
+        </p:style>
+        <p:txBody>
+          <a:bodyPr rtlCol="0" anchor="ctr"/>
+          <a:lstStyle/>
+          <a:p>
+            <a:pPr algn="ctr"/>
+            <a:r>
+              <a:rPr lang="en-US" sz="1400" dirty="0"/>
+              <a:t>Image 1B</a:t>
+            </a:r>
+            <a:endParaRPr lang="en-IN" sz="1400" dirty="0"/>
+          </a:p>
+        </p:txBody>
+      </p:sp>
+      <p:sp>
+        <p:nvSpPr>
+          <p:cNvPr id="57" name="Rectangle 56">
+            <a:extLst>
+              <a:ext uri="{FF2B5EF4-FFF2-40B4-BE49-F238E27FC236}">
+                <a16:creationId xmlns:a16="http://schemas.microsoft.com/office/drawing/2014/main" id="{4903D90D-A99E-E6EE-0140-B9B09D8CB603}"/>
+              </a:ext>
+            </a:extLst>
+          </p:cNvPr>
+          <p:cNvSpPr/>
+          <p:nvPr/>
+        </p:nvSpPr>
+        <p:spPr>
+          <a:xfrm>
+            <a:off x="6756520" y="2488023"/>
+            <a:ext cx="1304924" cy="310620"/>
+          </a:xfrm>
+          <a:prstGeom prst="rect">
+            <a:avLst/>
+          </a:prstGeom>
+        </p:spPr>
+        <p:style>
+          <a:lnRef idx="2">
+            <a:schemeClr val="dk1"/>
+          </a:lnRef>
+          <a:fillRef idx="1">
+            <a:schemeClr val="lt1"/>
+          </a:fillRef>
+          <a:effectRef idx="0">
+            <a:schemeClr val="dk1"/>
+          </a:effectRef>
+          <a:fontRef idx="minor">
+            <a:schemeClr val="dk1"/>
+          </a:fontRef>
+        </p:style>
+        <p:txBody>
+          <a:bodyPr rtlCol="0" anchor="ctr"/>
+          <a:lstStyle/>
+          <a:p>
+            <a:pPr algn="ctr"/>
+            <a:r>
+              <a:rPr lang="en-US" sz="1400" dirty="0"/>
+              <a:t>Image 2A</a:t>
+            </a:r>
+            <a:endParaRPr lang="en-IN" sz="1400" dirty="0"/>
+          </a:p>
+        </p:txBody>
+      </p:sp>
+      <p:sp>
+        <p:nvSpPr>
+          <p:cNvPr id="58" name="Rectangle 57">
+            <a:extLst>
+              <a:ext uri="{FF2B5EF4-FFF2-40B4-BE49-F238E27FC236}">
+                <a16:creationId xmlns:a16="http://schemas.microsoft.com/office/drawing/2014/main" id="{367FBB59-5808-B7DB-7408-0C1BB541FA45}"/>
+              </a:ext>
+            </a:extLst>
+          </p:cNvPr>
+          <p:cNvSpPr/>
+          <p:nvPr/>
+        </p:nvSpPr>
+        <p:spPr>
+          <a:xfrm>
+            <a:off x="9789480" y="2488023"/>
+            <a:ext cx="1304924" cy="310620"/>
+          </a:xfrm>
+          <a:prstGeom prst="rect">
+            <a:avLst/>
+          </a:prstGeom>
+        </p:spPr>
+        <p:style>
+          <a:lnRef idx="2">
+            <a:schemeClr val="dk1"/>
+          </a:lnRef>
+          <a:fillRef idx="1">
+            <a:schemeClr val="lt1"/>
+          </a:fillRef>
+          <a:effectRef idx="0">
+            <a:schemeClr val="dk1"/>
+          </a:effectRef>
+          <a:fontRef idx="minor">
+            <a:schemeClr val="dk1"/>
+          </a:fontRef>
+        </p:style>
+        <p:txBody>
+          <a:bodyPr rtlCol="0" anchor="ctr"/>
+          <a:lstStyle/>
+          <a:p>
+            <a:pPr algn="ctr"/>
+            <a:r>
+              <a:rPr lang="en-US" sz="1400" dirty="0"/>
+              <a:t>Image 2B</a:t>
+            </a:r>
+            <a:endParaRPr lang="en-IN" sz="1400" dirty="0"/>
+          </a:p>
+        </p:txBody>
+      </p:sp>
+      <p:cxnSp>
+        <p:nvCxnSpPr>
+          <p:cNvPr id="59" name="Straight Arrow Connector 58">
+            <a:extLst>
+              <a:ext uri="{FF2B5EF4-FFF2-40B4-BE49-F238E27FC236}">
+                <a16:creationId xmlns:a16="http://schemas.microsoft.com/office/drawing/2014/main" id="{C06110DD-3640-16EF-3298-638E525CB1C6}"/>
+              </a:ext>
+            </a:extLst>
+          </p:cNvPr>
+          <p:cNvCxnSpPr>
+            <a:cxnSpLocks/>
+          </p:cNvCxnSpPr>
+          <p:nvPr/>
+        </p:nvCxnSpPr>
+        <p:spPr>
+          <a:xfrm>
+            <a:off x="2074982" y="2081880"/>
+            <a:ext cx="0" cy="402240"/>
+          </a:xfrm>
+          <a:prstGeom prst="straightConnector1">
+            <a:avLst/>
+          </a:prstGeom>
+          <a:ln>
+            <a:tailEnd type="triangle"/>
+          </a:ln>
+        </p:spPr>
+        <p:style>
+          <a:lnRef idx="2">
+            <a:schemeClr val="dk1"/>
+          </a:lnRef>
+          <a:fillRef idx="1">
+            <a:schemeClr val="lt1"/>
+          </a:fillRef>
+          <a:effectRef idx="0">
+            <a:schemeClr val="dk1"/>
+          </a:effectRef>
+          <a:fontRef idx="minor">
+            <a:schemeClr val="dk1"/>
+          </a:fontRef>
+        </p:style>
+      </p:cxnSp>
+      <p:sp>
+        <p:nvSpPr>
+          <p:cNvPr id="68" name="Rectangle 67">
+            <a:extLst>
+              <a:ext uri="{FF2B5EF4-FFF2-40B4-BE49-F238E27FC236}">
+                <a16:creationId xmlns:a16="http://schemas.microsoft.com/office/drawing/2014/main" id="{45C0B059-F2D8-D900-F2AB-507248E53A94}"/>
+              </a:ext>
+            </a:extLst>
+          </p:cNvPr>
+          <p:cNvSpPr/>
+          <p:nvPr/>
+        </p:nvSpPr>
+        <p:spPr>
+          <a:xfrm>
+            <a:off x="1720203" y="3921066"/>
+            <a:ext cx="381939" cy="352194"/>
+          </a:xfrm>
+          <a:prstGeom prst="rect">
+            <a:avLst/>
+          </a:prstGeom>
+        </p:spPr>
+        <p:style>
+          <a:lnRef idx="2">
+            <a:schemeClr val="dk1"/>
+          </a:lnRef>
+          <a:fillRef idx="1">
+            <a:schemeClr val="lt1"/>
+          </a:fillRef>
+          <a:effectRef idx="0">
+            <a:schemeClr val="dk1"/>
+          </a:effectRef>
+          <a:fontRef idx="minor">
+            <a:schemeClr val="dk1"/>
+          </a:fontRef>
+        </p:style>
+        <p:txBody>
+          <a:bodyPr rtlCol="0" anchor="ctr"/>
+          <a:lstStyle/>
+          <a:p>
+            <a:pPr algn="ctr"/>
+            <a:endParaRPr lang="en-IN"/>
+          </a:p>
+        </p:txBody>
+      </p:sp>
+      <p:sp>
+        <p:nvSpPr>
+          <p:cNvPr id="69" name="Rectangle 68">
+            <a:extLst>
+              <a:ext uri="{FF2B5EF4-FFF2-40B4-BE49-F238E27FC236}">
+                <a16:creationId xmlns:a16="http://schemas.microsoft.com/office/drawing/2014/main" id="{0D007743-B759-567E-A88E-7DCB2C3001B5}"/>
+              </a:ext>
+            </a:extLst>
+          </p:cNvPr>
+          <p:cNvSpPr/>
+          <p:nvPr/>
+        </p:nvSpPr>
+        <p:spPr>
+          <a:xfrm>
+            <a:off x="2069703" y="3921066"/>
+            <a:ext cx="381939" cy="352194"/>
+          </a:xfrm>
+          <a:prstGeom prst="rect">
+            <a:avLst/>
+          </a:prstGeom>
+        </p:spPr>
+        <p:style>
+          <a:lnRef idx="2">
+            <a:schemeClr val="dk1"/>
+          </a:lnRef>
+          <a:fillRef idx="1">
+            <a:schemeClr val="lt1"/>
+          </a:fillRef>
+          <a:effectRef idx="0">
+            <a:schemeClr val="dk1"/>
+          </a:effectRef>
+          <a:fontRef idx="minor">
+            <a:schemeClr val="dk1"/>
+          </a:fontRef>
+        </p:style>
+        <p:txBody>
+          <a:bodyPr rtlCol="0" anchor="ctr"/>
+          <a:lstStyle/>
+          <a:p>
+            <a:pPr algn="ctr"/>
+            <a:endParaRPr lang="en-IN"/>
+          </a:p>
+        </p:txBody>
+      </p:sp>
+      <p:sp>
+        <p:nvSpPr>
+          <p:cNvPr id="70" name="Rectangle 69">
+            <a:extLst>
+              <a:ext uri="{FF2B5EF4-FFF2-40B4-BE49-F238E27FC236}">
+                <a16:creationId xmlns:a16="http://schemas.microsoft.com/office/drawing/2014/main" id="{4EAE0EEE-D54B-36CF-AF92-6585127F9DE5}"/>
+              </a:ext>
+            </a:extLst>
+          </p:cNvPr>
+          <p:cNvSpPr/>
+          <p:nvPr/>
+        </p:nvSpPr>
+        <p:spPr>
+          <a:xfrm>
+            <a:off x="1720203" y="4275306"/>
+            <a:ext cx="381939" cy="352194"/>
+          </a:xfrm>
+          <a:prstGeom prst="rect">
+            <a:avLst/>
+          </a:prstGeom>
+        </p:spPr>
+        <p:style>
+          <a:lnRef idx="2">
+            <a:schemeClr val="dk1"/>
+          </a:lnRef>
+          <a:fillRef idx="1">
+            <a:schemeClr val="lt1"/>
+          </a:fillRef>
+          <a:effectRef idx="0">
+            <a:schemeClr val="dk1"/>
+          </a:effectRef>
+          <a:fontRef idx="minor">
+            <a:schemeClr val="dk1"/>
+          </a:fontRef>
+        </p:style>
+        <p:txBody>
+          <a:bodyPr rtlCol="0" anchor="ctr"/>
+          <a:lstStyle/>
+          <a:p>
+            <a:pPr algn="ctr"/>
+            <a:endParaRPr lang="en-IN"/>
+          </a:p>
+        </p:txBody>
+      </p:sp>
+      <p:sp>
+        <p:nvSpPr>
+          <p:cNvPr id="71" name="Rectangle 70">
+            <a:extLst>
+              <a:ext uri="{FF2B5EF4-FFF2-40B4-BE49-F238E27FC236}">
+                <a16:creationId xmlns:a16="http://schemas.microsoft.com/office/drawing/2014/main" id="{F4DE7BD0-0643-3FBD-EEE5-12A598A1FF61}"/>
+              </a:ext>
+            </a:extLst>
+          </p:cNvPr>
+          <p:cNvSpPr/>
+          <p:nvPr/>
+        </p:nvSpPr>
+        <p:spPr>
+          <a:xfrm>
+            <a:off x="2069703" y="4275306"/>
+            <a:ext cx="381939" cy="352194"/>
+          </a:xfrm>
+          <a:prstGeom prst="rect">
+            <a:avLst/>
+          </a:prstGeom>
+        </p:spPr>
+        <p:style>
+          <a:lnRef idx="2">
+            <a:schemeClr val="dk1"/>
+          </a:lnRef>
+          <a:fillRef idx="1">
+            <a:schemeClr val="lt1"/>
+          </a:fillRef>
+          <a:effectRef idx="0">
+            <a:schemeClr val="dk1"/>
+          </a:effectRef>
+          <a:fontRef idx="minor">
+            <a:schemeClr val="dk1"/>
+          </a:fontRef>
+        </p:style>
+        <p:txBody>
+          <a:bodyPr rtlCol="0" anchor="ctr"/>
+          <a:lstStyle/>
+          <a:p>
+            <a:pPr algn="ctr"/>
+            <a:endParaRPr lang="en-IN"/>
+          </a:p>
+        </p:txBody>
+      </p:sp>
+      <p:cxnSp>
+        <p:nvCxnSpPr>
+          <p:cNvPr id="75" name="Straight Arrow Connector 74">
+            <a:extLst>
+              <a:ext uri="{FF2B5EF4-FFF2-40B4-BE49-F238E27FC236}">
+                <a16:creationId xmlns:a16="http://schemas.microsoft.com/office/drawing/2014/main" id="{DF30614E-9BBB-25D5-849D-84AB8BC6DF11}"/>
+              </a:ext>
+            </a:extLst>
+          </p:cNvPr>
+          <p:cNvCxnSpPr>
+            <a:cxnSpLocks/>
+          </p:cNvCxnSpPr>
+          <p:nvPr/>
+        </p:nvCxnSpPr>
+        <p:spPr>
+          <a:xfrm>
+            <a:off x="4783020" y="2081880"/>
+            <a:ext cx="0" cy="402240"/>
+          </a:xfrm>
+          <a:prstGeom prst="straightConnector1">
+            <a:avLst/>
+          </a:prstGeom>
+          <a:ln>
+            <a:tailEnd type="triangle"/>
+          </a:ln>
+        </p:spPr>
+        <p:style>
+          <a:lnRef idx="2">
+            <a:schemeClr val="dk1"/>
+          </a:lnRef>
+          <a:fillRef idx="1">
+            <a:schemeClr val="lt1"/>
+          </a:fillRef>
+          <a:effectRef idx="0">
+            <a:schemeClr val="dk1"/>
+          </a:effectRef>
+          <a:fontRef idx="minor">
+            <a:schemeClr val="dk1"/>
+          </a:fontRef>
+        </p:style>
+      </p:cxnSp>
+      <p:cxnSp>
+        <p:nvCxnSpPr>
+          <p:cNvPr id="76" name="Straight Arrow Connector 75">
+            <a:extLst>
+              <a:ext uri="{FF2B5EF4-FFF2-40B4-BE49-F238E27FC236}">
+                <a16:creationId xmlns:a16="http://schemas.microsoft.com/office/drawing/2014/main" id="{2E5ED042-46DC-28D3-9D12-508F0EBBC01B}"/>
+              </a:ext>
+            </a:extLst>
+          </p:cNvPr>
+          <p:cNvCxnSpPr>
+            <a:cxnSpLocks/>
+          </p:cNvCxnSpPr>
+          <p:nvPr/>
+        </p:nvCxnSpPr>
+        <p:spPr>
+          <a:xfrm>
+            <a:off x="7421882" y="2081880"/>
+            <a:ext cx="0" cy="402240"/>
+          </a:xfrm>
+          <a:prstGeom prst="straightConnector1">
+            <a:avLst/>
+          </a:prstGeom>
+          <a:ln>
+            <a:tailEnd type="triangle"/>
+          </a:ln>
+        </p:spPr>
+        <p:style>
+          <a:lnRef idx="2">
+            <a:schemeClr val="dk1"/>
+          </a:lnRef>
+          <a:fillRef idx="1">
+            <a:schemeClr val="lt1"/>
+          </a:fillRef>
+          <a:effectRef idx="0">
+            <a:schemeClr val="dk1"/>
+          </a:effectRef>
+          <a:fontRef idx="minor">
+            <a:schemeClr val="dk1"/>
+          </a:fontRef>
+        </p:style>
+      </p:cxnSp>
+      <p:cxnSp>
+        <p:nvCxnSpPr>
+          <p:cNvPr id="77" name="Straight Arrow Connector 76">
+            <a:extLst>
+              <a:ext uri="{FF2B5EF4-FFF2-40B4-BE49-F238E27FC236}">
+                <a16:creationId xmlns:a16="http://schemas.microsoft.com/office/drawing/2014/main" id="{A60B8493-1B43-CDE7-9A95-21ADD71DF4F8}"/>
+              </a:ext>
+            </a:extLst>
+          </p:cNvPr>
+          <p:cNvCxnSpPr>
+            <a:cxnSpLocks/>
+          </p:cNvCxnSpPr>
+          <p:nvPr/>
+        </p:nvCxnSpPr>
+        <p:spPr>
+          <a:xfrm>
+            <a:off x="10441942" y="2081880"/>
+            <a:ext cx="0" cy="402240"/>
+          </a:xfrm>
+          <a:prstGeom prst="straightConnector1">
+            <a:avLst/>
+          </a:prstGeom>
+          <a:ln>
+            <a:tailEnd type="triangle"/>
+          </a:ln>
+        </p:spPr>
+        <p:style>
+          <a:lnRef idx="2">
+            <a:schemeClr val="dk1"/>
+          </a:lnRef>
+          <a:fillRef idx="1">
+            <a:schemeClr val="lt1"/>
+          </a:fillRef>
+          <a:effectRef idx="0">
+            <a:schemeClr val="dk1"/>
+          </a:effectRef>
+          <a:fontRef idx="minor">
+            <a:schemeClr val="dk1"/>
+          </a:fontRef>
+        </p:style>
+      </p:cxnSp>
+      <p:cxnSp>
+        <p:nvCxnSpPr>
+          <p:cNvPr id="78" name="Straight Arrow Connector 77">
+            <a:extLst>
+              <a:ext uri="{FF2B5EF4-FFF2-40B4-BE49-F238E27FC236}">
+                <a16:creationId xmlns:a16="http://schemas.microsoft.com/office/drawing/2014/main" id="{2B68660C-D5A6-8EFA-9AB1-991962EB5F96}"/>
+              </a:ext>
+            </a:extLst>
+          </p:cNvPr>
+          <p:cNvCxnSpPr>
+            <a:cxnSpLocks/>
+            <a:stCxn id="55" idx="2"/>
+          </p:cNvCxnSpPr>
+          <p:nvPr/>
+        </p:nvCxnSpPr>
+        <p:spPr>
+          <a:xfrm flipH="1">
+            <a:off x="2069704" y="2798643"/>
+            <a:ext cx="5278" cy="402240"/>
+          </a:xfrm>
+          <a:prstGeom prst="straightConnector1">
+            <a:avLst/>
+          </a:prstGeom>
+          <a:ln>
+            <a:tailEnd type="triangle"/>
+          </a:ln>
+        </p:spPr>
+        <p:style>
+          <a:lnRef idx="2">
+            <a:schemeClr val="dk1"/>
+          </a:lnRef>
+          <a:fillRef idx="1">
+            <a:schemeClr val="lt1"/>
+          </a:fillRef>
+          <a:effectRef idx="0">
+            <a:schemeClr val="dk1"/>
+          </a:effectRef>
+          <a:fontRef idx="minor">
+            <a:schemeClr val="dk1"/>
+          </a:fontRef>
+        </p:style>
+      </p:cxnSp>
+      <p:cxnSp>
+        <p:nvCxnSpPr>
+          <p:cNvPr id="80" name="Straight Arrow Connector 79">
+            <a:extLst>
+              <a:ext uri="{FF2B5EF4-FFF2-40B4-BE49-F238E27FC236}">
+                <a16:creationId xmlns:a16="http://schemas.microsoft.com/office/drawing/2014/main" id="{C3B86C34-3ACC-1D61-F124-608CD5EBB0A7}"/>
+              </a:ext>
+            </a:extLst>
+          </p:cNvPr>
+          <p:cNvCxnSpPr>
+            <a:cxnSpLocks/>
+          </p:cNvCxnSpPr>
+          <p:nvPr/>
+        </p:nvCxnSpPr>
+        <p:spPr>
+          <a:xfrm flipH="1">
+            <a:off x="4777742" y="2798643"/>
+            <a:ext cx="5278" cy="402240"/>
+          </a:xfrm>
+          <a:prstGeom prst="straightConnector1">
+            <a:avLst/>
+          </a:prstGeom>
+          <a:ln>
+            <a:tailEnd type="triangle"/>
+          </a:ln>
+        </p:spPr>
+        <p:style>
+          <a:lnRef idx="2">
+            <a:schemeClr val="dk1"/>
+          </a:lnRef>
+          <a:fillRef idx="1">
+            <a:schemeClr val="lt1"/>
+          </a:fillRef>
+          <a:effectRef idx="0">
+            <a:schemeClr val="dk1"/>
+          </a:effectRef>
+          <a:fontRef idx="minor">
+            <a:schemeClr val="dk1"/>
+          </a:fontRef>
+        </p:style>
+      </p:cxnSp>
+      <p:cxnSp>
+        <p:nvCxnSpPr>
+          <p:cNvPr id="81" name="Straight Arrow Connector 80">
+            <a:extLst>
+              <a:ext uri="{FF2B5EF4-FFF2-40B4-BE49-F238E27FC236}">
+                <a16:creationId xmlns:a16="http://schemas.microsoft.com/office/drawing/2014/main" id="{1B68C4F4-D716-1F85-CE0F-ED8D47BE386E}"/>
+              </a:ext>
+            </a:extLst>
+          </p:cNvPr>
+          <p:cNvCxnSpPr>
+            <a:cxnSpLocks/>
+          </p:cNvCxnSpPr>
+          <p:nvPr/>
+        </p:nvCxnSpPr>
+        <p:spPr>
+          <a:xfrm flipH="1">
+            <a:off x="7406343" y="2798643"/>
+            <a:ext cx="5278" cy="402240"/>
+          </a:xfrm>
+          <a:prstGeom prst="straightConnector1">
+            <a:avLst/>
+          </a:prstGeom>
+          <a:ln>
+            <a:tailEnd type="triangle"/>
+          </a:ln>
+        </p:spPr>
+        <p:style>
+          <a:lnRef idx="2">
+            <a:schemeClr val="dk1"/>
+          </a:lnRef>
+          <a:fillRef idx="1">
+            <a:schemeClr val="lt1"/>
+          </a:fillRef>
+          <a:effectRef idx="0">
+            <a:schemeClr val="dk1"/>
+          </a:effectRef>
+          <a:fontRef idx="minor">
+            <a:schemeClr val="dk1"/>
+          </a:fontRef>
+        </p:style>
+      </p:cxnSp>
+      <p:cxnSp>
+        <p:nvCxnSpPr>
+          <p:cNvPr id="82" name="Straight Arrow Connector 81">
+            <a:extLst>
+              <a:ext uri="{FF2B5EF4-FFF2-40B4-BE49-F238E27FC236}">
+                <a16:creationId xmlns:a16="http://schemas.microsoft.com/office/drawing/2014/main" id="{D39B249F-3C04-80B3-DC16-150C75CCB3BF}"/>
+              </a:ext>
+            </a:extLst>
+          </p:cNvPr>
+          <p:cNvCxnSpPr>
+            <a:cxnSpLocks/>
+          </p:cNvCxnSpPr>
+          <p:nvPr/>
+        </p:nvCxnSpPr>
+        <p:spPr>
+          <a:xfrm flipH="1">
+            <a:off x="10441942" y="2794740"/>
+            <a:ext cx="5278" cy="402240"/>
+          </a:xfrm>
+          <a:prstGeom prst="straightConnector1">
+            <a:avLst/>
+          </a:prstGeom>
+          <a:ln>
+            <a:tailEnd type="triangle"/>
+          </a:ln>
+        </p:spPr>
+        <p:style>
+          <a:lnRef idx="2">
+            <a:schemeClr val="dk1"/>
+          </a:lnRef>
+          <a:fillRef idx="1">
+            <a:schemeClr val="lt1"/>
+          </a:fillRef>
+          <a:effectRef idx="0">
+            <a:schemeClr val="dk1"/>
+          </a:effectRef>
+          <a:fontRef idx="minor">
+            <a:schemeClr val="dk1"/>
+          </a:fontRef>
+        </p:style>
+      </p:cxnSp>
+      <p:sp>
+        <p:nvSpPr>
+          <p:cNvPr id="83" name="Rectangle 82">
+            <a:extLst>
+              <a:ext uri="{FF2B5EF4-FFF2-40B4-BE49-F238E27FC236}">
+                <a16:creationId xmlns:a16="http://schemas.microsoft.com/office/drawing/2014/main" id="{510417A9-528B-461E-D3B1-196642E4A227}"/>
+              </a:ext>
+            </a:extLst>
+          </p:cNvPr>
+          <p:cNvSpPr/>
+          <p:nvPr/>
+        </p:nvSpPr>
+        <p:spPr>
+          <a:xfrm>
+            <a:off x="4428242" y="3921066"/>
+            <a:ext cx="360000" cy="360000"/>
+          </a:xfrm>
+          <a:prstGeom prst="rect">
+            <a:avLst/>
+          </a:prstGeom>
+        </p:spPr>
+        <p:style>
+          <a:lnRef idx="2">
+            <a:schemeClr val="dk1"/>
+          </a:lnRef>
+          <a:fillRef idx="1">
+            <a:schemeClr val="lt1"/>
+          </a:fillRef>
+          <a:effectRef idx="0">
+            <a:schemeClr val="dk1"/>
+          </a:effectRef>
+          <a:fontRef idx="minor">
+            <a:schemeClr val="dk1"/>
+          </a:fontRef>
+        </p:style>
+        <p:txBody>
+          <a:bodyPr rtlCol="0" anchor="ctr"/>
+          <a:lstStyle/>
+          <a:p>
+            <a:pPr algn="ctr"/>
+            <a:endParaRPr lang="en-IN"/>
+          </a:p>
+        </p:txBody>
+      </p:sp>
+      <p:sp>
+        <p:nvSpPr>
+          <p:cNvPr id="84" name="Rectangle 83">
+            <a:extLst>
+              <a:ext uri="{FF2B5EF4-FFF2-40B4-BE49-F238E27FC236}">
+                <a16:creationId xmlns:a16="http://schemas.microsoft.com/office/drawing/2014/main" id="{ABC10D29-9450-C322-ABEC-CB7DCD6D73A1}"/>
+              </a:ext>
+            </a:extLst>
+          </p:cNvPr>
+          <p:cNvSpPr/>
+          <p:nvPr/>
+        </p:nvSpPr>
+        <p:spPr>
+          <a:xfrm>
+            <a:off x="4777742" y="3921066"/>
+            <a:ext cx="360000" cy="360000"/>
+          </a:xfrm>
+          <a:prstGeom prst="rect">
+            <a:avLst/>
+          </a:prstGeom>
+        </p:spPr>
+        <p:style>
+          <a:lnRef idx="2">
+            <a:schemeClr val="dk1"/>
+          </a:lnRef>
+          <a:fillRef idx="1">
+            <a:schemeClr val="lt1"/>
+          </a:fillRef>
+          <a:effectRef idx="0">
+            <a:schemeClr val="dk1"/>
+          </a:effectRef>
+          <a:fontRef idx="minor">
+            <a:schemeClr val="dk1"/>
+          </a:fontRef>
+        </p:style>
+        <p:txBody>
+          <a:bodyPr rtlCol="0" anchor="ctr"/>
+          <a:lstStyle/>
+          <a:p>
+            <a:pPr algn="ctr"/>
+            <a:endParaRPr lang="en-IN"/>
+          </a:p>
+        </p:txBody>
+      </p:sp>
+      <p:sp>
+        <p:nvSpPr>
+          <p:cNvPr id="85" name="Rectangle 84">
+            <a:extLst>
+              <a:ext uri="{FF2B5EF4-FFF2-40B4-BE49-F238E27FC236}">
+                <a16:creationId xmlns:a16="http://schemas.microsoft.com/office/drawing/2014/main" id="{E21A9694-A893-EF0D-0F80-EEE250818736}"/>
+              </a:ext>
+            </a:extLst>
+          </p:cNvPr>
+          <p:cNvSpPr/>
+          <p:nvPr/>
+        </p:nvSpPr>
+        <p:spPr>
+          <a:xfrm>
+            <a:off x="4428242" y="4275306"/>
+            <a:ext cx="360000" cy="360000"/>
+          </a:xfrm>
+          <a:prstGeom prst="rect">
+            <a:avLst/>
+          </a:prstGeom>
+        </p:spPr>
+        <p:style>
+          <a:lnRef idx="2">
+            <a:schemeClr val="dk1"/>
+          </a:lnRef>
+          <a:fillRef idx="1">
+            <a:schemeClr val="lt1"/>
+          </a:fillRef>
+          <a:effectRef idx="0">
+            <a:schemeClr val="dk1"/>
+          </a:effectRef>
+          <a:fontRef idx="minor">
+            <a:schemeClr val="dk1"/>
+          </a:fontRef>
+        </p:style>
+        <p:txBody>
+          <a:bodyPr rtlCol="0" anchor="ctr"/>
+          <a:lstStyle/>
+          <a:p>
+            <a:pPr algn="ctr"/>
+            <a:endParaRPr lang="en-IN"/>
+          </a:p>
+        </p:txBody>
+      </p:sp>
+      <p:sp>
+        <p:nvSpPr>
+          <p:cNvPr id="86" name="Rectangle 85">
+            <a:extLst>
+              <a:ext uri="{FF2B5EF4-FFF2-40B4-BE49-F238E27FC236}">
+                <a16:creationId xmlns:a16="http://schemas.microsoft.com/office/drawing/2014/main" id="{97275523-0651-BEAC-73A5-605D5D48945D}"/>
+              </a:ext>
+            </a:extLst>
+          </p:cNvPr>
+          <p:cNvSpPr/>
+          <p:nvPr/>
+        </p:nvSpPr>
+        <p:spPr>
+          <a:xfrm>
+            <a:off x="4777742" y="4275306"/>
+            <a:ext cx="360000" cy="360000"/>
+          </a:xfrm>
+          <a:prstGeom prst="rect">
+            <a:avLst/>
+          </a:prstGeom>
+        </p:spPr>
+        <p:style>
+          <a:lnRef idx="2">
+            <a:schemeClr val="dk1"/>
+          </a:lnRef>
+          <a:fillRef idx="1">
+            <a:schemeClr val="lt1"/>
+          </a:fillRef>
+          <a:effectRef idx="0">
+            <a:schemeClr val="dk1"/>
+          </a:effectRef>
+          <a:fontRef idx="minor">
+            <a:schemeClr val="dk1"/>
+          </a:fontRef>
+        </p:style>
+        <p:txBody>
+          <a:bodyPr rtlCol="0" anchor="ctr"/>
+          <a:lstStyle/>
+          <a:p>
+            <a:pPr algn="ctr"/>
+            <a:endParaRPr lang="en-IN"/>
+          </a:p>
+        </p:txBody>
+      </p:sp>
+      <p:sp>
+        <p:nvSpPr>
+          <p:cNvPr id="87" name="Rectangle 86">
+            <a:extLst>
+              <a:ext uri="{FF2B5EF4-FFF2-40B4-BE49-F238E27FC236}">
+                <a16:creationId xmlns:a16="http://schemas.microsoft.com/office/drawing/2014/main" id="{D1F46B3B-52E5-D5E2-EC02-BAE5E8FB1F2D}"/>
+              </a:ext>
+            </a:extLst>
+          </p:cNvPr>
+          <p:cNvSpPr/>
+          <p:nvPr/>
+        </p:nvSpPr>
+        <p:spPr>
+          <a:xfrm>
+            <a:off x="7056843" y="3921066"/>
+            <a:ext cx="360000" cy="360000"/>
+          </a:xfrm>
+          <a:prstGeom prst="rect">
+            <a:avLst/>
+          </a:prstGeom>
+        </p:spPr>
+        <p:style>
+          <a:lnRef idx="2">
+            <a:schemeClr val="dk1"/>
+          </a:lnRef>
+          <a:fillRef idx="1">
+            <a:schemeClr val="lt1"/>
+          </a:fillRef>
+          <a:effectRef idx="0">
+            <a:schemeClr val="dk1"/>
+          </a:effectRef>
+          <a:fontRef idx="minor">
+            <a:schemeClr val="dk1"/>
+          </a:fontRef>
+        </p:style>
+        <p:txBody>
+          <a:bodyPr rtlCol="0" anchor="ctr"/>
+          <a:lstStyle/>
+          <a:p>
+            <a:pPr algn="ctr"/>
+            <a:endParaRPr lang="en-IN"/>
+          </a:p>
+        </p:txBody>
+      </p:sp>
+      <p:sp>
+        <p:nvSpPr>
+          <p:cNvPr id="88" name="Rectangle 87">
+            <a:extLst>
+              <a:ext uri="{FF2B5EF4-FFF2-40B4-BE49-F238E27FC236}">
+                <a16:creationId xmlns:a16="http://schemas.microsoft.com/office/drawing/2014/main" id="{19A05D9A-B0D7-D244-EF9C-E3F65BD487B5}"/>
+              </a:ext>
+            </a:extLst>
+          </p:cNvPr>
+          <p:cNvSpPr/>
+          <p:nvPr/>
+        </p:nvSpPr>
+        <p:spPr>
+          <a:xfrm>
+            <a:off x="7406343" y="3921066"/>
+            <a:ext cx="360000" cy="360000"/>
+          </a:xfrm>
+          <a:prstGeom prst="rect">
+            <a:avLst/>
+          </a:prstGeom>
+        </p:spPr>
+        <p:style>
+          <a:lnRef idx="2">
+            <a:schemeClr val="dk1"/>
+          </a:lnRef>
+          <a:fillRef idx="1">
+            <a:schemeClr val="lt1"/>
+          </a:fillRef>
+          <a:effectRef idx="0">
+            <a:schemeClr val="dk1"/>
+          </a:effectRef>
+          <a:fontRef idx="minor">
+            <a:schemeClr val="dk1"/>
+          </a:fontRef>
+        </p:style>
+        <p:txBody>
+          <a:bodyPr rtlCol="0" anchor="ctr"/>
+          <a:lstStyle/>
+          <a:p>
+            <a:pPr algn="ctr"/>
+            <a:endParaRPr lang="en-IN"/>
+          </a:p>
+        </p:txBody>
+      </p:sp>
+      <p:sp>
+        <p:nvSpPr>
+          <p:cNvPr id="89" name="Rectangle 88">
+            <a:extLst>
+              <a:ext uri="{FF2B5EF4-FFF2-40B4-BE49-F238E27FC236}">
+                <a16:creationId xmlns:a16="http://schemas.microsoft.com/office/drawing/2014/main" id="{A88FDDC8-648D-1CD5-39C6-5D843E53861D}"/>
+              </a:ext>
+            </a:extLst>
+          </p:cNvPr>
+          <p:cNvSpPr/>
+          <p:nvPr/>
+        </p:nvSpPr>
+        <p:spPr>
+          <a:xfrm>
+            <a:off x="7056843" y="4275306"/>
+            <a:ext cx="360000" cy="360000"/>
+          </a:xfrm>
+          <a:prstGeom prst="rect">
+            <a:avLst/>
+          </a:prstGeom>
+        </p:spPr>
+        <p:style>
+          <a:lnRef idx="2">
+            <a:schemeClr val="dk1"/>
+          </a:lnRef>
+          <a:fillRef idx="1">
+            <a:schemeClr val="lt1"/>
+          </a:fillRef>
+          <a:effectRef idx="0">
+            <a:schemeClr val="dk1"/>
+          </a:effectRef>
+          <a:fontRef idx="minor">
+            <a:schemeClr val="dk1"/>
+          </a:fontRef>
+        </p:style>
+        <p:txBody>
+          <a:bodyPr rtlCol="0" anchor="ctr"/>
+          <a:lstStyle/>
+          <a:p>
+            <a:pPr algn="ctr"/>
+            <a:endParaRPr lang="en-IN"/>
+          </a:p>
+        </p:txBody>
+      </p:sp>
+      <p:sp>
+        <p:nvSpPr>
+          <p:cNvPr id="90" name="Rectangle 89">
+            <a:extLst>
+              <a:ext uri="{FF2B5EF4-FFF2-40B4-BE49-F238E27FC236}">
+                <a16:creationId xmlns:a16="http://schemas.microsoft.com/office/drawing/2014/main" id="{740B5D58-A85E-2901-69E4-BBB50CFA04BE}"/>
+              </a:ext>
+            </a:extLst>
+          </p:cNvPr>
+          <p:cNvSpPr/>
+          <p:nvPr/>
+        </p:nvSpPr>
+        <p:spPr>
+          <a:xfrm>
+            <a:off x="7406343" y="4275306"/>
+            <a:ext cx="360000" cy="360000"/>
+          </a:xfrm>
+          <a:prstGeom prst="rect">
+            <a:avLst/>
+          </a:prstGeom>
+        </p:spPr>
+        <p:style>
+          <a:lnRef idx="2">
+            <a:schemeClr val="dk1"/>
+          </a:lnRef>
+          <a:fillRef idx="1">
+            <a:schemeClr val="lt1"/>
+          </a:fillRef>
+          <a:effectRef idx="0">
+            <a:schemeClr val="dk1"/>
+          </a:effectRef>
+          <a:fontRef idx="minor">
+            <a:schemeClr val="dk1"/>
+          </a:fontRef>
+        </p:style>
+        <p:txBody>
+          <a:bodyPr rtlCol="0" anchor="ctr"/>
+          <a:lstStyle/>
+          <a:p>
+            <a:pPr algn="ctr"/>
+            <a:endParaRPr lang="en-IN"/>
+          </a:p>
+        </p:txBody>
+      </p:sp>
+      <p:sp>
+        <p:nvSpPr>
+          <p:cNvPr id="91" name="Rectangle 90">
+            <a:extLst>
+              <a:ext uri="{FF2B5EF4-FFF2-40B4-BE49-F238E27FC236}">
+                <a16:creationId xmlns:a16="http://schemas.microsoft.com/office/drawing/2014/main" id="{98B5A6AC-6E65-ADF0-E574-4FBEC6680502}"/>
+              </a:ext>
+            </a:extLst>
+          </p:cNvPr>
+          <p:cNvSpPr/>
+          <p:nvPr/>
+        </p:nvSpPr>
+        <p:spPr>
+          <a:xfrm>
+            <a:off x="10092442" y="3913260"/>
+            <a:ext cx="360000" cy="360000"/>
+          </a:xfrm>
+          <a:prstGeom prst="rect">
+            <a:avLst/>
+          </a:prstGeom>
+        </p:spPr>
+        <p:style>
+          <a:lnRef idx="2">
+            <a:schemeClr val="dk1"/>
+          </a:lnRef>
+          <a:fillRef idx="1">
+            <a:schemeClr val="lt1"/>
+          </a:fillRef>
+          <a:effectRef idx="0">
+            <a:schemeClr val="dk1"/>
+          </a:effectRef>
+          <a:fontRef idx="minor">
+            <a:schemeClr val="dk1"/>
+          </a:fontRef>
+        </p:style>
+        <p:txBody>
+          <a:bodyPr rtlCol="0" anchor="ctr"/>
+          <a:lstStyle/>
+          <a:p>
+            <a:pPr algn="ctr"/>
+            <a:endParaRPr lang="en-IN"/>
+          </a:p>
+        </p:txBody>
+      </p:sp>
+      <p:sp>
+        <p:nvSpPr>
+          <p:cNvPr id="92" name="Rectangle 91">
+            <a:extLst>
+              <a:ext uri="{FF2B5EF4-FFF2-40B4-BE49-F238E27FC236}">
+                <a16:creationId xmlns:a16="http://schemas.microsoft.com/office/drawing/2014/main" id="{80476B26-E358-71A7-0994-DE41DD953B94}"/>
+              </a:ext>
+            </a:extLst>
+          </p:cNvPr>
+          <p:cNvSpPr/>
+          <p:nvPr/>
+        </p:nvSpPr>
+        <p:spPr>
+          <a:xfrm>
+            <a:off x="10441942" y="3913260"/>
+            <a:ext cx="360000" cy="360000"/>
+          </a:xfrm>
+          <a:prstGeom prst="rect">
+            <a:avLst/>
+          </a:prstGeom>
+        </p:spPr>
+        <p:style>
+          <a:lnRef idx="2">
+            <a:schemeClr val="dk1"/>
+          </a:lnRef>
+          <a:fillRef idx="1">
+            <a:schemeClr val="lt1"/>
+          </a:fillRef>
+          <a:effectRef idx="0">
+            <a:schemeClr val="dk1"/>
+          </a:effectRef>
+          <a:fontRef idx="minor">
+            <a:schemeClr val="dk1"/>
+          </a:fontRef>
+        </p:style>
+        <p:txBody>
+          <a:bodyPr rtlCol="0" anchor="ctr"/>
+          <a:lstStyle/>
+          <a:p>
+            <a:pPr algn="ctr"/>
+            <a:endParaRPr lang="en-IN"/>
+          </a:p>
+        </p:txBody>
+      </p:sp>
+      <p:sp>
+        <p:nvSpPr>
+          <p:cNvPr id="93" name="Rectangle 92">
+            <a:extLst>
+              <a:ext uri="{FF2B5EF4-FFF2-40B4-BE49-F238E27FC236}">
+                <a16:creationId xmlns:a16="http://schemas.microsoft.com/office/drawing/2014/main" id="{26586D94-F902-5F2F-DC34-1CE9A38878E4}"/>
+              </a:ext>
+            </a:extLst>
+          </p:cNvPr>
+          <p:cNvSpPr/>
+          <p:nvPr/>
+        </p:nvSpPr>
+        <p:spPr>
+          <a:xfrm>
+            <a:off x="10092442" y="4267500"/>
+            <a:ext cx="360000" cy="360000"/>
+          </a:xfrm>
+          <a:prstGeom prst="rect">
+            <a:avLst/>
+          </a:prstGeom>
+        </p:spPr>
+        <p:style>
+          <a:lnRef idx="2">
+            <a:schemeClr val="dk1"/>
+          </a:lnRef>
+          <a:fillRef idx="1">
+            <a:schemeClr val="lt1"/>
+          </a:fillRef>
+          <a:effectRef idx="0">
+            <a:schemeClr val="dk1"/>
+          </a:effectRef>
+          <a:fontRef idx="minor">
+            <a:schemeClr val="dk1"/>
+          </a:fontRef>
+        </p:style>
+        <p:txBody>
+          <a:bodyPr rtlCol="0" anchor="ctr"/>
+          <a:lstStyle/>
+          <a:p>
+            <a:pPr algn="ctr"/>
+            <a:endParaRPr lang="en-IN"/>
+          </a:p>
+        </p:txBody>
+      </p:sp>
+      <p:sp>
+        <p:nvSpPr>
+          <p:cNvPr id="94" name="Rectangle 93">
+            <a:extLst>
+              <a:ext uri="{FF2B5EF4-FFF2-40B4-BE49-F238E27FC236}">
+                <a16:creationId xmlns:a16="http://schemas.microsoft.com/office/drawing/2014/main" id="{68A9AD0E-B66D-DD1A-19F4-9264AB6D1FA5}"/>
+              </a:ext>
+            </a:extLst>
+          </p:cNvPr>
+          <p:cNvSpPr/>
+          <p:nvPr/>
+        </p:nvSpPr>
+        <p:spPr>
+          <a:xfrm>
+            <a:off x="10441942" y="4267500"/>
+            <a:ext cx="360000" cy="360000"/>
+          </a:xfrm>
+          <a:prstGeom prst="rect">
+            <a:avLst/>
+          </a:prstGeom>
+        </p:spPr>
+        <p:style>
+          <a:lnRef idx="2">
+            <a:schemeClr val="dk1"/>
+          </a:lnRef>
+          <a:fillRef idx="1">
+            <a:schemeClr val="lt1"/>
+          </a:fillRef>
+          <a:effectRef idx="0">
+            <a:schemeClr val="dk1"/>
+          </a:effectRef>
+          <a:fontRef idx="minor">
+            <a:schemeClr val="dk1"/>
+          </a:fontRef>
+        </p:style>
+        <p:txBody>
+          <a:bodyPr rtlCol="0" anchor="ctr"/>
+          <a:lstStyle/>
+          <a:p>
+            <a:pPr algn="ctr"/>
+            <a:endParaRPr lang="en-IN"/>
+          </a:p>
+        </p:txBody>
+      </p:sp>
+      <p:sp>
+        <p:nvSpPr>
+          <p:cNvPr id="95" name="Diamond 94">
+            <a:extLst>
+              <a:ext uri="{FF2B5EF4-FFF2-40B4-BE49-F238E27FC236}">
+                <a16:creationId xmlns:a16="http://schemas.microsoft.com/office/drawing/2014/main" id="{1C53E5B6-77FA-B442-603A-7AC1D9A20127}"/>
+              </a:ext>
+            </a:extLst>
+          </p:cNvPr>
+          <p:cNvSpPr/>
+          <p:nvPr/>
+        </p:nvSpPr>
+        <p:spPr>
+          <a:xfrm>
+            <a:off x="5449200" y="4744623"/>
+            <a:ext cx="1304921" cy="1045896"/>
+          </a:xfrm>
+          <a:prstGeom prst="diamond">
+            <a:avLst/>
+          </a:prstGeom>
+        </p:spPr>
+        <p:style>
+          <a:lnRef idx="2">
+            <a:schemeClr val="dk1"/>
+          </a:lnRef>
+          <a:fillRef idx="1">
+            <a:schemeClr val="lt1"/>
+          </a:fillRef>
+          <a:effectRef idx="0">
+            <a:schemeClr val="dk1"/>
+          </a:effectRef>
+          <a:fontRef idx="minor">
+            <a:schemeClr val="dk1"/>
+          </a:fontRef>
+        </p:style>
+        <p:txBody>
+          <a:bodyPr rtlCol="0" anchor="ctr"/>
+          <a:lstStyle/>
+          <a:p>
+            <a:pPr algn="ctr"/>
+            <a:r>
+              <a:rPr lang="en-US" sz="1050" dirty="0"/>
+              <a:t>Fusion Method Based on STD</a:t>
+            </a:r>
+            <a:endParaRPr lang="en-IN" sz="1050" dirty="0"/>
+          </a:p>
+        </p:txBody>
+      </p:sp>
+      <p:sp>
+        <p:nvSpPr>
+          <p:cNvPr id="96" name="Rectangle 95">
+            <a:extLst>
+              <a:ext uri="{FF2B5EF4-FFF2-40B4-BE49-F238E27FC236}">
+                <a16:creationId xmlns:a16="http://schemas.microsoft.com/office/drawing/2014/main" id="{963AC5EB-2721-6ACC-D124-4D8D9A98E1FD}"/>
+              </a:ext>
+            </a:extLst>
+          </p:cNvPr>
+          <p:cNvSpPr/>
+          <p:nvPr/>
+        </p:nvSpPr>
+        <p:spPr>
+          <a:xfrm>
+            <a:off x="1738744" y="3189333"/>
+            <a:ext cx="682920" cy="322170"/>
+          </a:xfrm>
+          <a:prstGeom prst="rect">
+            <a:avLst/>
+          </a:prstGeom>
+        </p:spPr>
+        <p:style>
+          <a:lnRef idx="2">
+            <a:schemeClr val="dk1"/>
+          </a:lnRef>
+          <a:fillRef idx="1">
+            <a:schemeClr val="lt1"/>
+          </a:fillRef>
+          <a:effectRef idx="0">
+            <a:schemeClr val="dk1"/>
+          </a:effectRef>
+          <a:fontRef idx="minor">
+            <a:schemeClr val="dk1"/>
+          </a:fontRef>
+        </p:style>
+        <p:txBody>
+          <a:bodyPr rtlCol="0" anchor="ctr"/>
+          <a:lstStyle/>
+          <a:p>
+            <a:pPr algn="ctr"/>
+            <a:r>
+              <a:rPr lang="en-US" dirty="0"/>
+              <a:t>DWT</a:t>
+            </a:r>
+            <a:endParaRPr lang="en-IN" dirty="0"/>
+          </a:p>
+        </p:txBody>
+      </p:sp>
+      <p:sp>
+        <p:nvSpPr>
+          <p:cNvPr id="97" name="Rectangle 96">
+            <a:extLst>
+              <a:ext uri="{FF2B5EF4-FFF2-40B4-BE49-F238E27FC236}">
+                <a16:creationId xmlns:a16="http://schemas.microsoft.com/office/drawing/2014/main" id="{D5A699CA-4F70-82B4-DADD-902AE1252A0F}"/>
+              </a:ext>
+            </a:extLst>
+          </p:cNvPr>
+          <p:cNvSpPr/>
+          <p:nvPr/>
+        </p:nvSpPr>
+        <p:spPr>
+          <a:xfrm>
+            <a:off x="4444198" y="3189333"/>
+            <a:ext cx="682920" cy="322170"/>
+          </a:xfrm>
+          <a:prstGeom prst="rect">
+            <a:avLst/>
+          </a:prstGeom>
+        </p:spPr>
+        <p:style>
+          <a:lnRef idx="2">
+            <a:schemeClr val="dk1"/>
+          </a:lnRef>
+          <a:fillRef idx="1">
+            <a:schemeClr val="lt1"/>
+          </a:fillRef>
+          <a:effectRef idx="0">
+            <a:schemeClr val="dk1"/>
+          </a:effectRef>
+          <a:fontRef idx="minor">
+            <a:schemeClr val="dk1"/>
+          </a:fontRef>
+        </p:style>
+        <p:txBody>
+          <a:bodyPr rtlCol="0" anchor="ctr"/>
+          <a:lstStyle/>
+          <a:p>
+            <a:pPr algn="ctr"/>
+            <a:r>
+              <a:rPr lang="en-US" dirty="0"/>
+              <a:t>DWT</a:t>
+            </a:r>
+            <a:endParaRPr lang="en-IN" dirty="0"/>
+          </a:p>
+        </p:txBody>
+      </p:sp>
+      <p:sp>
+        <p:nvSpPr>
+          <p:cNvPr id="98" name="Rectangle 97">
+            <a:extLst>
+              <a:ext uri="{FF2B5EF4-FFF2-40B4-BE49-F238E27FC236}">
+                <a16:creationId xmlns:a16="http://schemas.microsoft.com/office/drawing/2014/main" id="{93C257AF-958B-3311-F571-7593C029947C}"/>
+              </a:ext>
+            </a:extLst>
+          </p:cNvPr>
+          <p:cNvSpPr/>
+          <p:nvPr/>
+        </p:nvSpPr>
+        <p:spPr>
+          <a:xfrm>
+            <a:off x="7064884" y="3216918"/>
+            <a:ext cx="682920" cy="322170"/>
+          </a:xfrm>
+          <a:prstGeom prst="rect">
+            <a:avLst/>
+          </a:prstGeom>
+        </p:spPr>
+        <p:style>
+          <a:lnRef idx="2">
+            <a:schemeClr val="dk1"/>
+          </a:lnRef>
+          <a:fillRef idx="1">
+            <a:schemeClr val="lt1"/>
+          </a:fillRef>
+          <a:effectRef idx="0">
+            <a:schemeClr val="dk1"/>
+          </a:effectRef>
+          <a:fontRef idx="minor">
+            <a:schemeClr val="dk1"/>
+          </a:fontRef>
+        </p:style>
+        <p:txBody>
+          <a:bodyPr rtlCol="0" anchor="ctr"/>
+          <a:lstStyle/>
+          <a:p>
+            <a:pPr algn="ctr"/>
+            <a:r>
+              <a:rPr lang="en-US" dirty="0"/>
+              <a:t>DWT</a:t>
+            </a:r>
+            <a:endParaRPr lang="en-IN" dirty="0"/>
+          </a:p>
+        </p:txBody>
+      </p:sp>
+      <p:sp>
+        <p:nvSpPr>
+          <p:cNvPr id="99" name="Rectangle 98">
+            <a:extLst>
+              <a:ext uri="{FF2B5EF4-FFF2-40B4-BE49-F238E27FC236}">
+                <a16:creationId xmlns:a16="http://schemas.microsoft.com/office/drawing/2014/main" id="{09CA9EA8-0040-2948-86F7-1AAA7E3DABF8}"/>
+              </a:ext>
+            </a:extLst>
+          </p:cNvPr>
+          <p:cNvSpPr/>
+          <p:nvPr/>
+        </p:nvSpPr>
+        <p:spPr>
+          <a:xfrm>
+            <a:off x="10100482" y="3196980"/>
+            <a:ext cx="682920" cy="322170"/>
+          </a:xfrm>
+          <a:prstGeom prst="rect">
+            <a:avLst/>
+          </a:prstGeom>
+        </p:spPr>
+        <p:style>
+          <a:lnRef idx="2">
+            <a:schemeClr val="dk1"/>
+          </a:lnRef>
+          <a:fillRef idx="1">
+            <a:schemeClr val="lt1"/>
+          </a:fillRef>
+          <a:effectRef idx="0">
+            <a:schemeClr val="dk1"/>
+          </a:effectRef>
+          <a:fontRef idx="minor">
+            <a:schemeClr val="dk1"/>
+          </a:fontRef>
+        </p:style>
+        <p:txBody>
+          <a:bodyPr rtlCol="0" anchor="ctr"/>
+          <a:lstStyle/>
+          <a:p>
+            <a:pPr algn="ctr"/>
+            <a:r>
+              <a:rPr lang="en-US" dirty="0"/>
+              <a:t>DWT</a:t>
+            </a:r>
+            <a:endParaRPr lang="en-IN" dirty="0"/>
+          </a:p>
+        </p:txBody>
+      </p:sp>
+      <p:cxnSp>
+        <p:nvCxnSpPr>
+          <p:cNvPr id="100" name="Straight Arrow Connector 99">
+            <a:extLst>
+              <a:ext uri="{FF2B5EF4-FFF2-40B4-BE49-F238E27FC236}">
+                <a16:creationId xmlns:a16="http://schemas.microsoft.com/office/drawing/2014/main" id="{D9CC28DA-5E73-EEF7-EDB7-DB80C6A4E2D4}"/>
+              </a:ext>
+            </a:extLst>
+          </p:cNvPr>
+          <p:cNvCxnSpPr>
+            <a:cxnSpLocks/>
+          </p:cNvCxnSpPr>
+          <p:nvPr/>
+        </p:nvCxnSpPr>
+        <p:spPr>
+          <a:xfrm flipH="1">
+            <a:off x="2064426" y="3519150"/>
+            <a:ext cx="5278" cy="402240"/>
+          </a:xfrm>
+          <a:prstGeom prst="straightConnector1">
+            <a:avLst/>
+          </a:prstGeom>
+          <a:ln>
+            <a:tailEnd type="triangle"/>
+          </a:ln>
+        </p:spPr>
+        <p:style>
+          <a:lnRef idx="2">
+            <a:schemeClr val="dk1"/>
+          </a:lnRef>
+          <a:fillRef idx="1">
+            <a:schemeClr val="lt1"/>
+          </a:fillRef>
+          <a:effectRef idx="0">
+            <a:schemeClr val="dk1"/>
+          </a:effectRef>
+          <a:fontRef idx="minor">
+            <a:schemeClr val="dk1"/>
+          </a:fontRef>
+        </p:style>
+      </p:cxnSp>
+      <p:cxnSp>
+        <p:nvCxnSpPr>
+          <p:cNvPr id="101" name="Straight Arrow Connector 100">
+            <a:extLst>
+              <a:ext uri="{FF2B5EF4-FFF2-40B4-BE49-F238E27FC236}">
+                <a16:creationId xmlns:a16="http://schemas.microsoft.com/office/drawing/2014/main" id="{3D1B77AF-A6FC-8E88-F7AC-DBD226AD7420}"/>
+              </a:ext>
+            </a:extLst>
+          </p:cNvPr>
+          <p:cNvCxnSpPr>
+            <a:cxnSpLocks/>
+          </p:cNvCxnSpPr>
+          <p:nvPr/>
+        </p:nvCxnSpPr>
+        <p:spPr>
+          <a:xfrm flipH="1">
+            <a:off x="4767989" y="3519150"/>
+            <a:ext cx="5278" cy="402240"/>
+          </a:xfrm>
+          <a:prstGeom prst="straightConnector1">
+            <a:avLst/>
+          </a:prstGeom>
+          <a:ln>
+            <a:tailEnd type="triangle"/>
+          </a:ln>
+        </p:spPr>
+        <p:style>
+          <a:lnRef idx="2">
+            <a:schemeClr val="dk1"/>
+          </a:lnRef>
+          <a:fillRef idx="1">
+            <a:schemeClr val="lt1"/>
+          </a:fillRef>
+          <a:effectRef idx="0">
+            <a:schemeClr val="dk1"/>
+          </a:effectRef>
+          <a:fontRef idx="minor">
+            <a:schemeClr val="dk1"/>
+          </a:fontRef>
+        </p:style>
+      </p:cxnSp>
+      <p:cxnSp>
+        <p:nvCxnSpPr>
+          <p:cNvPr id="102" name="Straight Arrow Connector 101">
+            <a:extLst>
+              <a:ext uri="{FF2B5EF4-FFF2-40B4-BE49-F238E27FC236}">
+                <a16:creationId xmlns:a16="http://schemas.microsoft.com/office/drawing/2014/main" id="{B36B72AC-8710-14DF-6736-04A6A9B7D7C0}"/>
+              </a:ext>
+            </a:extLst>
+          </p:cNvPr>
+          <p:cNvCxnSpPr>
+            <a:cxnSpLocks/>
+          </p:cNvCxnSpPr>
+          <p:nvPr/>
+        </p:nvCxnSpPr>
+        <p:spPr>
+          <a:xfrm flipH="1">
+            <a:off x="7401065" y="3539088"/>
+            <a:ext cx="5278" cy="402240"/>
+          </a:xfrm>
+          <a:prstGeom prst="straightConnector1">
+            <a:avLst/>
+          </a:prstGeom>
+          <a:ln>
+            <a:tailEnd type="triangle"/>
+          </a:ln>
+        </p:spPr>
+        <p:style>
+          <a:lnRef idx="2">
+            <a:schemeClr val="dk1"/>
+          </a:lnRef>
+          <a:fillRef idx="1">
+            <a:schemeClr val="lt1"/>
+          </a:fillRef>
+          <a:effectRef idx="0">
+            <a:schemeClr val="dk1"/>
+          </a:effectRef>
+          <a:fontRef idx="minor">
+            <a:schemeClr val="dk1"/>
+          </a:fontRef>
+        </p:style>
+      </p:cxnSp>
+      <p:cxnSp>
+        <p:nvCxnSpPr>
+          <p:cNvPr id="103" name="Straight Arrow Connector 102">
+            <a:extLst>
+              <a:ext uri="{FF2B5EF4-FFF2-40B4-BE49-F238E27FC236}">
+                <a16:creationId xmlns:a16="http://schemas.microsoft.com/office/drawing/2014/main" id="{780D4C4C-4478-35A7-FC2E-F96A7515BDE2}"/>
+              </a:ext>
+            </a:extLst>
+          </p:cNvPr>
+          <p:cNvCxnSpPr>
+            <a:cxnSpLocks/>
+          </p:cNvCxnSpPr>
+          <p:nvPr/>
+        </p:nvCxnSpPr>
+        <p:spPr>
+          <a:xfrm flipH="1">
+            <a:off x="10444581" y="3503697"/>
+            <a:ext cx="5278" cy="402240"/>
+          </a:xfrm>
+          <a:prstGeom prst="straightConnector1">
+            <a:avLst/>
+          </a:prstGeom>
+          <a:ln>
+            <a:tailEnd type="triangle"/>
+          </a:ln>
+        </p:spPr>
+        <p:style>
+          <a:lnRef idx="2">
+            <a:schemeClr val="dk1"/>
+          </a:lnRef>
+          <a:fillRef idx="1">
+            <a:schemeClr val="lt1"/>
+          </a:fillRef>
+          <a:effectRef idx="0">
+            <a:schemeClr val="dk1"/>
+          </a:effectRef>
+          <a:fontRef idx="minor">
+            <a:schemeClr val="dk1"/>
+          </a:fontRef>
+        </p:style>
+      </p:cxnSp>
+      <p:cxnSp>
+        <p:nvCxnSpPr>
+          <p:cNvPr id="115" name="Straight Connector 114">
+            <a:extLst>
+              <a:ext uri="{FF2B5EF4-FFF2-40B4-BE49-F238E27FC236}">
+                <a16:creationId xmlns:a16="http://schemas.microsoft.com/office/drawing/2014/main" id="{BB5C8EAA-5D97-8887-6609-5544F3E55A62}"/>
+              </a:ext>
+            </a:extLst>
+          </p:cNvPr>
+          <p:cNvCxnSpPr>
+            <a:cxnSpLocks/>
+          </p:cNvCxnSpPr>
+          <p:nvPr/>
+        </p:nvCxnSpPr>
+        <p:spPr>
+          <a:xfrm flipV="1">
+            <a:off x="4777742" y="4635306"/>
+            <a:ext cx="0" cy="218634"/>
+          </a:xfrm>
+          <a:prstGeom prst="line">
+            <a:avLst/>
+          </a:prstGeom>
+        </p:spPr>
+        <p:style>
+          <a:lnRef idx="2">
+            <a:schemeClr val="dk1"/>
+          </a:lnRef>
+          <a:fillRef idx="1">
+            <a:schemeClr val="lt1"/>
+          </a:fillRef>
+          <a:effectRef idx="0">
+            <a:schemeClr val="dk1"/>
+          </a:effectRef>
+          <a:fontRef idx="minor">
+            <a:schemeClr val="dk1"/>
+          </a:fontRef>
+        </p:style>
+      </p:cxnSp>
+      <p:cxnSp>
+        <p:nvCxnSpPr>
+          <p:cNvPr id="120" name="Straight Connector 119">
+            <a:extLst>
+              <a:ext uri="{FF2B5EF4-FFF2-40B4-BE49-F238E27FC236}">
+                <a16:creationId xmlns:a16="http://schemas.microsoft.com/office/drawing/2014/main" id="{33DE01CA-B58F-4726-2A96-1DE97DA0D835}"/>
+              </a:ext>
+            </a:extLst>
+          </p:cNvPr>
+          <p:cNvCxnSpPr>
+            <a:cxnSpLocks/>
+          </p:cNvCxnSpPr>
+          <p:nvPr/>
+        </p:nvCxnSpPr>
+        <p:spPr>
+          <a:xfrm flipV="1">
+            <a:off x="7408982" y="4635306"/>
+            <a:ext cx="0" cy="218634"/>
+          </a:xfrm>
+          <a:prstGeom prst="line">
+            <a:avLst/>
+          </a:prstGeom>
+        </p:spPr>
+        <p:style>
+          <a:lnRef idx="2">
+            <a:schemeClr val="dk1"/>
+          </a:lnRef>
+          <a:fillRef idx="1">
+            <a:schemeClr val="lt1"/>
+          </a:fillRef>
+          <a:effectRef idx="0">
+            <a:schemeClr val="dk1"/>
+          </a:effectRef>
+          <a:fontRef idx="minor">
+            <a:schemeClr val="dk1"/>
+          </a:fontRef>
+        </p:style>
+      </p:cxnSp>
+      <p:cxnSp>
+        <p:nvCxnSpPr>
+          <p:cNvPr id="121" name="Straight Connector 120">
+            <a:extLst>
+              <a:ext uri="{FF2B5EF4-FFF2-40B4-BE49-F238E27FC236}">
+                <a16:creationId xmlns:a16="http://schemas.microsoft.com/office/drawing/2014/main" id="{C0488696-697B-20F0-7DB9-2B6883DF078B}"/>
+              </a:ext>
+            </a:extLst>
+          </p:cNvPr>
+          <p:cNvCxnSpPr>
+            <a:cxnSpLocks/>
+          </p:cNvCxnSpPr>
+          <p:nvPr/>
+        </p:nvCxnSpPr>
+        <p:spPr>
+          <a:xfrm flipH="1" flipV="1">
+            <a:off x="2072343" y="4635306"/>
+            <a:ext cx="7861" cy="698694"/>
+          </a:xfrm>
+          <a:prstGeom prst="line">
+            <a:avLst/>
+          </a:prstGeom>
+        </p:spPr>
+        <p:style>
+          <a:lnRef idx="2">
+            <a:schemeClr val="dk1"/>
+          </a:lnRef>
+          <a:fillRef idx="1">
+            <a:schemeClr val="lt1"/>
+          </a:fillRef>
+          <a:effectRef idx="0">
+            <a:schemeClr val="dk1"/>
+          </a:effectRef>
+          <a:fontRef idx="minor">
+            <a:schemeClr val="dk1"/>
+          </a:fontRef>
+        </p:style>
+      </p:cxnSp>
+      <p:cxnSp>
+        <p:nvCxnSpPr>
+          <p:cNvPr id="123" name="Straight Connector 122">
+            <a:extLst>
+              <a:ext uri="{FF2B5EF4-FFF2-40B4-BE49-F238E27FC236}">
+                <a16:creationId xmlns:a16="http://schemas.microsoft.com/office/drawing/2014/main" id="{6C6CAAD6-C147-EB0E-43B6-9D18AAFD7F08}"/>
+              </a:ext>
+            </a:extLst>
+          </p:cNvPr>
+          <p:cNvCxnSpPr>
+            <a:cxnSpLocks/>
+          </p:cNvCxnSpPr>
+          <p:nvPr/>
+        </p:nvCxnSpPr>
+        <p:spPr>
+          <a:xfrm flipH="1" flipV="1">
+            <a:off x="10445928" y="4627500"/>
+            <a:ext cx="7861" cy="698694"/>
+          </a:xfrm>
+          <a:prstGeom prst="line">
+            <a:avLst/>
+          </a:prstGeom>
+        </p:spPr>
+        <p:style>
+          <a:lnRef idx="2">
+            <a:schemeClr val="dk1"/>
+          </a:lnRef>
+          <a:fillRef idx="1">
+            <a:schemeClr val="lt1"/>
+          </a:fillRef>
+          <a:effectRef idx="0">
+            <a:schemeClr val="dk1"/>
+          </a:effectRef>
+          <a:fontRef idx="minor">
+            <a:schemeClr val="dk1"/>
+          </a:fontRef>
+        </p:style>
+      </p:cxnSp>
+      <p:cxnSp>
+        <p:nvCxnSpPr>
+          <p:cNvPr id="124" name="Straight Arrow Connector 123">
+            <a:extLst>
+              <a:ext uri="{FF2B5EF4-FFF2-40B4-BE49-F238E27FC236}">
+                <a16:creationId xmlns:a16="http://schemas.microsoft.com/office/drawing/2014/main" id="{B548E3AC-29B0-69DC-0F50-AB18A73FF0E3}"/>
+              </a:ext>
+            </a:extLst>
+          </p:cNvPr>
+          <p:cNvCxnSpPr>
+            <a:cxnSpLocks/>
+          </p:cNvCxnSpPr>
+          <p:nvPr/>
+        </p:nvCxnSpPr>
+        <p:spPr>
+          <a:xfrm>
+            <a:off x="4767989" y="4853940"/>
+            <a:ext cx="1160371" cy="0"/>
+          </a:xfrm>
+          <a:prstGeom prst="straightConnector1">
+            <a:avLst/>
+          </a:prstGeom>
+          <a:ln>
+            <a:tailEnd type="triangle"/>
+          </a:ln>
+        </p:spPr>
+        <p:style>
+          <a:lnRef idx="2">
+            <a:schemeClr val="dk1"/>
+          </a:lnRef>
+          <a:fillRef idx="1">
+            <a:schemeClr val="lt1"/>
+          </a:fillRef>
+          <a:effectRef idx="0">
+            <a:schemeClr val="dk1"/>
+          </a:effectRef>
+          <a:fontRef idx="minor">
+            <a:schemeClr val="dk1"/>
+          </a:fontRef>
+        </p:style>
+      </p:cxnSp>
+      <p:cxnSp>
+        <p:nvCxnSpPr>
+          <p:cNvPr id="127" name="Straight Arrow Connector 126">
+            <a:extLst>
+              <a:ext uri="{FF2B5EF4-FFF2-40B4-BE49-F238E27FC236}">
+                <a16:creationId xmlns:a16="http://schemas.microsoft.com/office/drawing/2014/main" id="{0C88FF19-7B0C-5782-E765-291CB293181E}"/>
+              </a:ext>
+            </a:extLst>
+          </p:cNvPr>
+          <p:cNvCxnSpPr>
+            <a:cxnSpLocks/>
+          </p:cNvCxnSpPr>
+          <p:nvPr/>
+        </p:nvCxnSpPr>
+        <p:spPr>
+          <a:xfrm>
+            <a:off x="2088243" y="5341620"/>
+            <a:ext cx="3436257" cy="0"/>
+          </a:xfrm>
+          <a:prstGeom prst="straightConnector1">
+            <a:avLst/>
+          </a:prstGeom>
+          <a:ln>
+            <a:tailEnd type="triangle"/>
+          </a:ln>
+        </p:spPr>
+        <p:style>
+          <a:lnRef idx="2">
+            <a:schemeClr val="dk1"/>
+          </a:lnRef>
+          <a:fillRef idx="1">
+            <a:schemeClr val="lt1"/>
+          </a:fillRef>
+          <a:effectRef idx="0">
+            <a:schemeClr val="dk1"/>
+          </a:effectRef>
+          <a:fontRef idx="minor">
+            <a:schemeClr val="dk1"/>
+          </a:fontRef>
+        </p:style>
+      </p:cxnSp>
+      <p:cxnSp>
+        <p:nvCxnSpPr>
+          <p:cNvPr id="131" name="Straight Arrow Connector 130">
+            <a:extLst>
+              <a:ext uri="{FF2B5EF4-FFF2-40B4-BE49-F238E27FC236}">
+                <a16:creationId xmlns:a16="http://schemas.microsoft.com/office/drawing/2014/main" id="{5BF19892-F707-0CC7-824A-A0E24B9F800B}"/>
+              </a:ext>
+            </a:extLst>
+          </p:cNvPr>
+          <p:cNvCxnSpPr>
+            <a:cxnSpLocks/>
+          </p:cNvCxnSpPr>
+          <p:nvPr/>
+        </p:nvCxnSpPr>
+        <p:spPr>
+          <a:xfrm flipH="1">
+            <a:off x="6254407" y="4851030"/>
+            <a:ext cx="1152582" cy="2910"/>
+          </a:xfrm>
+          <a:prstGeom prst="straightConnector1">
+            <a:avLst/>
+          </a:prstGeom>
+          <a:ln>
+            <a:tailEnd type="triangle"/>
+          </a:ln>
+        </p:spPr>
+        <p:style>
+          <a:lnRef idx="2">
+            <a:schemeClr val="dk1"/>
+          </a:lnRef>
+          <a:fillRef idx="1">
+            <a:schemeClr val="lt1"/>
+          </a:fillRef>
+          <a:effectRef idx="0">
+            <a:schemeClr val="dk1"/>
+          </a:effectRef>
+          <a:fontRef idx="minor">
+            <a:schemeClr val="dk1"/>
+          </a:fontRef>
+        </p:style>
+      </p:cxnSp>
+      <p:cxnSp>
+        <p:nvCxnSpPr>
+          <p:cNvPr id="133" name="Straight Arrow Connector 132">
+            <a:extLst>
+              <a:ext uri="{FF2B5EF4-FFF2-40B4-BE49-F238E27FC236}">
+                <a16:creationId xmlns:a16="http://schemas.microsoft.com/office/drawing/2014/main" id="{36EBBF7A-43D2-F669-F5DF-2E13D0DB1D32}"/>
+              </a:ext>
+            </a:extLst>
+          </p:cNvPr>
+          <p:cNvCxnSpPr>
+            <a:cxnSpLocks/>
+          </p:cNvCxnSpPr>
+          <p:nvPr/>
+        </p:nvCxnSpPr>
+        <p:spPr>
+          <a:xfrm flipH="1">
+            <a:off x="6675120" y="5326194"/>
+            <a:ext cx="3774738" cy="15426"/>
+          </a:xfrm>
+          <a:prstGeom prst="straightConnector1">
+            <a:avLst/>
+          </a:prstGeom>
+          <a:ln>
+            <a:tailEnd type="triangle"/>
+          </a:ln>
+        </p:spPr>
+        <p:style>
+          <a:lnRef idx="2">
+            <a:schemeClr val="dk1"/>
+          </a:lnRef>
+          <a:fillRef idx="1">
+            <a:schemeClr val="lt1"/>
+          </a:fillRef>
+          <a:effectRef idx="0">
+            <a:schemeClr val="dk1"/>
+          </a:effectRef>
+          <a:fontRef idx="minor">
+            <a:schemeClr val="dk1"/>
+          </a:fontRef>
+        </p:style>
+      </p:cxnSp>
+      <p:sp>
+        <p:nvSpPr>
+          <p:cNvPr id="143" name="Rectangle 142">
+            <a:extLst>
+              <a:ext uri="{FF2B5EF4-FFF2-40B4-BE49-F238E27FC236}">
+                <a16:creationId xmlns:a16="http://schemas.microsoft.com/office/drawing/2014/main" id="{776B5C7C-0A80-DAAC-21B4-93608F187EC1}"/>
+              </a:ext>
+            </a:extLst>
+          </p:cNvPr>
+          <p:cNvSpPr/>
+          <p:nvPr/>
+        </p:nvSpPr>
+        <p:spPr>
+          <a:xfrm>
+            <a:off x="5438260" y="6231438"/>
+            <a:ext cx="1304924" cy="310620"/>
+          </a:xfrm>
+          <a:prstGeom prst="rect">
+            <a:avLst/>
+          </a:prstGeom>
+        </p:spPr>
+        <p:style>
+          <a:lnRef idx="2">
+            <a:schemeClr val="dk1"/>
+          </a:lnRef>
+          <a:fillRef idx="1">
+            <a:schemeClr val="lt1"/>
+          </a:fillRef>
+          <a:effectRef idx="0">
+            <a:schemeClr val="dk1"/>
+          </a:effectRef>
+          <a:fontRef idx="minor">
+            <a:schemeClr val="dk1"/>
+          </a:fontRef>
+        </p:style>
+        <p:txBody>
+          <a:bodyPr rtlCol="0" anchor="ctr"/>
+          <a:lstStyle/>
+          <a:p>
+            <a:pPr algn="ctr"/>
+            <a:r>
+              <a:rPr lang="en-US" sz="1400" dirty="0"/>
+              <a:t>Fused Image</a:t>
+            </a:r>
+            <a:endParaRPr lang="en-IN" sz="1400" dirty="0"/>
+          </a:p>
+        </p:txBody>
+      </p:sp>
+      <p:cxnSp>
+        <p:nvCxnSpPr>
+          <p:cNvPr id="144" name="Straight Arrow Connector 143">
+            <a:extLst>
+              <a:ext uri="{FF2B5EF4-FFF2-40B4-BE49-F238E27FC236}">
+                <a16:creationId xmlns:a16="http://schemas.microsoft.com/office/drawing/2014/main" id="{6A0E4E5D-E1AC-AD0D-788E-AE73C5CC7270}"/>
+              </a:ext>
+            </a:extLst>
+          </p:cNvPr>
+          <p:cNvCxnSpPr>
+            <a:cxnSpLocks/>
+          </p:cNvCxnSpPr>
+          <p:nvPr/>
+        </p:nvCxnSpPr>
+        <p:spPr>
+          <a:xfrm flipH="1">
+            <a:off x="6090722" y="5790519"/>
+            <a:ext cx="5278" cy="402240"/>
+          </a:xfrm>
+          <a:prstGeom prst="straightConnector1">
+            <a:avLst/>
+          </a:prstGeom>
+          <a:ln>
+            <a:tailEnd type="triangle"/>
+          </a:ln>
+        </p:spPr>
+        <p:style>
+          <a:lnRef idx="2">
+            <a:schemeClr val="dk1"/>
+          </a:lnRef>
+          <a:fillRef idx="1">
+            <a:schemeClr val="lt1"/>
+          </a:fillRef>
+          <a:effectRef idx="0">
+            <a:schemeClr val="dk1"/>
+          </a:effectRef>
+          <a:fontRef idx="minor">
+            <a:schemeClr val="dk1"/>
+          </a:fontRef>
+        </p:style>
+      </p:cxnSp>
+      <p:sp>
+        <p:nvSpPr>
+          <p:cNvPr id="145" name="Flowchart: Summing Junction 144">
+            <a:extLst>
+              <a:ext uri="{FF2B5EF4-FFF2-40B4-BE49-F238E27FC236}">
+                <a16:creationId xmlns:a16="http://schemas.microsoft.com/office/drawing/2014/main" id="{9DFF71E6-8ED7-03B1-B140-ABE3CCD11D15}"/>
+              </a:ext>
+            </a:extLst>
+          </p:cNvPr>
+          <p:cNvSpPr/>
+          <p:nvPr/>
+        </p:nvSpPr>
+        <p:spPr>
+          <a:xfrm>
+            <a:off x="301255" y="6231438"/>
+            <a:ext cx="308954" cy="310620"/>
+          </a:xfrm>
+          <a:prstGeom prst="flowChartSummingJunction">
+            <a:avLst/>
+          </a:prstGeom>
+        </p:spPr>
+        <p:style>
+          <a:lnRef idx="2">
+            <a:schemeClr val="dk1"/>
+          </a:lnRef>
+          <a:fillRef idx="1">
+            <a:schemeClr val="lt1"/>
+          </a:fillRef>
+          <a:effectRef idx="0">
+            <a:schemeClr val="dk1"/>
+          </a:effectRef>
+          <a:fontRef idx="minor">
+            <a:schemeClr val="dk1"/>
+          </a:fontRef>
+        </p:style>
+        <p:txBody>
+          <a:bodyPr rtlCol="0" anchor="ctr"/>
+          <a:lstStyle/>
+          <a:p>
+            <a:pPr algn="ctr"/>
+            <a:endParaRPr lang="en-IN"/>
+          </a:p>
+        </p:txBody>
+      </p:sp>
+      <p:sp>
+        <p:nvSpPr>
+          <p:cNvPr id="146" name="Rectangle 145">
+            <a:extLst>
+              <a:ext uri="{FF2B5EF4-FFF2-40B4-BE49-F238E27FC236}">
+                <a16:creationId xmlns:a16="http://schemas.microsoft.com/office/drawing/2014/main" id="{97B486F6-01EA-7611-0586-80ACF115289F}"/>
+              </a:ext>
+            </a:extLst>
+          </p:cNvPr>
+          <p:cNvSpPr/>
+          <p:nvPr/>
+        </p:nvSpPr>
+        <p:spPr>
+          <a:xfrm>
+            <a:off x="615580" y="6231438"/>
+            <a:ext cx="2281684" cy="310599"/>
+          </a:xfrm>
+          <a:prstGeom prst="rect">
+            <a:avLst/>
+          </a:prstGeom>
+          <a:noFill/>
+          <a:ln>
+            <a:noFill/>
+          </a:ln>
+        </p:spPr>
+        <p:style>
+          <a:lnRef idx="0">
+            <a:scrgbClr r="0" g="0" b="0"/>
+          </a:lnRef>
+          <a:fillRef idx="0">
+            <a:scrgbClr r="0" g="0" b="0"/>
+          </a:fillRef>
+          <a:effectRef idx="0">
+            <a:scrgbClr r="0" g="0" b="0"/>
+          </a:effectRef>
+          <a:fontRef idx="minor">
+            <a:schemeClr val="dk1"/>
+          </a:fontRef>
+        </p:style>
+        <p:txBody>
+          <a:bodyPr rtlCol="0" anchor="ctr"/>
+          <a:lstStyle/>
+          <a:p>
+            <a:pPr algn="ctr"/>
+            <a:r>
+              <a:rPr lang="en-US" sz="1400" dirty="0"/>
+              <a:t>Element Wise Multiplication</a:t>
             </a:r>
             <a:endParaRPr lang="en-IN" sz="1400" dirty="0"/>
           </a:p>

--- a/Final_Paper/flowchart.pptx
+++ b/Final_Paper/flowchart.pptx
@@ -2,13 +2,14 @@
 <file path=ppt/presentation.xml><?xml version="1.0" encoding="utf-8"?>
 <p:presentation xmlns:a="http://schemas.openxmlformats.org/drawingml/2006/main" xmlns:r="http://schemas.openxmlformats.org/officeDocument/2006/relationships" xmlns:p="http://schemas.openxmlformats.org/presentationml/2006/main" saveSubsetFonts="1">
   <p:sldMasterIdLst>
-    <p:sldMasterId id="2147483648" r:id="rId1"/>
+    <p:sldMasterId id="2147483672" r:id="rId1"/>
   </p:sldMasterIdLst>
   <p:notesMasterIdLst>
-    <p:notesMasterId r:id="rId3"/>
+    <p:notesMasterId r:id="rId4"/>
   </p:notesMasterIdLst>
   <p:sldIdLst>
     <p:sldId id="257" r:id="rId2"/>
+    <p:sldId id="258" r:id="rId3"/>
   </p:sldIdLst>
   <p:sldSz cx="12192000" cy="6858000"/>
   <p:notesSz cx="6858000" cy="9144000"/>
@@ -16,7 +17,7 @@
     <a:defPPr>
       <a:defRPr lang="en-US"/>
     </a:defPPr>
-    <a:lvl1pPr marL="0" algn="l" defTabSz="914400" rtl="0" eaLnBrk="1" latinLnBrk="0" hangingPunct="1">
+    <a:lvl1pPr marL="0" algn="l" defTabSz="457200" rtl="0" eaLnBrk="1" latinLnBrk="0" hangingPunct="1">
       <a:defRPr sz="1800" kern="1200">
         <a:solidFill>
           <a:schemeClr val="tx1"/>
@@ -26,7 +27,7 @@
         <a:cs typeface="+mn-cs"/>
       </a:defRPr>
     </a:lvl1pPr>
-    <a:lvl2pPr marL="457200" algn="l" defTabSz="914400" rtl="0" eaLnBrk="1" latinLnBrk="0" hangingPunct="1">
+    <a:lvl2pPr marL="457200" algn="l" defTabSz="457200" rtl="0" eaLnBrk="1" latinLnBrk="0" hangingPunct="1">
       <a:defRPr sz="1800" kern="1200">
         <a:solidFill>
           <a:schemeClr val="tx1"/>
@@ -36,7 +37,7 @@
         <a:cs typeface="+mn-cs"/>
       </a:defRPr>
     </a:lvl2pPr>
-    <a:lvl3pPr marL="914400" algn="l" defTabSz="914400" rtl="0" eaLnBrk="1" latinLnBrk="0" hangingPunct="1">
+    <a:lvl3pPr marL="914400" algn="l" defTabSz="457200" rtl="0" eaLnBrk="1" latinLnBrk="0" hangingPunct="1">
       <a:defRPr sz="1800" kern="1200">
         <a:solidFill>
           <a:schemeClr val="tx1"/>
@@ -46,7 +47,7 @@
         <a:cs typeface="+mn-cs"/>
       </a:defRPr>
     </a:lvl3pPr>
-    <a:lvl4pPr marL="1371600" algn="l" defTabSz="914400" rtl="0" eaLnBrk="1" latinLnBrk="0" hangingPunct="1">
+    <a:lvl4pPr marL="1371600" algn="l" defTabSz="457200" rtl="0" eaLnBrk="1" latinLnBrk="0" hangingPunct="1">
       <a:defRPr sz="1800" kern="1200">
         <a:solidFill>
           <a:schemeClr val="tx1"/>
@@ -56,7 +57,7 @@
         <a:cs typeface="+mn-cs"/>
       </a:defRPr>
     </a:lvl4pPr>
-    <a:lvl5pPr marL="1828800" algn="l" defTabSz="914400" rtl="0" eaLnBrk="1" latinLnBrk="0" hangingPunct="1">
+    <a:lvl5pPr marL="1828800" algn="l" defTabSz="457200" rtl="0" eaLnBrk="1" latinLnBrk="0" hangingPunct="1">
       <a:defRPr sz="1800" kern="1200">
         <a:solidFill>
           <a:schemeClr val="tx1"/>
@@ -66,7 +67,7 @@
         <a:cs typeface="+mn-cs"/>
       </a:defRPr>
     </a:lvl5pPr>
-    <a:lvl6pPr marL="2286000" algn="l" defTabSz="914400" rtl="0" eaLnBrk="1" latinLnBrk="0" hangingPunct="1">
+    <a:lvl6pPr marL="2286000" algn="l" defTabSz="457200" rtl="0" eaLnBrk="1" latinLnBrk="0" hangingPunct="1">
       <a:defRPr sz="1800" kern="1200">
         <a:solidFill>
           <a:schemeClr val="tx1"/>
@@ -76,7 +77,7 @@
         <a:cs typeface="+mn-cs"/>
       </a:defRPr>
     </a:lvl6pPr>
-    <a:lvl7pPr marL="2743200" algn="l" defTabSz="914400" rtl="0" eaLnBrk="1" latinLnBrk="0" hangingPunct="1">
+    <a:lvl7pPr marL="2743200" algn="l" defTabSz="457200" rtl="0" eaLnBrk="1" latinLnBrk="0" hangingPunct="1">
       <a:defRPr sz="1800" kern="1200">
         <a:solidFill>
           <a:schemeClr val="tx1"/>
@@ -86,7 +87,7 @@
         <a:cs typeface="+mn-cs"/>
       </a:defRPr>
     </a:lvl7pPr>
-    <a:lvl8pPr marL="3200400" algn="l" defTabSz="914400" rtl="0" eaLnBrk="1" latinLnBrk="0" hangingPunct="1">
+    <a:lvl8pPr marL="3200400" algn="l" defTabSz="457200" rtl="0" eaLnBrk="1" latinLnBrk="0" hangingPunct="1">
       <a:defRPr sz="1800" kern="1200">
         <a:solidFill>
           <a:schemeClr val="tx1"/>
@@ -96,7 +97,7 @@
         <a:cs typeface="+mn-cs"/>
       </a:defRPr>
     </a:lvl8pPr>
-    <a:lvl9pPr marL="3657600" algn="l" defTabSz="914400" rtl="0" eaLnBrk="1" latinLnBrk="0" hangingPunct="1">
+    <a:lvl9pPr marL="3657600" algn="l" defTabSz="457200" rtl="0" eaLnBrk="1" latinLnBrk="0" hangingPunct="1">
       <a:defRPr sz="1800" kern="1200">
         <a:solidFill>
           <a:schemeClr val="tx1"/>
@@ -197,7 +198,7 @@
           <a:p>
             <a:fld id="{0A1B1EB5-AD17-4B12-8CBC-EC8266648CFD}" type="datetimeFigureOut">
               <a:rPr lang="en-IN" smtClean="0"/>
-              <a:t>22-11-2025</a:t>
+              <a:t>29-11-2025</a:t>
             </a:fld>
             <a:endParaRPr lang="en-IN"/>
           </a:p>
@@ -492,7 +493,12 @@
             <p:ph type="sldImg"/>
           </p:nvPr>
         </p:nvSpPr>
-        <p:spPr/>
+        <p:spPr>
+          <a:xfrm>
+            <a:off x="685800" y="1143000"/>
+            <a:ext cx="5486400" cy="3086100"/>
+          </a:xfrm>
+        </p:spPr>
       </p:sp>
       <p:sp>
         <p:nvSpPr>
@@ -568,13 +574,7 @@
       </p:grpSpPr>
       <p:sp>
         <p:nvSpPr>
-          <p:cNvPr id="2" name="Title 1">
-            <a:extLst>
-              <a:ext uri="{FF2B5EF4-FFF2-40B4-BE49-F238E27FC236}">
-                <a16:creationId xmlns:a16="http://schemas.microsoft.com/office/drawing/2014/main" id="{1E4D0B88-E447-82A5-79B5-65F2FDD40408}"/>
-              </a:ext>
-            </a:extLst>
-          </p:cNvPr>
+          <p:cNvPr id="2" name="Title 1"/>
           <p:cNvSpPr>
             <a:spLocks noGrp="1"/>
           </p:cNvSpPr>
@@ -600,19 +600,13 @@
               <a:rPr lang="en-US"/>
               <a:t>Click to edit Master title style</a:t>
             </a:r>
-            <a:endParaRPr lang="en-IN"/>
-          </a:p>
-        </p:txBody>
-      </p:sp>
-      <p:sp>
-        <p:nvSpPr>
-          <p:cNvPr id="3" name="Subtitle 2">
-            <a:extLst>
-              <a:ext uri="{FF2B5EF4-FFF2-40B4-BE49-F238E27FC236}">
-                <a16:creationId xmlns:a16="http://schemas.microsoft.com/office/drawing/2014/main" id="{3746141D-7175-4EF1-FE2B-4AAED0BB1322}"/>
-              </a:ext>
-            </a:extLst>
-          </p:cNvPr>
+            <a:endParaRPr lang="en-US" dirty="0"/>
+          </a:p>
+        </p:txBody>
+      </p:sp>
+      <p:sp>
+        <p:nvSpPr>
+          <p:cNvPr id="3" name="Subtitle 2"/>
           <p:cNvSpPr>
             <a:spLocks noGrp="1"/>
           </p:cNvSpPr>
@@ -671,19 +665,13 @@
               <a:rPr lang="en-US"/>
               <a:t>Click to edit Master subtitle style</a:t>
             </a:r>
-            <a:endParaRPr lang="en-IN"/>
-          </a:p>
-        </p:txBody>
-      </p:sp>
-      <p:sp>
-        <p:nvSpPr>
-          <p:cNvPr id="4" name="Date Placeholder 3">
-            <a:extLst>
-              <a:ext uri="{FF2B5EF4-FFF2-40B4-BE49-F238E27FC236}">
-                <a16:creationId xmlns:a16="http://schemas.microsoft.com/office/drawing/2014/main" id="{76EEFF7C-A5D3-1DD9-DB50-550FFD331C6D}"/>
-              </a:ext>
-            </a:extLst>
-          </p:cNvPr>
+            <a:endParaRPr lang="en-US" dirty="0"/>
+          </a:p>
+        </p:txBody>
+      </p:sp>
+      <p:sp>
+        <p:nvSpPr>
+          <p:cNvPr id="4" name="Date Placeholder 3"/>
           <p:cNvSpPr>
             <a:spLocks noGrp="1"/>
           </p:cNvSpPr>
@@ -698,7 +686,7 @@
           <a:p>
             <a:fld id="{7A059AC8-D1E1-47FC-89C7-8CFEDBB34742}" type="datetimeFigureOut">
               <a:rPr lang="en-IN" smtClean="0"/>
-              <a:t>22-11-2025</a:t>
+              <a:t>29-11-2025</a:t>
             </a:fld>
             <a:endParaRPr lang="en-IN"/>
           </a:p>
@@ -706,13 +694,7 @@
       </p:sp>
       <p:sp>
         <p:nvSpPr>
-          <p:cNvPr id="5" name="Footer Placeholder 4">
-            <a:extLst>
-              <a:ext uri="{FF2B5EF4-FFF2-40B4-BE49-F238E27FC236}">
-                <a16:creationId xmlns:a16="http://schemas.microsoft.com/office/drawing/2014/main" id="{4949FE48-21F1-B964-2C61-A24D60A04D65}"/>
-              </a:ext>
-            </a:extLst>
-          </p:cNvPr>
+          <p:cNvPr id="5" name="Footer Placeholder 4"/>
           <p:cNvSpPr>
             <a:spLocks noGrp="1"/>
           </p:cNvSpPr>
@@ -731,13 +713,7 @@
       </p:sp>
       <p:sp>
         <p:nvSpPr>
-          <p:cNvPr id="6" name="Slide Number Placeholder 5">
-            <a:extLst>
-              <a:ext uri="{FF2B5EF4-FFF2-40B4-BE49-F238E27FC236}">
-                <a16:creationId xmlns:a16="http://schemas.microsoft.com/office/drawing/2014/main" id="{53024FB8-A407-713B-A874-FB599EB152E6}"/>
-              </a:ext>
-            </a:extLst>
-          </p:cNvPr>
+          <p:cNvPr id="6" name="Slide Number Placeholder 5"/>
           <p:cNvSpPr>
             <a:spLocks noGrp="1"/>
           </p:cNvSpPr>
@@ -761,7 +737,7 @@
     </p:spTree>
     <p:extLst>
       <p:ext uri="{BB962C8B-B14F-4D97-AF65-F5344CB8AC3E}">
-        <p14:creationId xmlns:p14="http://schemas.microsoft.com/office/powerpoint/2010/main" val="1393740993"/>
+        <p14:creationId xmlns:p14="http://schemas.microsoft.com/office/powerpoint/2010/main" val="3709704223"/>
       </p:ext>
     </p:extLst>
   </p:cSld>
@@ -790,13 +766,7 @@
       </p:grpSpPr>
       <p:sp>
         <p:nvSpPr>
-          <p:cNvPr id="2" name="Title 1">
-            <a:extLst>
-              <a:ext uri="{FF2B5EF4-FFF2-40B4-BE49-F238E27FC236}">
-                <a16:creationId xmlns:a16="http://schemas.microsoft.com/office/drawing/2014/main" id="{2AB956B6-D944-89B0-A693-56A045A22FB6}"/>
-              </a:ext>
-            </a:extLst>
-          </p:cNvPr>
+          <p:cNvPr id="2" name="Title 1"/>
           <p:cNvSpPr>
             <a:spLocks noGrp="1"/>
           </p:cNvSpPr>
@@ -813,19 +783,13 @@
               <a:rPr lang="en-US"/>
               <a:t>Click to edit Master title style</a:t>
             </a:r>
-            <a:endParaRPr lang="en-IN"/>
-          </a:p>
-        </p:txBody>
-      </p:sp>
-      <p:sp>
-        <p:nvSpPr>
-          <p:cNvPr id="3" name="Vertical Text Placeholder 2">
-            <a:extLst>
-              <a:ext uri="{FF2B5EF4-FFF2-40B4-BE49-F238E27FC236}">
-                <a16:creationId xmlns:a16="http://schemas.microsoft.com/office/drawing/2014/main" id="{46BD14CF-E721-C04B-B65E-9B10FF96B645}"/>
-              </a:ext>
-            </a:extLst>
-          </p:cNvPr>
+            <a:endParaRPr lang="en-US" dirty="0"/>
+          </a:p>
+        </p:txBody>
+      </p:sp>
+      <p:sp>
+        <p:nvSpPr>
+          <p:cNvPr id="3" name="Vertical Text Placeholder 2"/>
           <p:cNvSpPr>
             <a:spLocks noGrp="1"/>
           </p:cNvSpPr>
@@ -871,19 +835,13 @@
               <a:rPr lang="en-US"/>
               <a:t>Fifth level</a:t>
             </a:r>
-            <a:endParaRPr lang="en-IN"/>
-          </a:p>
-        </p:txBody>
-      </p:sp>
-      <p:sp>
-        <p:nvSpPr>
-          <p:cNvPr id="4" name="Date Placeholder 3">
-            <a:extLst>
-              <a:ext uri="{FF2B5EF4-FFF2-40B4-BE49-F238E27FC236}">
-                <a16:creationId xmlns:a16="http://schemas.microsoft.com/office/drawing/2014/main" id="{85B4F68C-00B8-CD7B-A99D-81C407992D63}"/>
-              </a:ext>
-            </a:extLst>
-          </p:cNvPr>
+            <a:endParaRPr lang="en-US" dirty="0"/>
+          </a:p>
+        </p:txBody>
+      </p:sp>
+      <p:sp>
+        <p:nvSpPr>
+          <p:cNvPr id="4" name="Date Placeholder 3"/>
           <p:cNvSpPr>
             <a:spLocks noGrp="1"/>
           </p:cNvSpPr>
@@ -898,7 +856,7 @@
           <a:p>
             <a:fld id="{7A059AC8-D1E1-47FC-89C7-8CFEDBB34742}" type="datetimeFigureOut">
               <a:rPr lang="en-IN" smtClean="0"/>
-              <a:t>22-11-2025</a:t>
+              <a:t>29-11-2025</a:t>
             </a:fld>
             <a:endParaRPr lang="en-IN"/>
           </a:p>
@@ -906,13 +864,7 @@
       </p:sp>
       <p:sp>
         <p:nvSpPr>
-          <p:cNvPr id="5" name="Footer Placeholder 4">
-            <a:extLst>
-              <a:ext uri="{FF2B5EF4-FFF2-40B4-BE49-F238E27FC236}">
-                <a16:creationId xmlns:a16="http://schemas.microsoft.com/office/drawing/2014/main" id="{4F8AE91B-2181-4ED8-A2C3-C3373C981988}"/>
-              </a:ext>
-            </a:extLst>
-          </p:cNvPr>
+          <p:cNvPr id="5" name="Footer Placeholder 4"/>
           <p:cNvSpPr>
             <a:spLocks noGrp="1"/>
           </p:cNvSpPr>
@@ -931,13 +883,7 @@
       </p:sp>
       <p:sp>
         <p:nvSpPr>
-          <p:cNvPr id="6" name="Slide Number Placeholder 5">
-            <a:extLst>
-              <a:ext uri="{FF2B5EF4-FFF2-40B4-BE49-F238E27FC236}">
-                <a16:creationId xmlns:a16="http://schemas.microsoft.com/office/drawing/2014/main" id="{0C41ECC5-9821-35E7-2C7D-0AAD59C51277}"/>
-              </a:ext>
-            </a:extLst>
-          </p:cNvPr>
+          <p:cNvPr id="6" name="Slide Number Placeholder 5"/>
           <p:cNvSpPr>
             <a:spLocks noGrp="1"/>
           </p:cNvSpPr>
@@ -961,7 +907,7 @@
     </p:spTree>
     <p:extLst>
       <p:ext uri="{BB962C8B-B14F-4D97-AF65-F5344CB8AC3E}">
-        <p14:creationId xmlns:p14="http://schemas.microsoft.com/office/powerpoint/2010/main" val="3845961130"/>
+        <p14:creationId xmlns:p14="http://schemas.microsoft.com/office/powerpoint/2010/main" val="3713814551"/>
       </p:ext>
     </p:extLst>
   </p:cSld>
@@ -990,13 +936,7 @@
       </p:grpSpPr>
       <p:sp>
         <p:nvSpPr>
-          <p:cNvPr id="2" name="Vertical Title 1">
-            <a:extLst>
-              <a:ext uri="{FF2B5EF4-FFF2-40B4-BE49-F238E27FC236}">
-                <a16:creationId xmlns:a16="http://schemas.microsoft.com/office/drawing/2014/main" id="{BFB5407E-73E5-A16D-39DD-92BD6CB2DD68}"/>
-              </a:ext>
-            </a:extLst>
-          </p:cNvPr>
+          <p:cNvPr id="2" name="Vertical Title 1"/>
           <p:cNvSpPr>
             <a:spLocks noGrp="1"/>
           </p:cNvSpPr>
@@ -1018,19 +958,13 @@
               <a:rPr lang="en-US"/>
               <a:t>Click to edit Master title style</a:t>
             </a:r>
-            <a:endParaRPr lang="en-IN"/>
-          </a:p>
-        </p:txBody>
-      </p:sp>
-      <p:sp>
-        <p:nvSpPr>
-          <p:cNvPr id="3" name="Vertical Text Placeholder 2">
-            <a:extLst>
-              <a:ext uri="{FF2B5EF4-FFF2-40B4-BE49-F238E27FC236}">
-                <a16:creationId xmlns:a16="http://schemas.microsoft.com/office/drawing/2014/main" id="{175CB444-676D-D647-6992-CBF795300AF8}"/>
-              </a:ext>
-            </a:extLst>
-          </p:cNvPr>
+            <a:endParaRPr lang="en-US" dirty="0"/>
+          </a:p>
+        </p:txBody>
+      </p:sp>
+      <p:sp>
+        <p:nvSpPr>
+          <p:cNvPr id="3" name="Vertical Text Placeholder 2"/>
           <p:cNvSpPr>
             <a:spLocks noGrp="1"/>
           </p:cNvSpPr>
@@ -1081,19 +1015,13 @@
               <a:rPr lang="en-US"/>
               <a:t>Fifth level</a:t>
             </a:r>
-            <a:endParaRPr lang="en-IN"/>
-          </a:p>
-        </p:txBody>
-      </p:sp>
-      <p:sp>
-        <p:nvSpPr>
-          <p:cNvPr id="4" name="Date Placeholder 3">
-            <a:extLst>
-              <a:ext uri="{FF2B5EF4-FFF2-40B4-BE49-F238E27FC236}">
-                <a16:creationId xmlns:a16="http://schemas.microsoft.com/office/drawing/2014/main" id="{F962F73B-9F81-BDAE-0078-9B52BA4CF292}"/>
-              </a:ext>
-            </a:extLst>
-          </p:cNvPr>
+            <a:endParaRPr lang="en-US" dirty="0"/>
+          </a:p>
+        </p:txBody>
+      </p:sp>
+      <p:sp>
+        <p:nvSpPr>
+          <p:cNvPr id="4" name="Date Placeholder 3"/>
           <p:cNvSpPr>
             <a:spLocks noGrp="1"/>
           </p:cNvSpPr>
@@ -1108,7 +1036,7 @@
           <a:p>
             <a:fld id="{7A059AC8-D1E1-47FC-89C7-8CFEDBB34742}" type="datetimeFigureOut">
               <a:rPr lang="en-IN" smtClean="0"/>
-              <a:t>22-11-2025</a:t>
+              <a:t>29-11-2025</a:t>
             </a:fld>
             <a:endParaRPr lang="en-IN"/>
           </a:p>
@@ -1116,13 +1044,7 @@
       </p:sp>
       <p:sp>
         <p:nvSpPr>
-          <p:cNvPr id="5" name="Footer Placeholder 4">
-            <a:extLst>
-              <a:ext uri="{FF2B5EF4-FFF2-40B4-BE49-F238E27FC236}">
-                <a16:creationId xmlns:a16="http://schemas.microsoft.com/office/drawing/2014/main" id="{755E3938-3CCC-E21C-E80F-59E52C0AB518}"/>
-              </a:ext>
-            </a:extLst>
-          </p:cNvPr>
+          <p:cNvPr id="5" name="Footer Placeholder 4"/>
           <p:cNvSpPr>
             <a:spLocks noGrp="1"/>
           </p:cNvSpPr>
@@ -1141,13 +1063,7 @@
       </p:sp>
       <p:sp>
         <p:nvSpPr>
-          <p:cNvPr id="6" name="Slide Number Placeholder 5">
-            <a:extLst>
-              <a:ext uri="{FF2B5EF4-FFF2-40B4-BE49-F238E27FC236}">
-                <a16:creationId xmlns:a16="http://schemas.microsoft.com/office/drawing/2014/main" id="{DCCCE429-EDB6-BC0C-CA83-2D84E21EB5FC}"/>
-              </a:ext>
-            </a:extLst>
-          </p:cNvPr>
+          <p:cNvPr id="6" name="Slide Number Placeholder 5"/>
           <p:cNvSpPr>
             <a:spLocks noGrp="1"/>
           </p:cNvSpPr>
@@ -1171,7 +1087,7 @@
     </p:spTree>
     <p:extLst>
       <p:ext uri="{BB962C8B-B14F-4D97-AF65-F5344CB8AC3E}">
-        <p14:creationId xmlns:p14="http://schemas.microsoft.com/office/powerpoint/2010/main" val="1807092623"/>
+        <p14:creationId xmlns:p14="http://schemas.microsoft.com/office/powerpoint/2010/main" val="1352897217"/>
       </p:ext>
     </p:extLst>
   </p:cSld>
@@ -1200,13 +1116,7 @@
       </p:grpSpPr>
       <p:sp>
         <p:nvSpPr>
-          <p:cNvPr id="2" name="Title 1">
-            <a:extLst>
-              <a:ext uri="{FF2B5EF4-FFF2-40B4-BE49-F238E27FC236}">
-                <a16:creationId xmlns:a16="http://schemas.microsoft.com/office/drawing/2014/main" id="{C1FDE778-1ECC-9C0F-C021-A90FBE183A86}"/>
-              </a:ext>
-            </a:extLst>
-          </p:cNvPr>
+          <p:cNvPr id="2" name="Title 1"/>
           <p:cNvSpPr>
             <a:spLocks noGrp="1"/>
           </p:cNvSpPr>
@@ -1223,19 +1133,13 @@
               <a:rPr lang="en-US"/>
               <a:t>Click to edit Master title style</a:t>
             </a:r>
-            <a:endParaRPr lang="en-IN"/>
-          </a:p>
-        </p:txBody>
-      </p:sp>
-      <p:sp>
-        <p:nvSpPr>
-          <p:cNvPr id="3" name="Content Placeholder 2">
-            <a:extLst>
-              <a:ext uri="{FF2B5EF4-FFF2-40B4-BE49-F238E27FC236}">
-                <a16:creationId xmlns:a16="http://schemas.microsoft.com/office/drawing/2014/main" id="{4416E96D-4547-E279-E273-E9E6751FF542}"/>
-              </a:ext>
-            </a:extLst>
-          </p:cNvPr>
+            <a:endParaRPr lang="en-US" dirty="0"/>
+          </a:p>
+        </p:txBody>
+      </p:sp>
+      <p:sp>
+        <p:nvSpPr>
+          <p:cNvPr id="3" name="Content Placeholder 2"/>
           <p:cNvSpPr>
             <a:spLocks noGrp="1"/>
           </p:cNvSpPr>
@@ -1281,19 +1185,13 @@
               <a:rPr lang="en-US"/>
               <a:t>Fifth level</a:t>
             </a:r>
-            <a:endParaRPr lang="en-IN"/>
-          </a:p>
-        </p:txBody>
-      </p:sp>
-      <p:sp>
-        <p:nvSpPr>
-          <p:cNvPr id="4" name="Date Placeholder 3">
-            <a:extLst>
-              <a:ext uri="{FF2B5EF4-FFF2-40B4-BE49-F238E27FC236}">
-                <a16:creationId xmlns:a16="http://schemas.microsoft.com/office/drawing/2014/main" id="{03FA6A68-F342-2220-86D4-E5D61C745DA4}"/>
-              </a:ext>
-            </a:extLst>
-          </p:cNvPr>
+            <a:endParaRPr lang="en-US" dirty="0"/>
+          </a:p>
+        </p:txBody>
+      </p:sp>
+      <p:sp>
+        <p:nvSpPr>
+          <p:cNvPr id="4" name="Date Placeholder 3"/>
           <p:cNvSpPr>
             <a:spLocks noGrp="1"/>
           </p:cNvSpPr>
@@ -1308,7 +1206,7 @@
           <a:p>
             <a:fld id="{7A059AC8-D1E1-47FC-89C7-8CFEDBB34742}" type="datetimeFigureOut">
               <a:rPr lang="en-IN" smtClean="0"/>
-              <a:t>22-11-2025</a:t>
+              <a:t>29-11-2025</a:t>
             </a:fld>
             <a:endParaRPr lang="en-IN"/>
           </a:p>
@@ -1316,13 +1214,7 @@
       </p:sp>
       <p:sp>
         <p:nvSpPr>
-          <p:cNvPr id="5" name="Footer Placeholder 4">
-            <a:extLst>
-              <a:ext uri="{FF2B5EF4-FFF2-40B4-BE49-F238E27FC236}">
-                <a16:creationId xmlns:a16="http://schemas.microsoft.com/office/drawing/2014/main" id="{A18C1266-4F4F-2D27-1425-D2F412CD39E4}"/>
-              </a:ext>
-            </a:extLst>
-          </p:cNvPr>
+          <p:cNvPr id="5" name="Footer Placeholder 4"/>
           <p:cNvSpPr>
             <a:spLocks noGrp="1"/>
           </p:cNvSpPr>
@@ -1341,13 +1233,7 @@
       </p:sp>
       <p:sp>
         <p:nvSpPr>
-          <p:cNvPr id="6" name="Slide Number Placeholder 5">
-            <a:extLst>
-              <a:ext uri="{FF2B5EF4-FFF2-40B4-BE49-F238E27FC236}">
-                <a16:creationId xmlns:a16="http://schemas.microsoft.com/office/drawing/2014/main" id="{25678EC0-C492-E72E-B6A6-D829B9A6B5FB}"/>
-              </a:ext>
-            </a:extLst>
-          </p:cNvPr>
+          <p:cNvPr id="6" name="Slide Number Placeholder 5"/>
           <p:cNvSpPr>
             <a:spLocks noGrp="1"/>
           </p:cNvSpPr>
@@ -1371,7 +1257,7 @@
     </p:spTree>
     <p:extLst>
       <p:ext uri="{BB962C8B-B14F-4D97-AF65-F5344CB8AC3E}">
-        <p14:creationId xmlns:p14="http://schemas.microsoft.com/office/powerpoint/2010/main" val="3574912381"/>
+        <p14:creationId xmlns:p14="http://schemas.microsoft.com/office/powerpoint/2010/main" val="4247236120"/>
       </p:ext>
     </p:extLst>
   </p:cSld>
@@ -1400,13 +1286,7 @@
       </p:grpSpPr>
       <p:sp>
         <p:nvSpPr>
-          <p:cNvPr id="2" name="Title 1">
-            <a:extLst>
-              <a:ext uri="{FF2B5EF4-FFF2-40B4-BE49-F238E27FC236}">
-                <a16:creationId xmlns:a16="http://schemas.microsoft.com/office/drawing/2014/main" id="{B6AE08DF-2867-901D-42C3-DCE6471EBD45}"/>
-              </a:ext>
-            </a:extLst>
-          </p:cNvPr>
+          <p:cNvPr id="2" name="Title 1"/>
           <p:cNvSpPr>
             <a:spLocks noGrp="1"/>
           </p:cNvSpPr>
@@ -1432,19 +1312,13 @@
               <a:rPr lang="en-US"/>
               <a:t>Click to edit Master title style</a:t>
             </a:r>
-            <a:endParaRPr lang="en-IN"/>
-          </a:p>
-        </p:txBody>
-      </p:sp>
-      <p:sp>
-        <p:nvSpPr>
-          <p:cNvPr id="3" name="Text Placeholder 2">
-            <a:extLst>
-              <a:ext uri="{FF2B5EF4-FFF2-40B4-BE49-F238E27FC236}">
-                <a16:creationId xmlns:a16="http://schemas.microsoft.com/office/drawing/2014/main" id="{8B73503C-2ECA-B70A-B607-BB657C75EC3B}"/>
-              </a:ext>
-            </a:extLst>
-          </p:cNvPr>
+            <a:endParaRPr lang="en-US" dirty="0"/>
+          </a:p>
+        </p:txBody>
+      </p:sp>
+      <p:sp>
+        <p:nvSpPr>
+          <p:cNvPr id="3" name="Text Placeholder 2"/>
           <p:cNvSpPr>
             <a:spLocks noGrp="1"/>
           </p:cNvSpPr>
@@ -1563,13 +1437,7 @@
       </p:sp>
       <p:sp>
         <p:nvSpPr>
-          <p:cNvPr id="4" name="Date Placeholder 3">
-            <a:extLst>
-              <a:ext uri="{FF2B5EF4-FFF2-40B4-BE49-F238E27FC236}">
-                <a16:creationId xmlns:a16="http://schemas.microsoft.com/office/drawing/2014/main" id="{B913040A-1583-873A-313A-4A86FEEA1C3F}"/>
-              </a:ext>
-            </a:extLst>
-          </p:cNvPr>
+          <p:cNvPr id="4" name="Date Placeholder 3"/>
           <p:cNvSpPr>
             <a:spLocks noGrp="1"/>
           </p:cNvSpPr>
@@ -1584,7 +1452,7 @@
           <a:p>
             <a:fld id="{7A059AC8-D1E1-47FC-89C7-8CFEDBB34742}" type="datetimeFigureOut">
               <a:rPr lang="en-IN" smtClean="0"/>
-              <a:t>22-11-2025</a:t>
+              <a:t>29-11-2025</a:t>
             </a:fld>
             <a:endParaRPr lang="en-IN"/>
           </a:p>
@@ -1592,13 +1460,7 @@
       </p:sp>
       <p:sp>
         <p:nvSpPr>
-          <p:cNvPr id="5" name="Footer Placeholder 4">
-            <a:extLst>
-              <a:ext uri="{FF2B5EF4-FFF2-40B4-BE49-F238E27FC236}">
-                <a16:creationId xmlns:a16="http://schemas.microsoft.com/office/drawing/2014/main" id="{4F821336-5BA6-39FA-C059-47289465F52F}"/>
-              </a:ext>
-            </a:extLst>
-          </p:cNvPr>
+          <p:cNvPr id="5" name="Footer Placeholder 4"/>
           <p:cNvSpPr>
             <a:spLocks noGrp="1"/>
           </p:cNvSpPr>
@@ -1617,13 +1479,7 @@
       </p:sp>
       <p:sp>
         <p:nvSpPr>
-          <p:cNvPr id="6" name="Slide Number Placeholder 5">
-            <a:extLst>
-              <a:ext uri="{FF2B5EF4-FFF2-40B4-BE49-F238E27FC236}">
-                <a16:creationId xmlns:a16="http://schemas.microsoft.com/office/drawing/2014/main" id="{956AE9A6-299E-6758-C8C8-96E7BD91F268}"/>
-              </a:ext>
-            </a:extLst>
-          </p:cNvPr>
+          <p:cNvPr id="6" name="Slide Number Placeholder 5"/>
           <p:cNvSpPr>
             <a:spLocks noGrp="1"/>
           </p:cNvSpPr>
@@ -1647,7 +1503,7 @@
     </p:spTree>
     <p:extLst>
       <p:ext uri="{BB962C8B-B14F-4D97-AF65-F5344CB8AC3E}">
-        <p14:creationId xmlns:p14="http://schemas.microsoft.com/office/powerpoint/2010/main" val="2785991492"/>
+        <p14:creationId xmlns:p14="http://schemas.microsoft.com/office/powerpoint/2010/main" val="1406658146"/>
       </p:ext>
     </p:extLst>
   </p:cSld>
@@ -1676,13 +1532,7 @@
       </p:grpSpPr>
       <p:sp>
         <p:nvSpPr>
-          <p:cNvPr id="2" name="Title 1">
-            <a:extLst>
-              <a:ext uri="{FF2B5EF4-FFF2-40B4-BE49-F238E27FC236}">
-                <a16:creationId xmlns:a16="http://schemas.microsoft.com/office/drawing/2014/main" id="{36228636-6A1D-27A1-AC2A-2B8C7475B1C1}"/>
-              </a:ext>
-            </a:extLst>
-          </p:cNvPr>
+          <p:cNvPr id="2" name="Title 1"/>
           <p:cNvSpPr>
             <a:spLocks noGrp="1"/>
           </p:cNvSpPr>
@@ -1699,19 +1549,13 @@
               <a:rPr lang="en-US"/>
               <a:t>Click to edit Master title style</a:t>
             </a:r>
-            <a:endParaRPr lang="en-IN"/>
-          </a:p>
-        </p:txBody>
-      </p:sp>
-      <p:sp>
-        <p:nvSpPr>
-          <p:cNvPr id="3" name="Content Placeholder 2">
-            <a:extLst>
-              <a:ext uri="{FF2B5EF4-FFF2-40B4-BE49-F238E27FC236}">
-                <a16:creationId xmlns:a16="http://schemas.microsoft.com/office/drawing/2014/main" id="{656B3812-1E62-2973-FC7C-6B3DE00AF5BC}"/>
-              </a:ext>
-            </a:extLst>
-          </p:cNvPr>
+            <a:endParaRPr lang="en-US" dirty="0"/>
+          </a:p>
+        </p:txBody>
+      </p:sp>
+      <p:sp>
+        <p:nvSpPr>
+          <p:cNvPr id="3" name="Content Placeholder 2"/>
           <p:cNvSpPr>
             <a:spLocks noGrp="1"/>
           </p:cNvSpPr>
@@ -1762,19 +1606,13 @@
               <a:rPr lang="en-US"/>
               <a:t>Fifth level</a:t>
             </a:r>
-            <a:endParaRPr lang="en-IN"/>
-          </a:p>
-        </p:txBody>
-      </p:sp>
-      <p:sp>
-        <p:nvSpPr>
-          <p:cNvPr id="4" name="Content Placeholder 3">
-            <a:extLst>
-              <a:ext uri="{FF2B5EF4-FFF2-40B4-BE49-F238E27FC236}">
-                <a16:creationId xmlns:a16="http://schemas.microsoft.com/office/drawing/2014/main" id="{79361906-9A74-C8DA-379C-2BA4E225D317}"/>
-              </a:ext>
-            </a:extLst>
-          </p:cNvPr>
+            <a:endParaRPr lang="en-US" dirty="0"/>
+          </a:p>
+        </p:txBody>
+      </p:sp>
+      <p:sp>
+        <p:nvSpPr>
+          <p:cNvPr id="4" name="Content Placeholder 3"/>
           <p:cNvSpPr>
             <a:spLocks noGrp="1"/>
           </p:cNvSpPr>
@@ -1825,19 +1663,13 @@
               <a:rPr lang="en-US"/>
               <a:t>Fifth level</a:t>
             </a:r>
-            <a:endParaRPr lang="en-IN"/>
-          </a:p>
-        </p:txBody>
-      </p:sp>
-      <p:sp>
-        <p:nvSpPr>
-          <p:cNvPr id="5" name="Date Placeholder 4">
-            <a:extLst>
-              <a:ext uri="{FF2B5EF4-FFF2-40B4-BE49-F238E27FC236}">
-                <a16:creationId xmlns:a16="http://schemas.microsoft.com/office/drawing/2014/main" id="{6AD07667-2783-77A4-7213-3BD7039F6B1B}"/>
-              </a:ext>
-            </a:extLst>
-          </p:cNvPr>
+            <a:endParaRPr lang="en-US" dirty="0"/>
+          </a:p>
+        </p:txBody>
+      </p:sp>
+      <p:sp>
+        <p:nvSpPr>
+          <p:cNvPr id="5" name="Date Placeholder 4"/>
           <p:cNvSpPr>
             <a:spLocks noGrp="1"/>
           </p:cNvSpPr>
@@ -1852,7 +1684,7 @@
           <a:p>
             <a:fld id="{7A059AC8-D1E1-47FC-89C7-8CFEDBB34742}" type="datetimeFigureOut">
               <a:rPr lang="en-IN" smtClean="0"/>
-              <a:t>22-11-2025</a:t>
+              <a:t>29-11-2025</a:t>
             </a:fld>
             <a:endParaRPr lang="en-IN"/>
           </a:p>
@@ -1860,13 +1692,7 @@
       </p:sp>
       <p:sp>
         <p:nvSpPr>
-          <p:cNvPr id="6" name="Footer Placeholder 5">
-            <a:extLst>
-              <a:ext uri="{FF2B5EF4-FFF2-40B4-BE49-F238E27FC236}">
-                <a16:creationId xmlns:a16="http://schemas.microsoft.com/office/drawing/2014/main" id="{B4FE9E3C-3FFB-330E-6E30-397F94BEDDF8}"/>
-              </a:ext>
-            </a:extLst>
-          </p:cNvPr>
+          <p:cNvPr id="6" name="Footer Placeholder 5"/>
           <p:cNvSpPr>
             <a:spLocks noGrp="1"/>
           </p:cNvSpPr>
@@ -1885,13 +1711,7 @@
       </p:sp>
       <p:sp>
         <p:nvSpPr>
-          <p:cNvPr id="7" name="Slide Number Placeholder 6">
-            <a:extLst>
-              <a:ext uri="{FF2B5EF4-FFF2-40B4-BE49-F238E27FC236}">
-                <a16:creationId xmlns:a16="http://schemas.microsoft.com/office/drawing/2014/main" id="{1D41E814-41B5-BC1A-CF18-B224004B23EA}"/>
-              </a:ext>
-            </a:extLst>
-          </p:cNvPr>
+          <p:cNvPr id="7" name="Slide Number Placeholder 6"/>
           <p:cNvSpPr>
             <a:spLocks noGrp="1"/>
           </p:cNvSpPr>
@@ -1915,7 +1735,7 @@
     </p:spTree>
     <p:extLst>
       <p:ext uri="{BB962C8B-B14F-4D97-AF65-F5344CB8AC3E}">
-        <p14:creationId xmlns:p14="http://schemas.microsoft.com/office/powerpoint/2010/main" val="4194093951"/>
+        <p14:creationId xmlns:p14="http://schemas.microsoft.com/office/powerpoint/2010/main" val="2524758695"/>
       </p:ext>
     </p:extLst>
   </p:cSld>
@@ -1944,13 +1764,7 @@
       </p:grpSpPr>
       <p:sp>
         <p:nvSpPr>
-          <p:cNvPr id="2" name="Title 1">
-            <a:extLst>
-              <a:ext uri="{FF2B5EF4-FFF2-40B4-BE49-F238E27FC236}">
-                <a16:creationId xmlns:a16="http://schemas.microsoft.com/office/drawing/2014/main" id="{FE0DC060-FD74-8EF0-7B70-C9BD4A4E2401}"/>
-              </a:ext>
-            </a:extLst>
-          </p:cNvPr>
+          <p:cNvPr id="2" name="Title 1"/>
           <p:cNvSpPr>
             <a:spLocks noGrp="1"/>
           </p:cNvSpPr>
@@ -1972,19 +1786,13 @@
               <a:rPr lang="en-US"/>
               <a:t>Click to edit Master title style</a:t>
             </a:r>
-            <a:endParaRPr lang="en-IN"/>
-          </a:p>
-        </p:txBody>
-      </p:sp>
-      <p:sp>
-        <p:nvSpPr>
-          <p:cNvPr id="3" name="Text Placeholder 2">
-            <a:extLst>
-              <a:ext uri="{FF2B5EF4-FFF2-40B4-BE49-F238E27FC236}">
-                <a16:creationId xmlns:a16="http://schemas.microsoft.com/office/drawing/2014/main" id="{AB1571B7-0AE8-F118-10F3-679AD730D37B}"/>
-              </a:ext>
-            </a:extLst>
-          </p:cNvPr>
+            <a:endParaRPr lang="en-US" dirty="0"/>
+          </a:p>
+        </p:txBody>
+      </p:sp>
+      <p:sp>
+        <p:nvSpPr>
+          <p:cNvPr id="3" name="Text Placeholder 2"/>
           <p:cNvSpPr>
             <a:spLocks noGrp="1"/>
           </p:cNvSpPr>
@@ -2049,13 +1857,7 @@
       </p:sp>
       <p:sp>
         <p:nvSpPr>
-          <p:cNvPr id="4" name="Content Placeholder 3">
-            <a:extLst>
-              <a:ext uri="{FF2B5EF4-FFF2-40B4-BE49-F238E27FC236}">
-                <a16:creationId xmlns:a16="http://schemas.microsoft.com/office/drawing/2014/main" id="{7124B30C-6FE2-952C-3C09-D6C0DAE351F6}"/>
-              </a:ext>
-            </a:extLst>
-          </p:cNvPr>
+          <p:cNvPr id="4" name="Content Placeholder 3"/>
           <p:cNvSpPr>
             <a:spLocks noGrp="1"/>
           </p:cNvSpPr>
@@ -2106,19 +1908,13 @@
               <a:rPr lang="en-US"/>
               <a:t>Fifth level</a:t>
             </a:r>
-            <a:endParaRPr lang="en-IN"/>
-          </a:p>
-        </p:txBody>
-      </p:sp>
-      <p:sp>
-        <p:nvSpPr>
-          <p:cNvPr id="5" name="Text Placeholder 4">
-            <a:extLst>
-              <a:ext uri="{FF2B5EF4-FFF2-40B4-BE49-F238E27FC236}">
-                <a16:creationId xmlns:a16="http://schemas.microsoft.com/office/drawing/2014/main" id="{97035EC7-0ADC-74CA-6ECD-4AB5C436F4AE}"/>
-              </a:ext>
-            </a:extLst>
-          </p:cNvPr>
+            <a:endParaRPr lang="en-US" dirty="0"/>
+          </a:p>
+        </p:txBody>
+      </p:sp>
+      <p:sp>
+        <p:nvSpPr>
+          <p:cNvPr id="5" name="Text Placeholder 4"/>
           <p:cNvSpPr>
             <a:spLocks noGrp="1"/>
           </p:cNvSpPr>
@@ -2183,13 +1979,7 @@
       </p:sp>
       <p:sp>
         <p:nvSpPr>
-          <p:cNvPr id="6" name="Content Placeholder 5">
-            <a:extLst>
-              <a:ext uri="{FF2B5EF4-FFF2-40B4-BE49-F238E27FC236}">
-                <a16:creationId xmlns:a16="http://schemas.microsoft.com/office/drawing/2014/main" id="{11A760B7-E61E-D63B-B0AE-B10280253338}"/>
-              </a:ext>
-            </a:extLst>
-          </p:cNvPr>
+          <p:cNvPr id="6" name="Content Placeholder 5"/>
           <p:cNvSpPr>
             <a:spLocks noGrp="1"/>
           </p:cNvSpPr>
@@ -2240,19 +2030,13 @@
               <a:rPr lang="en-US"/>
               <a:t>Fifth level</a:t>
             </a:r>
-            <a:endParaRPr lang="en-IN"/>
-          </a:p>
-        </p:txBody>
-      </p:sp>
-      <p:sp>
-        <p:nvSpPr>
-          <p:cNvPr id="7" name="Date Placeholder 6">
-            <a:extLst>
-              <a:ext uri="{FF2B5EF4-FFF2-40B4-BE49-F238E27FC236}">
-                <a16:creationId xmlns:a16="http://schemas.microsoft.com/office/drawing/2014/main" id="{DED17819-6D10-B9C0-279C-7293410B2B22}"/>
-              </a:ext>
-            </a:extLst>
-          </p:cNvPr>
+            <a:endParaRPr lang="en-US" dirty="0"/>
+          </a:p>
+        </p:txBody>
+      </p:sp>
+      <p:sp>
+        <p:nvSpPr>
+          <p:cNvPr id="7" name="Date Placeholder 6"/>
           <p:cNvSpPr>
             <a:spLocks noGrp="1"/>
           </p:cNvSpPr>
@@ -2267,7 +2051,7 @@
           <a:p>
             <a:fld id="{7A059AC8-D1E1-47FC-89C7-8CFEDBB34742}" type="datetimeFigureOut">
               <a:rPr lang="en-IN" smtClean="0"/>
-              <a:t>22-11-2025</a:t>
+              <a:t>29-11-2025</a:t>
             </a:fld>
             <a:endParaRPr lang="en-IN"/>
           </a:p>
@@ -2275,13 +2059,7 @@
       </p:sp>
       <p:sp>
         <p:nvSpPr>
-          <p:cNvPr id="8" name="Footer Placeholder 7">
-            <a:extLst>
-              <a:ext uri="{FF2B5EF4-FFF2-40B4-BE49-F238E27FC236}">
-                <a16:creationId xmlns:a16="http://schemas.microsoft.com/office/drawing/2014/main" id="{DCEDD2E1-053E-7BCA-BFD2-4E622F4A7B87}"/>
-              </a:ext>
-            </a:extLst>
-          </p:cNvPr>
+          <p:cNvPr id="8" name="Footer Placeholder 7"/>
           <p:cNvSpPr>
             <a:spLocks noGrp="1"/>
           </p:cNvSpPr>
@@ -2300,13 +2078,7 @@
       </p:sp>
       <p:sp>
         <p:nvSpPr>
-          <p:cNvPr id="9" name="Slide Number Placeholder 8">
-            <a:extLst>
-              <a:ext uri="{FF2B5EF4-FFF2-40B4-BE49-F238E27FC236}">
-                <a16:creationId xmlns:a16="http://schemas.microsoft.com/office/drawing/2014/main" id="{BCC48102-183B-C6B6-4937-15191DF20767}"/>
-              </a:ext>
-            </a:extLst>
-          </p:cNvPr>
+          <p:cNvPr id="9" name="Slide Number Placeholder 8"/>
           <p:cNvSpPr>
             <a:spLocks noGrp="1"/>
           </p:cNvSpPr>
@@ -2330,7 +2102,7 @@
     </p:spTree>
     <p:extLst>
       <p:ext uri="{BB962C8B-B14F-4D97-AF65-F5344CB8AC3E}">
-        <p14:creationId xmlns:p14="http://schemas.microsoft.com/office/powerpoint/2010/main" val="3582120478"/>
+        <p14:creationId xmlns:p14="http://schemas.microsoft.com/office/powerpoint/2010/main" val="2017181562"/>
       </p:ext>
     </p:extLst>
   </p:cSld>
@@ -2359,13 +2131,7 @@
       </p:grpSpPr>
       <p:sp>
         <p:nvSpPr>
-          <p:cNvPr id="2" name="Title 1">
-            <a:extLst>
-              <a:ext uri="{FF2B5EF4-FFF2-40B4-BE49-F238E27FC236}">
-                <a16:creationId xmlns:a16="http://schemas.microsoft.com/office/drawing/2014/main" id="{D8FBE3ED-7AB4-8F43-AA84-5C4760336CC7}"/>
-              </a:ext>
-            </a:extLst>
-          </p:cNvPr>
+          <p:cNvPr id="2" name="Title 1"/>
           <p:cNvSpPr>
             <a:spLocks noGrp="1"/>
           </p:cNvSpPr>
@@ -2382,19 +2148,13 @@
               <a:rPr lang="en-US"/>
               <a:t>Click to edit Master title style</a:t>
             </a:r>
-            <a:endParaRPr lang="en-IN"/>
-          </a:p>
-        </p:txBody>
-      </p:sp>
-      <p:sp>
-        <p:nvSpPr>
-          <p:cNvPr id="3" name="Date Placeholder 2">
-            <a:extLst>
-              <a:ext uri="{FF2B5EF4-FFF2-40B4-BE49-F238E27FC236}">
-                <a16:creationId xmlns:a16="http://schemas.microsoft.com/office/drawing/2014/main" id="{FA5FA5C1-0FAE-B481-EDF8-44386DB130C5}"/>
-              </a:ext>
-            </a:extLst>
-          </p:cNvPr>
+            <a:endParaRPr lang="en-US" dirty="0"/>
+          </a:p>
+        </p:txBody>
+      </p:sp>
+      <p:sp>
+        <p:nvSpPr>
+          <p:cNvPr id="3" name="Date Placeholder 2"/>
           <p:cNvSpPr>
             <a:spLocks noGrp="1"/>
           </p:cNvSpPr>
@@ -2409,7 +2169,7 @@
           <a:p>
             <a:fld id="{7A059AC8-D1E1-47FC-89C7-8CFEDBB34742}" type="datetimeFigureOut">
               <a:rPr lang="en-IN" smtClean="0"/>
-              <a:t>22-11-2025</a:t>
+              <a:t>29-11-2025</a:t>
             </a:fld>
             <a:endParaRPr lang="en-IN"/>
           </a:p>
@@ -2417,13 +2177,7 @@
       </p:sp>
       <p:sp>
         <p:nvSpPr>
-          <p:cNvPr id="4" name="Footer Placeholder 3">
-            <a:extLst>
-              <a:ext uri="{FF2B5EF4-FFF2-40B4-BE49-F238E27FC236}">
-                <a16:creationId xmlns:a16="http://schemas.microsoft.com/office/drawing/2014/main" id="{07DCF492-D162-0DC3-7B0A-3FDF575A6A85}"/>
-              </a:ext>
-            </a:extLst>
-          </p:cNvPr>
+          <p:cNvPr id="4" name="Footer Placeholder 3"/>
           <p:cNvSpPr>
             <a:spLocks noGrp="1"/>
           </p:cNvSpPr>
@@ -2442,13 +2196,7 @@
       </p:sp>
       <p:sp>
         <p:nvSpPr>
-          <p:cNvPr id="5" name="Slide Number Placeholder 4">
-            <a:extLst>
-              <a:ext uri="{FF2B5EF4-FFF2-40B4-BE49-F238E27FC236}">
-                <a16:creationId xmlns:a16="http://schemas.microsoft.com/office/drawing/2014/main" id="{7797DB2F-A058-8821-44CA-B3ACA99470A9}"/>
-              </a:ext>
-            </a:extLst>
-          </p:cNvPr>
+          <p:cNvPr id="5" name="Slide Number Placeholder 4"/>
           <p:cNvSpPr>
             <a:spLocks noGrp="1"/>
           </p:cNvSpPr>
@@ -2472,7 +2220,7 @@
     </p:spTree>
     <p:extLst>
       <p:ext uri="{BB962C8B-B14F-4D97-AF65-F5344CB8AC3E}">
-        <p14:creationId xmlns:p14="http://schemas.microsoft.com/office/powerpoint/2010/main" val="1493034803"/>
+        <p14:creationId xmlns:p14="http://schemas.microsoft.com/office/powerpoint/2010/main" val="1410487507"/>
       </p:ext>
     </p:extLst>
   </p:cSld>
@@ -2501,13 +2249,7 @@
       </p:grpSpPr>
       <p:sp>
         <p:nvSpPr>
-          <p:cNvPr id="2" name="Date Placeholder 1">
-            <a:extLst>
-              <a:ext uri="{FF2B5EF4-FFF2-40B4-BE49-F238E27FC236}">
-                <a16:creationId xmlns:a16="http://schemas.microsoft.com/office/drawing/2014/main" id="{4C26EE54-CC29-CB0F-D7E1-2A8C7E33D90F}"/>
-              </a:ext>
-            </a:extLst>
-          </p:cNvPr>
+          <p:cNvPr id="2" name="Date Placeholder 1"/>
           <p:cNvSpPr>
             <a:spLocks noGrp="1"/>
           </p:cNvSpPr>
@@ -2522,7 +2264,7 @@
           <a:p>
             <a:fld id="{7A059AC8-D1E1-47FC-89C7-8CFEDBB34742}" type="datetimeFigureOut">
               <a:rPr lang="en-IN" smtClean="0"/>
-              <a:t>22-11-2025</a:t>
+              <a:t>29-11-2025</a:t>
             </a:fld>
             <a:endParaRPr lang="en-IN"/>
           </a:p>
@@ -2530,13 +2272,7 @@
       </p:sp>
       <p:sp>
         <p:nvSpPr>
-          <p:cNvPr id="3" name="Footer Placeholder 2">
-            <a:extLst>
-              <a:ext uri="{FF2B5EF4-FFF2-40B4-BE49-F238E27FC236}">
-                <a16:creationId xmlns:a16="http://schemas.microsoft.com/office/drawing/2014/main" id="{CBA3ADB2-36D2-6A82-B463-354AFF1A920B}"/>
-              </a:ext>
-            </a:extLst>
-          </p:cNvPr>
+          <p:cNvPr id="3" name="Footer Placeholder 2"/>
           <p:cNvSpPr>
             <a:spLocks noGrp="1"/>
           </p:cNvSpPr>
@@ -2555,13 +2291,7 @@
       </p:sp>
       <p:sp>
         <p:nvSpPr>
-          <p:cNvPr id="4" name="Slide Number Placeholder 3">
-            <a:extLst>
-              <a:ext uri="{FF2B5EF4-FFF2-40B4-BE49-F238E27FC236}">
-                <a16:creationId xmlns:a16="http://schemas.microsoft.com/office/drawing/2014/main" id="{FEE2B2CF-9AE5-4307-C183-FACE64812677}"/>
-              </a:ext>
-            </a:extLst>
-          </p:cNvPr>
+          <p:cNvPr id="4" name="Slide Number Placeholder 3"/>
           <p:cNvSpPr>
             <a:spLocks noGrp="1"/>
           </p:cNvSpPr>
@@ -2585,7 +2315,7 @@
     </p:spTree>
     <p:extLst>
       <p:ext uri="{BB962C8B-B14F-4D97-AF65-F5344CB8AC3E}">
-        <p14:creationId xmlns:p14="http://schemas.microsoft.com/office/powerpoint/2010/main" val="227019766"/>
+        <p14:creationId xmlns:p14="http://schemas.microsoft.com/office/powerpoint/2010/main" val="3247302791"/>
       </p:ext>
     </p:extLst>
   </p:cSld>
@@ -2614,13 +2344,7 @@
       </p:grpSpPr>
       <p:sp>
         <p:nvSpPr>
-          <p:cNvPr id="2" name="Title 1">
-            <a:extLst>
-              <a:ext uri="{FF2B5EF4-FFF2-40B4-BE49-F238E27FC236}">
-                <a16:creationId xmlns:a16="http://schemas.microsoft.com/office/drawing/2014/main" id="{59FD006F-9431-13B3-AFF8-F8536DA9D54C}"/>
-              </a:ext>
-            </a:extLst>
-          </p:cNvPr>
+          <p:cNvPr id="2" name="Title 1"/>
           <p:cNvSpPr>
             <a:spLocks noGrp="1"/>
           </p:cNvSpPr>
@@ -2646,19 +2370,13 @@
               <a:rPr lang="en-US"/>
               <a:t>Click to edit Master title style</a:t>
             </a:r>
-            <a:endParaRPr lang="en-IN"/>
-          </a:p>
-        </p:txBody>
-      </p:sp>
-      <p:sp>
-        <p:nvSpPr>
-          <p:cNvPr id="3" name="Content Placeholder 2">
-            <a:extLst>
-              <a:ext uri="{FF2B5EF4-FFF2-40B4-BE49-F238E27FC236}">
-                <a16:creationId xmlns:a16="http://schemas.microsoft.com/office/drawing/2014/main" id="{D6A51C2B-4252-166D-EE50-ACA066B044E9}"/>
-              </a:ext>
-            </a:extLst>
-          </p:cNvPr>
+            <a:endParaRPr lang="en-US" dirty="0"/>
+          </a:p>
+        </p:txBody>
+      </p:sp>
+      <p:sp>
+        <p:nvSpPr>
+          <p:cNvPr id="3" name="Content Placeholder 2"/>
           <p:cNvSpPr>
             <a:spLocks noGrp="1"/>
           </p:cNvSpPr>
@@ -2737,19 +2455,13 @@
               <a:rPr lang="en-US"/>
               <a:t>Fifth level</a:t>
             </a:r>
-            <a:endParaRPr lang="en-IN"/>
-          </a:p>
-        </p:txBody>
-      </p:sp>
-      <p:sp>
-        <p:nvSpPr>
-          <p:cNvPr id="4" name="Text Placeholder 3">
-            <a:extLst>
-              <a:ext uri="{FF2B5EF4-FFF2-40B4-BE49-F238E27FC236}">
-                <a16:creationId xmlns:a16="http://schemas.microsoft.com/office/drawing/2014/main" id="{0A7DB4AA-CAA4-F2B6-7D76-FE15E95DA24F}"/>
-              </a:ext>
-            </a:extLst>
-          </p:cNvPr>
+            <a:endParaRPr lang="en-US" dirty="0"/>
+          </a:p>
+        </p:txBody>
+      </p:sp>
+      <p:sp>
+        <p:nvSpPr>
+          <p:cNvPr id="4" name="Text Placeholder 3"/>
           <p:cNvSpPr>
             <a:spLocks noGrp="1"/>
           </p:cNvSpPr>
@@ -2814,13 +2526,7 @@
       </p:sp>
       <p:sp>
         <p:nvSpPr>
-          <p:cNvPr id="5" name="Date Placeholder 4">
-            <a:extLst>
-              <a:ext uri="{FF2B5EF4-FFF2-40B4-BE49-F238E27FC236}">
-                <a16:creationId xmlns:a16="http://schemas.microsoft.com/office/drawing/2014/main" id="{89A5BCCA-5BD9-E75C-B98D-4DC54F5105F9}"/>
-              </a:ext>
-            </a:extLst>
-          </p:cNvPr>
+          <p:cNvPr id="5" name="Date Placeholder 4"/>
           <p:cNvSpPr>
             <a:spLocks noGrp="1"/>
           </p:cNvSpPr>
@@ -2835,7 +2541,7 @@
           <a:p>
             <a:fld id="{7A059AC8-D1E1-47FC-89C7-8CFEDBB34742}" type="datetimeFigureOut">
               <a:rPr lang="en-IN" smtClean="0"/>
-              <a:t>22-11-2025</a:t>
+              <a:t>29-11-2025</a:t>
             </a:fld>
             <a:endParaRPr lang="en-IN"/>
           </a:p>
@@ -2843,13 +2549,7 @@
       </p:sp>
       <p:sp>
         <p:nvSpPr>
-          <p:cNvPr id="6" name="Footer Placeholder 5">
-            <a:extLst>
-              <a:ext uri="{FF2B5EF4-FFF2-40B4-BE49-F238E27FC236}">
-                <a16:creationId xmlns:a16="http://schemas.microsoft.com/office/drawing/2014/main" id="{C87786D9-C97B-1788-F55E-4E7D6939B7F5}"/>
-              </a:ext>
-            </a:extLst>
-          </p:cNvPr>
+          <p:cNvPr id="6" name="Footer Placeholder 5"/>
           <p:cNvSpPr>
             <a:spLocks noGrp="1"/>
           </p:cNvSpPr>
@@ -2868,13 +2568,7 @@
       </p:sp>
       <p:sp>
         <p:nvSpPr>
-          <p:cNvPr id="7" name="Slide Number Placeholder 6">
-            <a:extLst>
-              <a:ext uri="{FF2B5EF4-FFF2-40B4-BE49-F238E27FC236}">
-                <a16:creationId xmlns:a16="http://schemas.microsoft.com/office/drawing/2014/main" id="{B89BA114-FCD6-6130-87CE-3B2CD4632881}"/>
-              </a:ext>
-            </a:extLst>
-          </p:cNvPr>
+          <p:cNvPr id="7" name="Slide Number Placeholder 6"/>
           <p:cNvSpPr>
             <a:spLocks noGrp="1"/>
           </p:cNvSpPr>
@@ -2898,7 +2592,7 @@
     </p:spTree>
     <p:extLst>
       <p:ext uri="{BB962C8B-B14F-4D97-AF65-F5344CB8AC3E}">
-        <p14:creationId xmlns:p14="http://schemas.microsoft.com/office/powerpoint/2010/main" val="1676001494"/>
+        <p14:creationId xmlns:p14="http://schemas.microsoft.com/office/powerpoint/2010/main" val="1650009316"/>
       </p:ext>
     </p:extLst>
   </p:cSld>
@@ -2927,13 +2621,7 @@
       </p:grpSpPr>
       <p:sp>
         <p:nvSpPr>
-          <p:cNvPr id="2" name="Title 1">
-            <a:extLst>
-              <a:ext uri="{FF2B5EF4-FFF2-40B4-BE49-F238E27FC236}">
-                <a16:creationId xmlns:a16="http://schemas.microsoft.com/office/drawing/2014/main" id="{034FF8CB-EA2E-0AFD-7A41-8D9912408CED}"/>
-              </a:ext>
-            </a:extLst>
-          </p:cNvPr>
+          <p:cNvPr id="2" name="Title 1"/>
           <p:cNvSpPr>
             <a:spLocks noGrp="1"/>
           </p:cNvSpPr>
@@ -2959,21 +2647,15 @@
               <a:rPr lang="en-US"/>
               <a:t>Click to edit Master title style</a:t>
             </a:r>
-            <a:endParaRPr lang="en-IN"/>
-          </a:p>
-        </p:txBody>
-      </p:sp>
-      <p:sp>
-        <p:nvSpPr>
-          <p:cNvPr id="3" name="Picture Placeholder 2">
-            <a:extLst>
-              <a:ext uri="{FF2B5EF4-FFF2-40B4-BE49-F238E27FC236}">
-                <a16:creationId xmlns:a16="http://schemas.microsoft.com/office/drawing/2014/main" id="{B4B5879D-ED59-9FA6-8892-968D37549808}"/>
-              </a:ext>
-            </a:extLst>
-          </p:cNvPr>
+            <a:endParaRPr lang="en-US" dirty="0"/>
+          </a:p>
+        </p:txBody>
+      </p:sp>
+      <p:sp>
+        <p:nvSpPr>
+          <p:cNvPr id="3" name="Picture Placeholder 2"/>
           <p:cNvSpPr>
-            <a:spLocks noGrp="1"/>
+            <a:spLocks noGrp="1" noChangeAspect="1"/>
           </p:cNvSpPr>
           <p:nvPr>
             <p:ph type="pic" idx="1"/>
@@ -2986,7 +2668,7 @@
           </a:xfrm>
         </p:spPr>
         <p:txBody>
-          <a:bodyPr/>
+          <a:bodyPr anchor="t"/>
           <a:lstStyle>
             <a:lvl1pPr marL="0" indent="0">
               <a:buNone/>
@@ -3026,19 +2708,17 @@
             </a:lvl9pPr>
           </a:lstStyle>
           <a:p>
-            <a:endParaRPr lang="en-IN"/>
-          </a:p>
-        </p:txBody>
-      </p:sp>
-      <p:sp>
-        <p:nvSpPr>
-          <p:cNvPr id="4" name="Text Placeholder 3">
-            <a:extLst>
-              <a:ext uri="{FF2B5EF4-FFF2-40B4-BE49-F238E27FC236}">
-                <a16:creationId xmlns:a16="http://schemas.microsoft.com/office/drawing/2014/main" id="{293C4766-745B-C10F-91E7-323DBA473C29}"/>
-              </a:ext>
-            </a:extLst>
-          </p:cNvPr>
+            <a:r>
+              <a:rPr lang="en-US"/>
+              <a:t>Click icon to add picture</a:t>
+            </a:r>
+            <a:endParaRPr lang="en-US" dirty="0"/>
+          </a:p>
+        </p:txBody>
+      </p:sp>
+      <p:sp>
+        <p:nvSpPr>
+          <p:cNvPr id="4" name="Text Placeholder 3"/>
           <p:cNvSpPr>
             <a:spLocks noGrp="1"/>
           </p:cNvSpPr>
@@ -3103,13 +2783,7 @@
       </p:sp>
       <p:sp>
         <p:nvSpPr>
-          <p:cNvPr id="5" name="Date Placeholder 4">
-            <a:extLst>
-              <a:ext uri="{FF2B5EF4-FFF2-40B4-BE49-F238E27FC236}">
-                <a16:creationId xmlns:a16="http://schemas.microsoft.com/office/drawing/2014/main" id="{199A492D-AE56-8A33-F089-3AC283C3BE66}"/>
-              </a:ext>
-            </a:extLst>
-          </p:cNvPr>
+          <p:cNvPr id="5" name="Date Placeholder 4"/>
           <p:cNvSpPr>
             <a:spLocks noGrp="1"/>
           </p:cNvSpPr>
@@ -3124,7 +2798,7 @@
           <a:p>
             <a:fld id="{7A059AC8-D1E1-47FC-89C7-8CFEDBB34742}" type="datetimeFigureOut">
               <a:rPr lang="en-IN" smtClean="0"/>
-              <a:t>22-11-2025</a:t>
+              <a:t>29-11-2025</a:t>
             </a:fld>
             <a:endParaRPr lang="en-IN"/>
           </a:p>
@@ -3132,13 +2806,7 @@
       </p:sp>
       <p:sp>
         <p:nvSpPr>
-          <p:cNvPr id="6" name="Footer Placeholder 5">
-            <a:extLst>
-              <a:ext uri="{FF2B5EF4-FFF2-40B4-BE49-F238E27FC236}">
-                <a16:creationId xmlns:a16="http://schemas.microsoft.com/office/drawing/2014/main" id="{82FF702D-0D0E-359B-0839-B8F8DF1DC42F}"/>
-              </a:ext>
-            </a:extLst>
-          </p:cNvPr>
+          <p:cNvPr id="6" name="Footer Placeholder 5"/>
           <p:cNvSpPr>
             <a:spLocks noGrp="1"/>
           </p:cNvSpPr>
@@ -3157,13 +2825,7 @@
       </p:sp>
       <p:sp>
         <p:nvSpPr>
-          <p:cNvPr id="7" name="Slide Number Placeholder 6">
-            <a:extLst>
-              <a:ext uri="{FF2B5EF4-FFF2-40B4-BE49-F238E27FC236}">
-                <a16:creationId xmlns:a16="http://schemas.microsoft.com/office/drawing/2014/main" id="{D7607479-5059-3342-C294-763067E1EA2D}"/>
-              </a:ext>
-            </a:extLst>
-          </p:cNvPr>
+          <p:cNvPr id="7" name="Slide Number Placeholder 6"/>
           <p:cNvSpPr>
             <a:spLocks noGrp="1"/>
           </p:cNvSpPr>
@@ -3187,7 +2849,7 @@
     </p:spTree>
     <p:extLst>
       <p:ext uri="{BB962C8B-B14F-4D97-AF65-F5344CB8AC3E}">
-        <p14:creationId xmlns:p14="http://schemas.microsoft.com/office/powerpoint/2010/main" val="2850706405"/>
+        <p14:creationId xmlns:p14="http://schemas.microsoft.com/office/powerpoint/2010/main" val="519270451"/>
       </p:ext>
     </p:extLst>
   </p:cSld>
@@ -3221,13 +2883,7 @@
       </p:grpSpPr>
       <p:sp>
         <p:nvSpPr>
-          <p:cNvPr id="2" name="Title Placeholder 1">
-            <a:extLst>
-              <a:ext uri="{FF2B5EF4-FFF2-40B4-BE49-F238E27FC236}">
-                <a16:creationId xmlns:a16="http://schemas.microsoft.com/office/drawing/2014/main" id="{56CB2B03-EC14-182D-70FE-3EC99B2237BF}"/>
-              </a:ext>
-            </a:extLst>
-          </p:cNvPr>
+          <p:cNvPr id="2" name="Title Placeholder 1"/>
           <p:cNvSpPr>
             <a:spLocks noGrp="1"/>
           </p:cNvSpPr>
@@ -3254,19 +2910,13 @@
               <a:rPr lang="en-US"/>
               <a:t>Click to edit Master title style</a:t>
             </a:r>
-            <a:endParaRPr lang="en-IN"/>
-          </a:p>
-        </p:txBody>
-      </p:sp>
-      <p:sp>
-        <p:nvSpPr>
-          <p:cNvPr id="3" name="Text Placeholder 2">
-            <a:extLst>
-              <a:ext uri="{FF2B5EF4-FFF2-40B4-BE49-F238E27FC236}">
-                <a16:creationId xmlns:a16="http://schemas.microsoft.com/office/drawing/2014/main" id="{0D602AC1-826E-A893-8F89-C4A1C4BD6DBA}"/>
-              </a:ext>
-            </a:extLst>
-          </p:cNvPr>
+            <a:endParaRPr lang="en-US" dirty="0"/>
+          </a:p>
+        </p:txBody>
+      </p:sp>
+      <p:sp>
+        <p:nvSpPr>
+          <p:cNvPr id="3" name="Text Placeholder 2"/>
           <p:cNvSpPr>
             <a:spLocks noGrp="1"/>
           </p:cNvSpPr>
@@ -3322,19 +2972,13 @@
               <a:rPr lang="en-US"/>
               <a:t>Fifth level</a:t>
             </a:r>
-            <a:endParaRPr lang="en-IN"/>
-          </a:p>
-        </p:txBody>
-      </p:sp>
-      <p:sp>
-        <p:nvSpPr>
-          <p:cNvPr id="4" name="Date Placeholder 3">
-            <a:extLst>
-              <a:ext uri="{FF2B5EF4-FFF2-40B4-BE49-F238E27FC236}">
-                <a16:creationId xmlns:a16="http://schemas.microsoft.com/office/drawing/2014/main" id="{D29CDBC0-2059-ED71-4EC4-776A680B847E}"/>
-              </a:ext>
-            </a:extLst>
-          </p:cNvPr>
+            <a:endParaRPr lang="en-US" dirty="0"/>
+          </a:p>
+        </p:txBody>
+      </p:sp>
+      <p:sp>
+        <p:nvSpPr>
+          <p:cNvPr id="4" name="Date Placeholder 3"/>
           <p:cNvSpPr>
             <a:spLocks noGrp="1"/>
           </p:cNvSpPr>
@@ -3367,7 +3011,7 @@
           <a:p>
             <a:fld id="{7A059AC8-D1E1-47FC-89C7-8CFEDBB34742}" type="datetimeFigureOut">
               <a:rPr lang="en-IN" smtClean="0"/>
-              <a:t>22-11-2025</a:t>
+              <a:t>29-11-2025</a:t>
             </a:fld>
             <a:endParaRPr lang="en-IN"/>
           </a:p>
@@ -3375,13 +3019,7 @@
       </p:sp>
       <p:sp>
         <p:nvSpPr>
-          <p:cNvPr id="5" name="Footer Placeholder 4">
-            <a:extLst>
-              <a:ext uri="{FF2B5EF4-FFF2-40B4-BE49-F238E27FC236}">
-                <a16:creationId xmlns:a16="http://schemas.microsoft.com/office/drawing/2014/main" id="{44F8D394-1F85-5814-6476-B5BC00D000A1}"/>
-              </a:ext>
-            </a:extLst>
-          </p:cNvPr>
+          <p:cNvPr id="5" name="Footer Placeholder 4"/>
           <p:cNvSpPr>
             <a:spLocks noGrp="1"/>
           </p:cNvSpPr>
@@ -3418,13 +3056,7 @@
       </p:sp>
       <p:sp>
         <p:nvSpPr>
-          <p:cNvPr id="6" name="Slide Number Placeholder 5">
-            <a:extLst>
-              <a:ext uri="{FF2B5EF4-FFF2-40B4-BE49-F238E27FC236}">
-                <a16:creationId xmlns:a16="http://schemas.microsoft.com/office/drawing/2014/main" id="{DE3A827F-3BBB-C117-C396-55A60E6D238C}"/>
-              </a:ext>
-            </a:extLst>
-          </p:cNvPr>
+          <p:cNvPr id="6" name="Slide Number Placeholder 5"/>
           <p:cNvSpPr>
             <a:spLocks noGrp="1"/>
           </p:cNvSpPr>
@@ -3466,23 +3098,23 @@
     </p:spTree>
     <p:extLst>
       <p:ext uri="{BB962C8B-B14F-4D97-AF65-F5344CB8AC3E}">
-        <p14:creationId xmlns:p14="http://schemas.microsoft.com/office/powerpoint/2010/main" val="1632435202"/>
+        <p14:creationId xmlns:p14="http://schemas.microsoft.com/office/powerpoint/2010/main" val="2029941712"/>
       </p:ext>
     </p:extLst>
   </p:cSld>
   <p:clrMap bg1="lt1" tx1="dk1" bg2="lt2" tx2="dk2" accent1="accent1" accent2="accent2" accent3="accent3" accent4="accent4" accent5="accent5" accent6="accent6" hlink="hlink" folHlink="folHlink"/>
   <p:sldLayoutIdLst>
-    <p:sldLayoutId id="2147483649" r:id="rId1"/>
-    <p:sldLayoutId id="2147483650" r:id="rId2"/>
-    <p:sldLayoutId id="2147483651" r:id="rId3"/>
-    <p:sldLayoutId id="2147483652" r:id="rId4"/>
-    <p:sldLayoutId id="2147483653" r:id="rId5"/>
-    <p:sldLayoutId id="2147483654" r:id="rId6"/>
-    <p:sldLayoutId id="2147483655" r:id="rId7"/>
-    <p:sldLayoutId id="2147483656" r:id="rId8"/>
-    <p:sldLayoutId id="2147483657" r:id="rId9"/>
-    <p:sldLayoutId id="2147483658" r:id="rId10"/>
-    <p:sldLayoutId id="2147483659" r:id="rId11"/>
+    <p:sldLayoutId id="2147483673" r:id="rId1"/>
+    <p:sldLayoutId id="2147483674" r:id="rId2"/>
+    <p:sldLayoutId id="2147483675" r:id="rId3"/>
+    <p:sldLayoutId id="2147483676" r:id="rId4"/>
+    <p:sldLayoutId id="2147483677" r:id="rId5"/>
+    <p:sldLayoutId id="2147483678" r:id="rId6"/>
+    <p:sldLayoutId id="2147483679" r:id="rId7"/>
+    <p:sldLayoutId id="2147483680" r:id="rId8"/>
+    <p:sldLayoutId id="2147483681" r:id="rId9"/>
+    <p:sldLayoutId id="2147483682" r:id="rId10"/>
+    <p:sldLayoutId id="2147483683" r:id="rId11"/>
   </p:sldLayoutIdLst>
   <p:txStyles>
     <p:titleStyle>
@@ -3798,8 +3430,8 @@
         </p:nvSpPr>
         <p:spPr>
           <a:xfrm>
-            <a:off x="2743200" y="254077"/>
-            <a:ext cx="1371600" cy="310620"/>
+            <a:off x="3581400" y="1047809"/>
+            <a:ext cx="1028700" cy="232965"/>
           </a:xfrm>
           <a:prstGeom prst="rect">
             <a:avLst/>
@@ -3825,10 +3457,10 @@
           <a:p>
             <a:pPr algn="ctr"/>
             <a:r>
-              <a:rPr lang="en-US" sz="1400" dirty="0"/>
+              <a:rPr lang="en-US" sz="1050" dirty="0"/>
               <a:t>Infrared Image</a:t>
             </a:r>
-            <a:endParaRPr lang="en-IN" sz="1400" dirty="0"/>
+            <a:endParaRPr lang="en-IN" sz="1050" dirty="0"/>
           </a:p>
         </p:txBody>
       </p:sp>
@@ -3846,8 +3478,8 @@
         </p:nvSpPr>
         <p:spPr>
           <a:xfrm>
-            <a:off x="8239662" y="254077"/>
-            <a:ext cx="1371600" cy="310620"/>
+            <a:off x="7703747" y="1047809"/>
+            <a:ext cx="1028700" cy="232965"/>
           </a:xfrm>
           <a:prstGeom prst="rect">
             <a:avLst/>
@@ -3873,10 +3505,10 @@
           <a:p>
             <a:pPr algn="ctr"/>
             <a:r>
-              <a:rPr lang="en-US" sz="1400" dirty="0"/>
+              <a:rPr lang="en-US" sz="1050" dirty="0"/>
               <a:t>Visible Image</a:t>
             </a:r>
-            <a:endParaRPr lang="en-IN" sz="1400" dirty="0"/>
+            <a:endParaRPr lang="en-IN" sz="1050" dirty="0"/>
           </a:p>
         </p:txBody>
       </p:sp>
@@ -3894,8 +3526,8 @@
         </p:nvSpPr>
         <p:spPr>
           <a:xfrm>
-            <a:off x="2776539" y="1771260"/>
-            <a:ext cx="1304924" cy="310620"/>
+            <a:off x="3606405" y="2185696"/>
+            <a:ext cx="978693" cy="232965"/>
           </a:xfrm>
           <a:prstGeom prst="rect">
             <a:avLst/>
@@ -3921,10 +3553,10 @@
           <a:p>
             <a:pPr algn="ctr"/>
             <a:r>
-              <a:rPr lang="en-US" sz="1400" dirty="0"/>
+              <a:rPr lang="en-US" sz="1050" dirty="0"/>
               <a:t>Salient Mask</a:t>
             </a:r>
-            <a:endParaRPr lang="en-IN" sz="1400" dirty="0"/>
+            <a:endParaRPr lang="en-IN" sz="1050" dirty="0"/>
           </a:p>
         </p:txBody>
       </p:sp>
@@ -3942,8 +3574,8 @@
         </p:nvSpPr>
         <p:spPr>
           <a:xfrm>
-            <a:off x="8168905" y="1771260"/>
-            <a:ext cx="1513114" cy="310620"/>
+            <a:off x="7650679" y="2185696"/>
+            <a:ext cx="1134836" cy="232965"/>
           </a:xfrm>
           <a:prstGeom prst="rect">
             <a:avLst/>
@@ -3969,10 +3601,10 @@
           <a:p>
             <a:pPr algn="ctr"/>
             <a:r>
-              <a:rPr lang="en-US" sz="1400" dirty="0"/>
+              <a:rPr lang="en-US" sz="1050" dirty="0"/>
               <a:t>Background Mask</a:t>
             </a:r>
-            <a:endParaRPr lang="en-IN" sz="1400" dirty="0"/>
+            <a:endParaRPr lang="en-IN" sz="1050" dirty="0"/>
           </a:p>
         </p:txBody>
       </p:sp>
@@ -3990,8 +3622,8 @@
         </p:nvSpPr>
         <p:spPr>
           <a:xfrm>
-            <a:off x="1920505" y="1771260"/>
-            <a:ext cx="308954" cy="310620"/>
+            <a:off x="2964379" y="2185696"/>
+            <a:ext cx="231716" cy="232965"/>
           </a:xfrm>
           <a:prstGeom prst="flowChartSummingJunction">
             <a:avLst/>
@@ -4016,7 +3648,7 @@
           <a:lstStyle/>
           <a:p>
             <a:pPr algn="ctr"/>
-            <a:endParaRPr lang="en-IN"/>
+            <a:endParaRPr lang="en-IN" sz="1350"/>
           </a:p>
         </p:txBody>
       </p:sp>
@@ -4034,8 +3666,8 @@
         </p:nvSpPr>
         <p:spPr>
           <a:xfrm>
-            <a:off x="4628543" y="1771260"/>
-            <a:ext cx="308954" cy="310620"/>
+            <a:off x="4995407" y="2185696"/>
+            <a:ext cx="231716" cy="232965"/>
           </a:xfrm>
           <a:prstGeom prst="flowChartSummingJunction">
             <a:avLst/>
@@ -4060,7 +3692,7 @@
           <a:lstStyle/>
           <a:p>
             <a:pPr algn="ctr"/>
-            <a:endParaRPr lang="en-IN"/>
+            <a:endParaRPr lang="en-IN" sz="1350"/>
           </a:p>
         </p:txBody>
       </p:sp>
@@ -4078,8 +3710,8 @@
         </p:nvSpPr>
         <p:spPr>
           <a:xfrm>
-            <a:off x="7254505" y="1771260"/>
-            <a:ext cx="308954" cy="310620"/>
+            <a:off x="6964879" y="2185696"/>
+            <a:ext cx="231716" cy="232965"/>
           </a:xfrm>
           <a:prstGeom prst="flowChartSummingJunction">
             <a:avLst/>
@@ -4104,7 +3736,7 @@
           <a:lstStyle/>
           <a:p>
             <a:pPr algn="ctr"/>
-            <a:endParaRPr lang="en-IN"/>
+            <a:endParaRPr lang="en-IN" sz="1350"/>
           </a:p>
         </p:txBody>
       </p:sp>
@@ -4122,8 +3754,8 @@
         </p:nvSpPr>
         <p:spPr>
           <a:xfrm>
-            <a:off x="10287465" y="1771260"/>
-            <a:ext cx="308954" cy="310620"/>
+            <a:off x="9239599" y="2185696"/>
+            <a:ext cx="231716" cy="232965"/>
           </a:xfrm>
           <a:prstGeom prst="flowChartSummingJunction">
             <a:avLst/>
@@ -4148,7 +3780,7 @@
           <a:lstStyle/>
           <a:p>
             <a:pPr algn="ctr"/>
-            <a:endParaRPr lang="en-IN"/>
+            <a:endParaRPr lang="en-IN" sz="1350"/>
           </a:p>
         </p:txBody>
       </p:sp>
@@ -4169,8 +3801,8 @@
         </p:nvCxnSpPr>
         <p:spPr>
           <a:xfrm flipH="1">
-            <a:off x="2074982" y="409387"/>
-            <a:ext cx="668218" cy="0"/>
+            <a:off x="3080236" y="1164290"/>
+            <a:ext cx="501164" cy="0"/>
           </a:xfrm>
           <a:prstGeom prst="line">
             <a:avLst/>
@@ -4208,8 +3840,8 @@
         </p:nvCxnSpPr>
         <p:spPr>
           <a:xfrm>
-            <a:off x="2074982" y="409387"/>
-            <a:ext cx="0" cy="1361873"/>
+            <a:off x="3080237" y="1164292"/>
+            <a:ext cx="0" cy="1021405"/>
           </a:xfrm>
           <a:prstGeom prst="straightConnector1">
             <a:avLst/>
@@ -4250,8 +3882,8 @@
         </p:nvCxnSpPr>
         <p:spPr>
           <a:xfrm flipH="1" flipV="1">
-            <a:off x="2227382" y="1923660"/>
-            <a:ext cx="549157" cy="2910"/>
+            <a:off x="3194537" y="2299996"/>
+            <a:ext cx="411868" cy="2183"/>
           </a:xfrm>
           <a:prstGeom prst="straightConnector1">
             <a:avLst/>
@@ -4292,8 +3924,8 @@
         </p:nvCxnSpPr>
         <p:spPr>
           <a:xfrm>
-            <a:off x="4081463" y="1923660"/>
-            <a:ext cx="547080" cy="2910"/>
+            <a:off x="4585097" y="2299996"/>
+            <a:ext cx="410310" cy="2183"/>
           </a:xfrm>
           <a:prstGeom prst="straightConnector1">
             <a:avLst/>
@@ -4333,8 +3965,8 @@
         </p:nvCxnSpPr>
         <p:spPr>
           <a:xfrm flipH="1">
-            <a:off x="9611262" y="409387"/>
-            <a:ext cx="836237" cy="0"/>
+            <a:off x="8732447" y="1164290"/>
+            <a:ext cx="627178" cy="0"/>
           </a:xfrm>
           <a:prstGeom prst="line">
             <a:avLst/>
@@ -4371,8 +4003,8 @@
         </p:nvCxnSpPr>
         <p:spPr>
           <a:xfrm>
-            <a:off x="10441942" y="409387"/>
-            <a:ext cx="0" cy="1361873"/>
+            <a:off x="9355457" y="1164292"/>
+            <a:ext cx="0" cy="1021405"/>
           </a:xfrm>
           <a:prstGeom prst="straightConnector1">
             <a:avLst/>
@@ -4413,8 +4045,8 @@
         </p:nvCxnSpPr>
         <p:spPr>
           <a:xfrm flipH="1">
-            <a:off x="7563459" y="1923660"/>
-            <a:ext cx="605446" cy="2910"/>
+            <a:off x="7196595" y="2299996"/>
+            <a:ext cx="454085" cy="2183"/>
           </a:xfrm>
           <a:prstGeom prst="straightConnector1">
             <a:avLst/>
@@ -4455,8 +4087,8 @@
         </p:nvCxnSpPr>
         <p:spPr>
           <a:xfrm flipV="1">
-            <a:off x="9682019" y="1926570"/>
-            <a:ext cx="605446" cy="5471"/>
+            <a:off x="8785515" y="2302179"/>
+            <a:ext cx="454085" cy="4103"/>
           </a:xfrm>
           <a:prstGeom prst="straightConnector1">
             <a:avLst/>
@@ -4496,8 +4128,8 @@
         </p:nvCxnSpPr>
         <p:spPr>
           <a:xfrm>
-            <a:off x="7408982" y="409387"/>
-            <a:ext cx="0" cy="1361873"/>
+            <a:off x="7080737" y="1164292"/>
+            <a:ext cx="0" cy="1021405"/>
           </a:xfrm>
           <a:prstGeom prst="straightConnector1">
             <a:avLst/>
@@ -4537,8 +4169,8 @@
         </p:nvCxnSpPr>
         <p:spPr>
           <a:xfrm flipH="1">
-            <a:off x="4114802" y="409387"/>
-            <a:ext cx="3294180" cy="0"/>
+            <a:off x="4610103" y="1164290"/>
+            <a:ext cx="2470635" cy="0"/>
           </a:xfrm>
           <a:prstGeom prst="line">
             <a:avLst/>
@@ -4575,8 +4207,8 @@
         </p:nvCxnSpPr>
         <p:spPr>
           <a:xfrm flipH="1">
-            <a:off x="7939825" y="417382"/>
-            <a:ext cx="299837" cy="0"/>
+            <a:off x="7478869" y="1170287"/>
+            <a:ext cx="224878" cy="0"/>
           </a:xfrm>
           <a:prstGeom prst="line">
             <a:avLst/>
@@ -4613,8 +4245,8 @@
         </p:nvCxnSpPr>
         <p:spPr>
           <a:xfrm flipV="1">
-            <a:off x="7939825" y="417382"/>
-            <a:ext cx="0" cy="818990"/>
+            <a:off x="7478869" y="1170287"/>
+            <a:ext cx="0" cy="614243"/>
           </a:xfrm>
           <a:prstGeom prst="line">
             <a:avLst/>
@@ -4651,8 +4283,8 @@
         </p:nvCxnSpPr>
         <p:spPr>
           <a:xfrm flipH="1">
-            <a:off x="4783020" y="1236372"/>
-            <a:ext cx="3156805" cy="0"/>
+            <a:off x="5111265" y="1784529"/>
+            <a:ext cx="2367604" cy="0"/>
           </a:xfrm>
           <a:prstGeom prst="line">
             <a:avLst/>
@@ -4689,8 +4321,8 @@
         </p:nvCxnSpPr>
         <p:spPr>
           <a:xfrm>
-            <a:off x="4783020" y="1236372"/>
-            <a:ext cx="0" cy="542883"/>
+            <a:off x="5111265" y="1784530"/>
+            <a:ext cx="0" cy="407162"/>
           </a:xfrm>
           <a:prstGeom prst="straightConnector1">
             <a:avLst/>
@@ -4728,8 +4360,8 @@
         </p:nvSpPr>
         <p:spPr>
           <a:xfrm>
-            <a:off x="1422520" y="2488023"/>
-            <a:ext cx="1304924" cy="310620"/>
+            <a:off x="2590891" y="2723268"/>
+            <a:ext cx="978693" cy="232965"/>
           </a:xfrm>
           <a:prstGeom prst="rect">
             <a:avLst/>
@@ -4755,10 +4387,10 @@
           <a:p>
             <a:pPr algn="ctr"/>
             <a:r>
-              <a:rPr lang="en-US" sz="1400" dirty="0"/>
+              <a:rPr lang="en-US" sz="1050" dirty="0"/>
               <a:t>Image 1A</a:t>
             </a:r>
-            <a:endParaRPr lang="en-IN" sz="1400" dirty="0"/>
+            <a:endParaRPr lang="en-IN" sz="1050" dirty="0"/>
           </a:p>
         </p:txBody>
       </p:sp>
@@ -4776,8 +4408,8 @@
         </p:nvSpPr>
         <p:spPr>
           <a:xfrm>
-            <a:off x="4130558" y="2490971"/>
-            <a:ext cx="1304924" cy="310620"/>
+            <a:off x="4621920" y="2725479"/>
+            <a:ext cx="978693" cy="232965"/>
           </a:xfrm>
           <a:prstGeom prst="rect">
             <a:avLst/>
@@ -4803,10 +4435,10 @@
           <a:p>
             <a:pPr algn="ctr"/>
             <a:r>
-              <a:rPr lang="en-US" sz="1400" dirty="0"/>
+              <a:rPr lang="en-US" sz="1050" dirty="0"/>
               <a:t>Image 1B</a:t>
             </a:r>
-            <a:endParaRPr lang="en-IN" sz="1400" dirty="0"/>
+            <a:endParaRPr lang="en-IN" sz="1050" dirty="0"/>
           </a:p>
         </p:txBody>
       </p:sp>
@@ -4824,8 +4456,8 @@
         </p:nvSpPr>
         <p:spPr>
           <a:xfrm>
-            <a:off x="6756520" y="2488023"/>
-            <a:ext cx="1304924" cy="310620"/>
+            <a:off x="6591391" y="2723268"/>
+            <a:ext cx="978693" cy="232965"/>
           </a:xfrm>
           <a:prstGeom prst="rect">
             <a:avLst/>
@@ -4851,10 +4483,10 @@
           <a:p>
             <a:pPr algn="ctr"/>
             <a:r>
-              <a:rPr lang="en-US" sz="1400" dirty="0"/>
+              <a:rPr lang="en-US" sz="1050" dirty="0"/>
               <a:t>Image 2A</a:t>
             </a:r>
-            <a:endParaRPr lang="en-IN" sz="1400" dirty="0"/>
+            <a:endParaRPr lang="en-IN" sz="1050" dirty="0"/>
           </a:p>
         </p:txBody>
       </p:sp>
@@ -4872,8 +4504,8 @@
         </p:nvSpPr>
         <p:spPr>
           <a:xfrm>
-            <a:off x="9789480" y="2488023"/>
-            <a:ext cx="1304924" cy="310620"/>
+            <a:off x="8866111" y="2723268"/>
+            <a:ext cx="978693" cy="232965"/>
           </a:xfrm>
           <a:prstGeom prst="rect">
             <a:avLst/>
@@ -4899,10 +4531,10 @@
           <a:p>
             <a:pPr algn="ctr"/>
             <a:r>
-              <a:rPr lang="en-US" sz="1400" dirty="0"/>
+              <a:rPr lang="en-US" sz="1050" dirty="0"/>
               <a:t>Image 2B</a:t>
             </a:r>
-            <a:endParaRPr lang="en-IN" sz="1400" dirty="0"/>
+            <a:endParaRPr lang="en-IN" sz="1050" dirty="0"/>
           </a:p>
         </p:txBody>
       </p:sp>
@@ -4922,8 +4554,8 @@
         </p:nvCxnSpPr>
         <p:spPr>
           <a:xfrm>
-            <a:off x="2074982" y="2081880"/>
-            <a:ext cx="0" cy="402240"/>
+            <a:off x="3080237" y="2418660"/>
+            <a:ext cx="0" cy="301680"/>
           </a:xfrm>
           <a:prstGeom prst="straightConnector1">
             <a:avLst/>
@@ -4961,8 +4593,8 @@
         </p:nvSpPr>
         <p:spPr>
           <a:xfrm>
-            <a:off x="1720203" y="3921066"/>
-            <a:ext cx="381939" cy="352194"/>
+            <a:off x="2814153" y="3798049"/>
+            <a:ext cx="286454" cy="264146"/>
           </a:xfrm>
           <a:prstGeom prst="rect">
             <a:avLst/>
@@ -4987,7 +4619,7 @@
           <a:lstStyle/>
           <a:p>
             <a:pPr algn="ctr"/>
-            <a:endParaRPr lang="en-IN"/>
+            <a:endParaRPr lang="en-IN" sz="1350"/>
           </a:p>
         </p:txBody>
       </p:sp>
@@ -5005,8 +4637,8 @@
         </p:nvSpPr>
         <p:spPr>
           <a:xfrm>
-            <a:off x="2069703" y="3921066"/>
-            <a:ext cx="381939" cy="352194"/>
+            <a:off x="3076278" y="3798049"/>
+            <a:ext cx="286454" cy="264146"/>
           </a:xfrm>
           <a:prstGeom prst="rect">
             <a:avLst/>
@@ -5031,7 +4663,7 @@
           <a:lstStyle/>
           <a:p>
             <a:pPr algn="ctr"/>
-            <a:endParaRPr lang="en-IN"/>
+            <a:endParaRPr lang="en-IN" sz="1350"/>
           </a:p>
         </p:txBody>
       </p:sp>
@@ -5049,8 +4681,8 @@
         </p:nvSpPr>
         <p:spPr>
           <a:xfrm>
-            <a:off x="1720203" y="4275306"/>
-            <a:ext cx="381939" cy="352194"/>
+            <a:off x="2814153" y="4063729"/>
+            <a:ext cx="286454" cy="264146"/>
           </a:xfrm>
           <a:prstGeom prst="rect">
             <a:avLst/>
@@ -5075,7 +4707,7 @@
           <a:lstStyle/>
           <a:p>
             <a:pPr algn="ctr"/>
-            <a:endParaRPr lang="en-IN"/>
+            <a:endParaRPr lang="en-IN" sz="1350"/>
           </a:p>
         </p:txBody>
       </p:sp>
@@ -5093,8 +4725,8 @@
         </p:nvSpPr>
         <p:spPr>
           <a:xfrm>
-            <a:off x="2069703" y="4275306"/>
-            <a:ext cx="381939" cy="352194"/>
+            <a:off x="3076278" y="4063729"/>
+            <a:ext cx="286454" cy="264146"/>
           </a:xfrm>
           <a:prstGeom prst="rect">
             <a:avLst/>
@@ -5119,7 +4751,7 @@
           <a:lstStyle/>
           <a:p>
             <a:pPr algn="ctr"/>
-            <a:endParaRPr lang="en-IN"/>
+            <a:endParaRPr lang="en-IN" sz="1350"/>
           </a:p>
         </p:txBody>
       </p:sp>
@@ -5139,8 +4771,8 @@
         </p:nvCxnSpPr>
         <p:spPr>
           <a:xfrm>
-            <a:off x="4783020" y="2081880"/>
-            <a:ext cx="0" cy="402240"/>
+            <a:off x="5111265" y="2418660"/>
+            <a:ext cx="0" cy="301680"/>
           </a:xfrm>
           <a:prstGeom prst="straightConnector1">
             <a:avLst/>
@@ -5180,8 +4812,8 @@
         </p:nvCxnSpPr>
         <p:spPr>
           <a:xfrm>
-            <a:off x="7421882" y="2081880"/>
-            <a:ext cx="0" cy="402240"/>
+            <a:off x="7090412" y="2418660"/>
+            <a:ext cx="0" cy="301680"/>
           </a:xfrm>
           <a:prstGeom prst="straightConnector1">
             <a:avLst/>
@@ -5221,8 +4853,8 @@
         </p:nvCxnSpPr>
         <p:spPr>
           <a:xfrm>
-            <a:off x="10441942" y="2081880"/>
-            <a:ext cx="0" cy="402240"/>
+            <a:off x="9355457" y="2418660"/>
+            <a:ext cx="0" cy="301680"/>
           </a:xfrm>
           <a:prstGeom prst="straightConnector1">
             <a:avLst/>
@@ -5263,8 +4895,8 @@
         </p:nvCxnSpPr>
         <p:spPr>
           <a:xfrm flipH="1">
-            <a:off x="2069704" y="2798643"/>
-            <a:ext cx="5278" cy="402240"/>
+            <a:off x="3076279" y="2956232"/>
+            <a:ext cx="3959" cy="301680"/>
           </a:xfrm>
           <a:prstGeom prst="straightConnector1">
             <a:avLst/>
@@ -5304,8 +4936,8 @@
         </p:nvCxnSpPr>
         <p:spPr>
           <a:xfrm flipH="1">
-            <a:off x="4777742" y="2798643"/>
-            <a:ext cx="5278" cy="402240"/>
+            <a:off x="5107307" y="2956232"/>
+            <a:ext cx="3959" cy="301680"/>
           </a:xfrm>
           <a:prstGeom prst="straightConnector1">
             <a:avLst/>
@@ -5345,8 +4977,8 @@
         </p:nvCxnSpPr>
         <p:spPr>
           <a:xfrm flipH="1">
-            <a:off x="7406343" y="2798643"/>
-            <a:ext cx="5278" cy="402240"/>
+            <a:off x="7078758" y="2956232"/>
+            <a:ext cx="3959" cy="301680"/>
           </a:xfrm>
           <a:prstGeom prst="straightConnector1">
             <a:avLst/>
@@ -5386,8 +5018,8 @@
         </p:nvCxnSpPr>
         <p:spPr>
           <a:xfrm flipH="1">
-            <a:off x="10441942" y="2794740"/>
-            <a:ext cx="5278" cy="402240"/>
+            <a:off x="9355457" y="2953305"/>
+            <a:ext cx="3959" cy="301680"/>
           </a:xfrm>
           <a:prstGeom prst="straightConnector1">
             <a:avLst/>
@@ -5425,8 +5057,8 @@
         </p:nvSpPr>
         <p:spPr>
           <a:xfrm>
-            <a:off x="4428242" y="3921066"/>
-            <a:ext cx="360000" cy="360000"/>
+            <a:off x="4845182" y="3798050"/>
+            <a:ext cx="270000" cy="270000"/>
           </a:xfrm>
           <a:prstGeom prst="rect">
             <a:avLst/>
@@ -5451,7 +5083,7 @@
           <a:lstStyle/>
           <a:p>
             <a:pPr algn="ctr"/>
-            <a:endParaRPr lang="en-IN"/>
+            <a:endParaRPr lang="en-IN" sz="1350"/>
           </a:p>
         </p:txBody>
       </p:sp>
@@ -5469,8 +5101,8 @@
         </p:nvSpPr>
         <p:spPr>
           <a:xfrm>
-            <a:off x="4777742" y="3921066"/>
-            <a:ext cx="360000" cy="360000"/>
+            <a:off x="5107307" y="3798050"/>
+            <a:ext cx="270000" cy="270000"/>
           </a:xfrm>
           <a:prstGeom prst="rect">
             <a:avLst/>
@@ -5495,7 +5127,7 @@
           <a:lstStyle/>
           <a:p>
             <a:pPr algn="ctr"/>
-            <a:endParaRPr lang="en-IN"/>
+            <a:endParaRPr lang="en-IN" sz="1350"/>
           </a:p>
         </p:txBody>
       </p:sp>
@@ -5513,8 +5145,8 @@
         </p:nvSpPr>
         <p:spPr>
           <a:xfrm>
-            <a:off x="4428242" y="4275306"/>
-            <a:ext cx="360000" cy="360000"/>
+            <a:off x="4845182" y="4063730"/>
+            <a:ext cx="270000" cy="270000"/>
           </a:xfrm>
           <a:prstGeom prst="rect">
             <a:avLst/>
@@ -5539,7 +5171,7 @@
           <a:lstStyle/>
           <a:p>
             <a:pPr algn="ctr"/>
-            <a:endParaRPr lang="en-IN"/>
+            <a:endParaRPr lang="en-IN" sz="1350"/>
           </a:p>
         </p:txBody>
       </p:sp>
@@ -5557,8 +5189,8 @@
         </p:nvSpPr>
         <p:spPr>
           <a:xfrm>
-            <a:off x="4777742" y="4275306"/>
-            <a:ext cx="360000" cy="360000"/>
+            <a:off x="5107307" y="4063730"/>
+            <a:ext cx="270000" cy="270000"/>
           </a:xfrm>
           <a:prstGeom prst="rect">
             <a:avLst/>
@@ -5583,7 +5215,7 @@
           <a:lstStyle/>
           <a:p>
             <a:pPr algn="ctr"/>
-            <a:endParaRPr lang="en-IN"/>
+            <a:endParaRPr lang="en-IN" sz="1350"/>
           </a:p>
         </p:txBody>
       </p:sp>
@@ -5601,8 +5233,8 @@
         </p:nvSpPr>
         <p:spPr>
           <a:xfrm>
-            <a:off x="7056843" y="3921066"/>
-            <a:ext cx="360000" cy="360000"/>
+            <a:off x="6816632" y="3798050"/>
+            <a:ext cx="270000" cy="270000"/>
           </a:xfrm>
           <a:prstGeom prst="rect">
             <a:avLst/>
@@ -5627,7 +5259,7 @@
           <a:lstStyle/>
           <a:p>
             <a:pPr algn="ctr"/>
-            <a:endParaRPr lang="en-IN"/>
+            <a:endParaRPr lang="en-IN" sz="1350"/>
           </a:p>
         </p:txBody>
       </p:sp>
@@ -5645,8 +5277,8 @@
         </p:nvSpPr>
         <p:spPr>
           <a:xfrm>
-            <a:off x="7406343" y="3921066"/>
-            <a:ext cx="360000" cy="360000"/>
+            <a:off x="7078757" y="3798050"/>
+            <a:ext cx="270000" cy="270000"/>
           </a:xfrm>
           <a:prstGeom prst="rect">
             <a:avLst/>
@@ -5671,7 +5303,7 @@
           <a:lstStyle/>
           <a:p>
             <a:pPr algn="ctr"/>
-            <a:endParaRPr lang="en-IN"/>
+            <a:endParaRPr lang="en-IN" sz="1350"/>
           </a:p>
         </p:txBody>
       </p:sp>
@@ -5689,8 +5321,8 @@
         </p:nvSpPr>
         <p:spPr>
           <a:xfrm>
-            <a:off x="7056843" y="4275306"/>
-            <a:ext cx="360000" cy="360000"/>
+            <a:off x="6816632" y="4063730"/>
+            <a:ext cx="270000" cy="270000"/>
           </a:xfrm>
           <a:prstGeom prst="rect">
             <a:avLst/>
@@ -5715,7 +5347,7 @@
           <a:lstStyle/>
           <a:p>
             <a:pPr algn="ctr"/>
-            <a:endParaRPr lang="en-IN"/>
+            <a:endParaRPr lang="en-IN" sz="1350"/>
           </a:p>
         </p:txBody>
       </p:sp>
@@ -5733,8 +5365,8 @@
         </p:nvSpPr>
         <p:spPr>
           <a:xfrm>
-            <a:off x="7406343" y="4275306"/>
-            <a:ext cx="360000" cy="360000"/>
+            <a:off x="7078757" y="4063730"/>
+            <a:ext cx="270000" cy="270000"/>
           </a:xfrm>
           <a:prstGeom prst="rect">
             <a:avLst/>
@@ -5759,7 +5391,7 @@
           <a:lstStyle/>
           <a:p>
             <a:pPr algn="ctr"/>
-            <a:endParaRPr lang="en-IN"/>
+            <a:endParaRPr lang="en-IN" sz="1350"/>
           </a:p>
         </p:txBody>
       </p:sp>
@@ -5777,8 +5409,8 @@
         </p:nvSpPr>
         <p:spPr>
           <a:xfrm>
-            <a:off x="10092442" y="3913260"/>
-            <a:ext cx="360000" cy="360000"/>
+            <a:off x="9093332" y="3792195"/>
+            <a:ext cx="270000" cy="270000"/>
           </a:xfrm>
           <a:prstGeom prst="rect">
             <a:avLst/>
@@ -5803,7 +5435,7 @@
           <a:lstStyle/>
           <a:p>
             <a:pPr algn="ctr"/>
-            <a:endParaRPr lang="en-IN"/>
+            <a:endParaRPr lang="en-IN" sz="1350"/>
           </a:p>
         </p:txBody>
       </p:sp>
@@ -5821,8 +5453,8 @@
         </p:nvSpPr>
         <p:spPr>
           <a:xfrm>
-            <a:off x="10441942" y="3913260"/>
-            <a:ext cx="360000" cy="360000"/>
+            <a:off x="9355457" y="3792195"/>
+            <a:ext cx="270000" cy="270000"/>
           </a:xfrm>
           <a:prstGeom prst="rect">
             <a:avLst/>
@@ -5847,7 +5479,7 @@
           <a:lstStyle/>
           <a:p>
             <a:pPr algn="ctr"/>
-            <a:endParaRPr lang="en-IN"/>
+            <a:endParaRPr lang="en-IN" sz="1350"/>
           </a:p>
         </p:txBody>
       </p:sp>
@@ -5865,8 +5497,8 @@
         </p:nvSpPr>
         <p:spPr>
           <a:xfrm>
-            <a:off x="10092442" y="4267500"/>
-            <a:ext cx="360000" cy="360000"/>
+            <a:off x="9093332" y="4057875"/>
+            <a:ext cx="270000" cy="270000"/>
           </a:xfrm>
           <a:prstGeom prst="rect">
             <a:avLst/>
@@ -5891,7 +5523,7 @@
           <a:lstStyle/>
           <a:p>
             <a:pPr algn="ctr"/>
-            <a:endParaRPr lang="en-IN"/>
+            <a:endParaRPr lang="en-IN" sz="1350"/>
           </a:p>
         </p:txBody>
       </p:sp>
@@ -5909,8 +5541,8 @@
         </p:nvSpPr>
         <p:spPr>
           <a:xfrm>
-            <a:off x="10441942" y="4267500"/>
-            <a:ext cx="360000" cy="360000"/>
+            <a:off x="9355457" y="4057875"/>
+            <a:ext cx="270000" cy="270000"/>
           </a:xfrm>
           <a:prstGeom prst="rect">
             <a:avLst/>
@@ -5935,7 +5567,7 @@
           <a:lstStyle/>
           <a:p>
             <a:pPr algn="ctr"/>
-            <a:endParaRPr lang="en-IN"/>
+            <a:endParaRPr lang="en-IN" sz="1350"/>
           </a:p>
         </p:txBody>
       </p:sp>
@@ -5953,8 +5585,8 @@
         </p:nvSpPr>
         <p:spPr>
           <a:xfrm>
-            <a:off x="5449200" y="4744623"/>
-            <a:ext cx="1304921" cy="1045896"/>
+            <a:off x="5610901" y="4415717"/>
+            <a:ext cx="978691" cy="784422"/>
           </a:xfrm>
           <a:prstGeom prst="diamond">
             <a:avLst/>
@@ -5980,10 +5612,10 @@
           <a:p>
             <a:pPr algn="ctr"/>
             <a:r>
-              <a:rPr lang="en-US" sz="1050" dirty="0"/>
+              <a:rPr lang="en-US" sz="788" dirty="0"/>
               <a:t>Fusion Method Based on STD</a:t>
             </a:r>
-            <a:endParaRPr lang="en-IN" sz="1050" dirty="0"/>
+            <a:endParaRPr lang="en-IN" sz="788" dirty="0"/>
           </a:p>
         </p:txBody>
       </p:sp>
@@ -6001,8 +5633,8 @@
         </p:nvSpPr>
         <p:spPr>
           <a:xfrm>
-            <a:off x="1738744" y="3189333"/>
-            <a:ext cx="682920" cy="322170"/>
+            <a:off x="2828058" y="3249250"/>
+            <a:ext cx="512190" cy="241628"/>
           </a:xfrm>
           <a:prstGeom prst="rect">
             <a:avLst/>
@@ -6028,10 +5660,10 @@
           <a:p>
             <a:pPr algn="ctr"/>
             <a:r>
-              <a:rPr lang="en-US" dirty="0"/>
+              <a:rPr lang="en-US" sz="1350" dirty="0"/>
               <a:t>DWT</a:t>
             </a:r>
-            <a:endParaRPr lang="en-IN" dirty="0"/>
+            <a:endParaRPr lang="en-IN" sz="1350" dirty="0"/>
           </a:p>
         </p:txBody>
       </p:sp>
@@ -6049,8 +5681,8 @@
         </p:nvSpPr>
         <p:spPr>
           <a:xfrm>
-            <a:off x="4444198" y="3189333"/>
-            <a:ext cx="682920" cy="322170"/>
+            <a:off x="4857149" y="3249250"/>
+            <a:ext cx="512190" cy="241628"/>
           </a:xfrm>
           <a:prstGeom prst="rect">
             <a:avLst/>
@@ -6076,10 +5708,10 @@
           <a:p>
             <a:pPr algn="ctr"/>
             <a:r>
-              <a:rPr lang="en-US" dirty="0"/>
+              <a:rPr lang="en-US" sz="1350" dirty="0"/>
               <a:t>DWT</a:t>
             </a:r>
-            <a:endParaRPr lang="en-IN" dirty="0"/>
+            <a:endParaRPr lang="en-IN" sz="1350" dirty="0"/>
           </a:p>
         </p:txBody>
       </p:sp>
@@ -6097,8 +5729,8 @@
         </p:nvSpPr>
         <p:spPr>
           <a:xfrm>
-            <a:off x="7064884" y="3216918"/>
-            <a:ext cx="682920" cy="322170"/>
+            <a:off x="6822663" y="3269938"/>
+            <a:ext cx="512190" cy="241628"/>
           </a:xfrm>
           <a:prstGeom prst="rect">
             <a:avLst/>
@@ -6124,10 +5756,10 @@
           <a:p>
             <a:pPr algn="ctr"/>
             <a:r>
-              <a:rPr lang="en-US" dirty="0"/>
+              <a:rPr lang="en-US" sz="1350" dirty="0"/>
               <a:t>DWT</a:t>
             </a:r>
-            <a:endParaRPr lang="en-IN" dirty="0"/>
+            <a:endParaRPr lang="en-IN" sz="1350" dirty="0"/>
           </a:p>
         </p:txBody>
       </p:sp>
@@ -6145,8 +5777,8 @@
         </p:nvSpPr>
         <p:spPr>
           <a:xfrm>
-            <a:off x="10100482" y="3196980"/>
-            <a:ext cx="682920" cy="322170"/>
+            <a:off x="9099362" y="3254985"/>
+            <a:ext cx="512190" cy="241628"/>
           </a:xfrm>
           <a:prstGeom prst="rect">
             <a:avLst/>
@@ -6172,10 +5804,10 @@
           <a:p>
             <a:pPr algn="ctr"/>
             <a:r>
-              <a:rPr lang="en-US" dirty="0"/>
+              <a:rPr lang="en-US" sz="1350" dirty="0"/>
               <a:t>DWT</a:t>
             </a:r>
-            <a:endParaRPr lang="en-IN" dirty="0"/>
+            <a:endParaRPr lang="en-IN" sz="1350" dirty="0"/>
           </a:p>
         </p:txBody>
       </p:sp>
@@ -6195,8 +5827,8 @@
         </p:nvCxnSpPr>
         <p:spPr>
           <a:xfrm flipH="1">
-            <a:off x="2064426" y="3519150"/>
-            <a:ext cx="5278" cy="402240"/>
+            <a:off x="3072320" y="3496613"/>
+            <a:ext cx="3959" cy="301680"/>
           </a:xfrm>
           <a:prstGeom prst="straightConnector1">
             <a:avLst/>
@@ -6236,8 +5868,8 @@
         </p:nvCxnSpPr>
         <p:spPr>
           <a:xfrm flipH="1">
-            <a:off x="4767989" y="3519150"/>
-            <a:ext cx="5278" cy="402240"/>
+            <a:off x="5099993" y="3496613"/>
+            <a:ext cx="3959" cy="301680"/>
           </a:xfrm>
           <a:prstGeom prst="straightConnector1">
             <a:avLst/>
@@ -6277,8 +5909,8 @@
         </p:nvCxnSpPr>
         <p:spPr>
           <a:xfrm flipH="1">
-            <a:off x="7401065" y="3539088"/>
-            <a:ext cx="5278" cy="402240"/>
+            <a:off x="7074800" y="3511566"/>
+            <a:ext cx="3959" cy="301680"/>
           </a:xfrm>
           <a:prstGeom prst="straightConnector1">
             <a:avLst/>
@@ -6318,8 +5950,8 @@
         </p:nvCxnSpPr>
         <p:spPr>
           <a:xfrm flipH="1">
-            <a:off x="10444581" y="3503697"/>
-            <a:ext cx="5278" cy="402240"/>
+            <a:off x="9357437" y="3485023"/>
+            <a:ext cx="3959" cy="301680"/>
           </a:xfrm>
           <a:prstGeom prst="straightConnector1">
             <a:avLst/>
@@ -6359,8 +5991,8 @@
         </p:nvCxnSpPr>
         <p:spPr>
           <a:xfrm flipV="1">
-            <a:off x="4777742" y="4635306"/>
-            <a:ext cx="0" cy="218634"/>
+            <a:off x="5107307" y="4333729"/>
+            <a:ext cx="0" cy="163976"/>
           </a:xfrm>
           <a:prstGeom prst="line">
             <a:avLst/>
@@ -6397,8 +6029,8 @@
         </p:nvCxnSpPr>
         <p:spPr>
           <a:xfrm flipV="1">
-            <a:off x="7408982" y="4635306"/>
-            <a:ext cx="0" cy="218634"/>
+            <a:off x="7080737" y="4333729"/>
+            <a:ext cx="0" cy="163976"/>
           </a:xfrm>
           <a:prstGeom prst="line">
             <a:avLst/>
@@ -6435,8 +6067,8 @@
         </p:nvCxnSpPr>
         <p:spPr>
           <a:xfrm flipH="1" flipV="1">
-            <a:off x="2072343" y="4635306"/>
-            <a:ext cx="7861" cy="698694"/>
+            <a:off x="3078258" y="4333730"/>
+            <a:ext cx="5896" cy="524021"/>
           </a:xfrm>
           <a:prstGeom prst="line">
             <a:avLst/>
@@ -6473,8 +6105,8 @@
         </p:nvCxnSpPr>
         <p:spPr>
           <a:xfrm flipH="1" flipV="1">
-            <a:off x="10445928" y="4627500"/>
-            <a:ext cx="7861" cy="698694"/>
+            <a:off x="9358446" y="4327876"/>
+            <a:ext cx="5896" cy="524021"/>
           </a:xfrm>
           <a:prstGeom prst="line">
             <a:avLst/>
@@ -6511,8 +6143,8 @@
         </p:nvCxnSpPr>
         <p:spPr>
           <a:xfrm>
-            <a:off x="4767989" y="4853940"/>
-            <a:ext cx="1160371" cy="0"/>
+            <a:off x="5099992" y="4497705"/>
+            <a:ext cx="870278" cy="0"/>
           </a:xfrm>
           <a:prstGeom prst="straightConnector1">
             <a:avLst/>
@@ -6552,8 +6184,8 @@
         </p:nvCxnSpPr>
         <p:spPr>
           <a:xfrm>
-            <a:off x="2088243" y="5341620"/>
-            <a:ext cx="3436257" cy="0"/>
+            <a:off x="3090184" y="4863465"/>
+            <a:ext cx="2577193" cy="0"/>
           </a:xfrm>
           <a:prstGeom prst="straightConnector1">
             <a:avLst/>
@@ -6593,8 +6225,8 @@
         </p:nvCxnSpPr>
         <p:spPr>
           <a:xfrm flipH="1">
-            <a:off x="6254407" y="4851030"/>
-            <a:ext cx="1152582" cy="2910"/>
+            <a:off x="6214806" y="4495523"/>
+            <a:ext cx="864437" cy="2183"/>
           </a:xfrm>
           <a:prstGeom prst="straightConnector1">
             <a:avLst/>
@@ -6634,8 +6266,8 @@
         </p:nvCxnSpPr>
         <p:spPr>
           <a:xfrm flipH="1">
-            <a:off x="6675120" y="5326194"/>
-            <a:ext cx="3774738" cy="15426"/>
+            <a:off x="6530340" y="4851895"/>
+            <a:ext cx="2831054" cy="11570"/>
           </a:xfrm>
           <a:prstGeom prst="straightConnector1">
             <a:avLst/>
@@ -6673,8 +6305,8 @@
         </p:nvSpPr>
         <p:spPr>
           <a:xfrm>
-            <a:off x="5438260" y="6231438"/>
-            <a:ext cx="1304924" cy="310620"/>
+            <a:off x="5602696" y="5530830"/>
+            <a:ext cx="978693" cy="232965"/>
           </a:xfrm>
           <a:prstGeom prst="rect">
             <a:avLst/>
@@ -6700,10 +6332,10 @@
           <a:p>
             <a:pPr algn="ctr"/>
             <a:r>
-              <a:rPr lang="en-US" sz="1400" dirty="0"/>
+              <a:rPr lang="en-US" sz="1050" dirty="0"/>
               <a:t>Fused Image</a:t>
             </a:r>
-            <a:endParaRPr lang="en-IN" sz="1400" dirty="0"/>
+            <a:endParaRPr lang="en-IN" sz="1050" dirty="0"/>
           </a:p>
         </p:txBody>
       </p:sp>
@@ -6723,8 +6355,8 @@
         </p:nvCxnSpPr>
         <p:spPr>
           <a:xfrm flipH="1">
-            <a:off x="6090722" y="5790519"/>
-            <a:ext cx="5278" cy="402240"/>
+            <a:off x="6092042" y="5200139"/>
+            <a:ext cx="3959" cy="301680"/>
           </a:xfrm>
           <a:prstGeom prst="straightConnector1">
             <a:avLst/>
@@ -6762,8 +6394,8 @@
         </p:nvSpPr>
         <p:spPr>
           <a:xfrm>
-            <a:off x="301255" y="6231438"/>
-            <a:ext cx="308954" cy="310620"/>
+            <a:off x="1749941" y="5530830"/>
+            <a:ext cx="231716" cy="232965"/>
           </a:xfrm>
           <a:prstGeom prst="flowChartSummingJunction">
             <a:avLst/>
@@ -6788,7 +6420,7 @@
           <a:lstStyle/>
           <a:p>
             <a:pPr algn="ctr"/>
-            <a:endParaRPr lang="en-IN"/>
+            <a:endParaRPr lang="en-IN" sz="1350"/>
           </a:p>
         </p:txBody>
       </p:sp>
@@ -6806,8 +6438,8 @@
         </p:nvSpPr>
         <p:spPr>
           <a:xfrm>
-            <a:off x="615580" y="6231438"/>
-            <a:ext cx="2281684" cy="310599"/>
+            <a:off x="1985686" y="5530830"/>
+            <a:ext cx="1711263" cy="232949"/>
           </a:xfrm>
           <a:prstGeom prst="rect">
             <a:avLst/>
@@ -6837,10 +6469,10 @@
           <a:p>
             <a:pPr algn="ctr"/>
             <a:r>
-              <a:rPr lang="en-US" sz="1400" dirty="0"/>
+              <a:rPr lang="en-US" sz="1050" dirty="0"/>
               <a:t>Element Wise Multiplication</a:t>
             </a:r>
-            <a:endParaRPr lang="en-IN" sz="1400" dirty="0"/>
+            <a:endParaRPr lang="en-IN" sz="1050" dirty="0"/>
           </a:p>
         </p:txBody>
       </p:sp>
@@ -6857,10 +6489,2157 @@
 </p:sld>
 </file>
 
+<file path=ppt/slides/slide2.xml><?xml version="1.0" encoding="utf-8"?>
+<p:sld xmlns:a="http://schemas.openxmlformats.org/drawingml/2006/main" xmlns:r="http://schemas.openxmlformats.org/officeDocument/2006/relationships" xmlns:p="http://schemas.openxmlformats.org/presentationml/2006/main">
+  <p:cSld>
+    <p:spTree>
+      <p:nvGrpSpPr>
+        <p:cNvPr id="1" name=""/>
+        <p:cNvGrpSpPr/>
+        <p:nvPr/>
+      </p:nvGrpSpPr>
+      <p:grpSpPr>
+        <a:xfrm>
+          <a:off x="0" y="0"/>
+          <a:ext cx="0" cy="0"/>
+          <a:chOff x="0" y="0"/>
+          <a:chExt cx="0" cy="0"/>
+        </a:xfrm>
+      </p:grpSpPr>
+      <p:sp>
+        <p:nvSpPr>
+          <p:cNvPr id="2" name="Rectangle 1">
+            <a:extLst>
+              <a:ext uri="{FF2B5EF4-FFF2-40B4-BE49-F238E27FC236}">
+                <a16:creationId xmlns:a16="http://schemas.microsoft.com/office/drawing/2014/main" id="{7681CF84-AD37-AB62-C2DE-5DD6C636170A}"/>
+              </a:ext>
+            </a:extLst>
+          </p:cNvPr>
+          <p:cNvSpPr/>
+          <p:nvPr/>
+        </p:nvSpPr>
+        <p:spPr>
+          <a:xfrm>
+            <a:off x="3985502" y="129964"/>
+            <a:ext cx="1028700" cy="232965"/>
+          </a:xfrm>
+          <a:prstGeom prst="rect">
+            <a:avLst/>
+          </a:prstGeom>
+        </p:spPr>
+        <p:style>
+          <a:lnRef idx="2">
+            <a:schemeClr val="dk1"/>
+          </a:lnRef>
+          <a:fillRef idx="1">
+            <a:schemeClr val="lt1"/>
+          </a:fillRef>
+          <a:effectRef idx="0">
+            <a:schemeClr val="dk1"/>
+          </a:effectRef>
+          <a:fontRef idx="minor">
+            <a:schemeClr val="dk1"/>
+          </a:fontRef>
+        </p:style>
+        <p:txBody>
+          <a:bodyPr rtlCol="0" anchor="ctr"/>
+          <a:lstStyle/>
+          <a:p>
+            <a:pPr algn="ctr"/>
+            <a:r>
+              <a:rPr lang="en-US" sz="1050" dirty="0"/>
+              <a:t>Infrared Image</a:t>
+            </a:r>
+            <a:endParaRPr lang="en-IN" sz="1050" dirty="0"/>
+          </a:p>
+        </p:txBody>
+      </p:sp>
+      <p:sp>
+        <p:nvSpPr>
+          <p:cNvPr id="4" name="Rectangle 3">
+            <a:extLst>
+              <a:ext uri="{FF2B5EF4-FFF2-40B4-BE49-F238E27FC236}">
+                <a16:creationId xmlns:a16="http://schemas.microsoft.com/office/drawing/2014/main" id="{89E6D3FC-6627-1DF4-1F07-06E02907241B}"/>
+              </a:ext>
+            </a:extLst>
+          </p:cNvPr>
+          <p:cNvSpPr/>
+          <p:nvPr/>
+        </p:nvSpPr>
+        <p:spPr>
+          <a:xfrm>
+            <a:off x="7825499" y="129964"/>
+            <a:ext cx="1028700" cy="232965"/>
+          </a:xfrm>
+          <a:prstGeom prst="rect">
+            <a:avLst/>
+          </a:prstGeom>
+        </p:spPr>
+        <p:style>
+          <a:lnRef idx="2">
+            <a:schemeClr val="dk1"/>
+          </a:lnRef>
+          <a:fillRef idx="1">
+            <a:schemeClr val="lt1"/>
+          </a:fillRef>
+          <a:effectRef idx="0">
+            <a:schemeClr val="dk1"/>
+          </a:effectRef>
+          <a:fontRef idx="minor">
+            <a:schemeClr val="dk1"/>
+          </a:fontRef>
+        </p:style>
+        <p:txBody>
+          <a:bodyPr rtlCol="0" anchor="ctr"/>
+          <a:lstStyle/>
+          <a:p>
+            <a:pPr algn="ctr"/>
+            <a:r>
+              <a:rPr lang="en-US" sz="1050" dirty="0"/>
+              <a:t>Visible Image</a:t>
+            </a:r>
+            <a:endParaRPr lang="en-IN" sz="1050" dirty="0"/>
+          </a:p>
+        </p:txBody>
+      </p:sp>
+      <p:sp>
+        <p:nvSpPr>
+          <p:cNvPr id="5" name="Rectangle 4">
+            <a:extLst>
+              <a:ext uri="{FF2B5EF4-FFF2-40B4-BE49-F238E27FC236}">
+                <a16:creationId xmlns:a16="http://schemas.microsoft.com/office/drawing/2014/main" id="{483DB0B5-5D53-EA73-65E0-7E1E4E769427}"/>
+              </a:ext>
+            </a:extLst>
+          </p:cNvPr>
+          <p:cNvSpPr/>
+          <p:nvPr/>
+        </p:nvSpPr>
+        <p:spPr>
+          <a:xfrm>
+            <a:off x="5571719" y="856608"/>
+            <a:ext cx="1140453" cy="324805"/>
+          </a:xfrm>
+          <a:prstGeom prst="rect">
+            <a:avLst/>
+          </a:prstGeom>
+        </p:spPr>
+        <p:style>
+          <a:lnRef idx="2">
+            <a:schemeClr val="dk1"/>
+          </a:lnRef>
+          <a:fillRef idx="1">
+            <a:schemeClr val="lt1"/>
+          </a:fillRef>
+          <a:effectRef idx="0">
+            <a:schemeClr val="dk1"/>
+          </a:effectRef>
+          <a:fontRef idx="minor">
+            <a:schemeClr val="dk1"/>
+          </a:fontRef>
+        </p:style>
+        <p:txBody>
+          <a:bodyPr rtlCol="0" anchor="ctr"/>
+          <a:lstStyle/>
+          <a:p>
+            <a:pPr algn="ctr"/>
+            <a:r>
+              <a:rPr lang="en-US" sz="1050" dirty="0"/>
+              <a:t>Background Mask</a:t>
+            </a:r>
+            <a:endParaRPr lang="en-IN" sz="1050" dirty="0"/>
+          </a:p>
+        </p:txBody>
+      </p:sp>
+      <p:sp>
+        <p:nvSpPr>
+          <p:cNvPr id="6" name="Rectangle 5">
+            <a:extLst>
+              <a:ext uri="{FF2B5EF4-FFF2-40B4-BE49-F238E27FC236}">
+                <a16:creationId xmlns:a16="http://schemas.microsoft.com/office/drawing/2014/main" id="{A2B5C298-190E-165C-4B58-86F749F8200C}"/>
+              </a:ext>
+            </a:extLst>
+          </p:cNvPr>
+          <p:cNvSpPr/>
+          <p:nvPr/>
+        </p:nvSpPr>
+        <p:spPr>
+          <a:xfrm>
+            <a:off x="2348822" y="856608"/>
+            <a:ext cx="1028700" cy="232965"/>
+          </a:xfrm>
+          <a:prstGeom prst="rect">
+            <a:avLst/>
+          </a:prstGeom>
+        </p:spPr>
+        <p:style>
+          <a:lnRef idx="2">
+            <a:schemeClr val="dk1"/>
+          </a:lnRef>
+          <a:fillRef idx="1">
+            <a:schemeClr val="lt1"/>
+          </a:fillRef>
+          <a:effectRef idx="0">
+            <a:schemeClr val="dk1"/>
+          </a:effectRef>
+          <a:fontRef idx="minor">
+            <a:schemeClr val="dk1"/>
+          </a:fontRef>
+        </p:style>
+        <p:txBody>
+          <a:bodyPr rtlCol="0" anchor="ctr"/>
+          <a:lstStyle/>
+          <a:p>
+            <a:pPr algn="ctr"/>
+            <a:r>
+              <a:rPr lang="en-US" sz="1050" dirty="0"/>
+              <a:t>Salient Mask</a:t>
+            </a:r>
+            <a:endParaRPr lang="en-IN" sz="1050" dirty="0"/>
+          </a:p>
+        </p:txBody>
+      </p:sp>
+      <p:cxnSp>
+        <p:nvCxnSpPr>
+          <p:cNvPr id="7" name="Straight Connector 6">
+            <a:extLst>
+              <a:ext uri="{FF2B5EF4-FFF2-40B4-BE49-F238E27FC236}">
+                <a16:creationId xmlns:a16="http://schemas.microsoft.com/office/drawing/2014/main" id="{FA952B22-F6A9-751F-3F1E-29BF0A584B93}"/>
+              </a:ext>
+            </a:extLst>
+          </p:cNvPr>
+          <p:cNvCxnSpPr>
+            <a:cxnSpLocks/>
+          </p:cNvCxnSpPr>
+          <p:nvPr/>
+        </p:nvCxnSpPr>
+        <p:spPr>
+          <a:xfrm flipH="1">
+            <a:off x="2863174" y="246446"/>
+            <a:ext cx="1122329" cy="0"/>
+          </a:xfrm>
+          <a:prstGeom prst="line">
+            <a:avLst/>
+          </a:prstGeom>
+        </p:spPr>
+        <p:style>
+          <a:lnRef idx="2">
+            <a:schemeClr val="dk1"/>
+          </a:lnRef>
+          <a:fillRef idx="1">
+            <a:schemeClr val="lt1"/>
+          </a:fillRef>
+          <a:effectRef idx="0">
+            <a:schemeClr val="dk1"/>
+          </a:effectRef>
+          <a:fontRef idx="minor">
+            <a:schemeClr val="dk1"/>
+          </a:fontRef>
+        </p:style>
+      </p:cxnSp>
+      <p:cxnSp>
+        <p:nvCxnSpPr>
+          <p:cNvPr id="9" name="Straight Arrow Connector 8">
+            <a:extLst>
+              <a:ext uri="{FF2B5EF4-FFF2-40B4-BE49-F238E27FC236}">
+                <a16:creationId xmlns:a16="http://schemas.microsoft.com/office/drawing/2014/main" id="{1947F0D1-626D-A37C-3831-C52E990D4768}"/>
+              </a:ext>
+            </a:extLst>
+          </p:cNvPr>
+          <p:cNvCxnSpPr>
+            <a:cxnSpLocks/>
+            <a:endCxn id="6" idx="0"/>
+          </p:cNvCxnSpPr>
+          <p:nvPr/>
+        </p:nvCxnSpPr>
+        <p:spPr>
+          <a:xfrm>
+            <a:off x="2863172" y="246446"/>
+            <a:ext cx="0" cy="610162"/>
+          </a:xfrm>
+          <a:prstGeom prst="straightConnector1">
+            <a:avLst/>
+          </a:prstGeom>
+          <a:ln>
+            <a:tailEnd type="triangle"/>
+          </a:ln>
+        </p:spPr>
+        <p:style>
+          <a:lnRef idx="2">
+            <a:schemeClr val="dk1"/>
+          </a:lnRef>
+          <a:fillRef idx="1">
+            <a:schemeClr val="lt1"/>
+          </a:fillRef>
+          <a:effectRef idx="0">
+            <a:schemeClr val="dk1"/>
+          </a:effectRef>
+          <a:fontRef idx="minor">
+            <a:schemeClr val="dk1"/>
+          </a:fontRef>
+        </p:style>
+      </p:cxnSp>
+      <p:cxnSp>
+        <p:nvCxnSpPr>
+          <p:cNvPr id="14" name="Straight Connector 13">
+            <a:extLst>
+              <a:ext uri="{FF2B5EF4-FFF2-40B4-BE49-F238E27FC236}">
+                <a16:creationId xmlns:a16="http://schemas.microsoft.com/office/drawing/2014/main" id="{84EF98E9-BC2F-841E-5C16-DCFEE0D2B180}"/>
+              </a:ext>
+            </a:extLst>
+          </p:cNvPr>
+          <p:cNvCxnSpPr>
+            <a:cxnSpLocks/>
+          </p:cNvCxnSpPr>
+          <p:nvPr/>
+        </p:nvCxnSpPr>
+        <p:spPr>
+          <a:xfrm flipH="1">
+            <a:off x="5014203" y="246446"/>
+            <a:ext cx="1122329" cy="0"/>
+          </a:xfrm>
+          <a:prstGeom prst="line">
+            <a:avLst/>
+          </a:prstGeom>
+        </p:spPr>
+        <p:style>
+          <a:lnRef idx="2">
+            <a:schemeClr val="dk1"/>
+          </a:lnRef>
+          <a:fillRef idx="1">
+            <a:schemeClr val="lt1"/>
+          </a:fillRef>
+          <a:effectRef idx="0">
+            <a:schemeClr val="dk1"/>
+          </a:effectRef>
+          <a:fontRef idx="minor">
+            <a:schemeClr val="dk1"/>
+          </a:fontRef>
+        </p:style>
+      </p:cxnSp>
+      <p:cxnSp>
+        <p:nvCxnSpPr>
+          <p:cNvPr id="15" name="Straight Arrow Connector 14">
+            <a:extLst>
+              <a:ext uri="{FF2B5EF4-FFF2-40B4-BE49-F238E27FC236}">
+                <a16:creationId xmlns:a16="http://schemas.microsoft.com/office/drawing/2014/main" id="{16AD2BD3-A34A-0A32-C4A0-5DBC1F70EA68}"/>
+              </a:ext>
+            </a:extLst>
+          </p:cNvPr>
+          <p:cNvCxnSpPr>
+            <a:cxnSpLocks/>
+          </p:cNvCxnSpPr>
+          <p:nvPr/>
+        </p:nvCxnSpPr>
+        <p:spPr>
+          <a:xfrm>
+            <a:off x="6136531" y="246446"/>
+            <a:ext cx="0" cy="610162"/>
+          </a:xfrm>
+          <a:prstGeom prst="straightConnector1">
+            <a:avLst/>
+          </a:prstGeom>
+          <a:ln>
+            <a:tailEnd type="triangle"/>
+          </a:ln>
+        </p:spPr>
+        <p:style>
+          <a:lnRef idx="2">
+            <a:schemeClr val="dk1"/>
+          </a:lnRef>
+          <a:fillRef idx="1">
+            <a:schemeClr val="lt1"/>
+          </a:fillRef>
+          <a:effectRef idx="0">
+            <a:schemeClr val="dk1"/>
+          </a:effectRef>
+          <a:fontRef idx="minor">
+            <a:schemeClr val="dk1"/>
+          </a:fontRef>
+        </p:style>
+      </p:cxnSp>
+      <p:sp>
+        <p:nvSpPr>
+          <p:cNvPr id="16" name="Rectangle 15">
+            <a:extLst>
+              <a:ext uri="{FF2B5EF4-FFF2-40B4-BE49-F238E27FC236}">
+                <a16:creationId xmlns:a16="http://schemas.microsoft.com/office/drawing/2014/main" id="{F9B609D4-CDCB-F0AB-19FC-3E51A43A8388}"/>
+              </a:ext>
+            </a:extLst>
+          </p:cNvPr>
+          <p:cNvSpPr/>
+          <p:nvPr/>
+        </p:nvSpPr>
+        <p:spPr>
+          <a:xfrm>
+            <a:off x="4230446" y="954572"/>
+            <a:ext cx="270000" cy="270000"/>
+          </a:xfrm>
+          <a:prstGeom prst="rect">
+            <a:avLst/>
+          </a:prstGeom>
+        </p:spPr>
+        <p:style>
+          <a:lnRef idx="2">
+            <a:schemeClr val="dk1"/>
+          </a:lnRef>
+          <a:fillRef idx="1">
+            <a:schemeClr val="lt1"/>
+          </a:fillRef>
+          <a:effectRef idx="0">
+            <a:schemeClr val="dk1"/>
+          </a:effectRef>
+          <a:fontRef idx="minor">
+            <a:schemeClr val="dk1"/>
+          </a:fontRef>
+        </p:style>
+        <p:txBody>
+          <a:bodyPr rtlCol="0" anchor="ctr"/>
+          <a:lstStyle/>
+          <a:p>
+            <a:pPr algn="ctr"/>
+            <a:endParaRPr lang="en-IN" sz="1350"/>
+          </a:p>
+        </p:txBody>
+      </p:sp>
+      <p:sp>
+        <p:nvSpPr>
+          <p:cNvPr id="17" name="Rectangle 16">
+            <a:extLst>
+              <a:ext uri="{FF2B5EF4-FFF2-40B4-BE49-F238E27FC236}">
+                <a16:creationId xmlns:a16="http://schemas.microsoft.com/office/drawing/2014/main" id="{B21BD4DF-6140-385D-59A6-F10C7B9C214B}"/>
+              </a:ext>
+            </a:extLst>
+          </p:cNvPr>
+          <p:cNvSpPr/>
+          <p:nvPr/>
+        </p:nvSpPr>
+        <p:spPr>
+          <a:xfrm>
+            <a:off x="4492571" y="954572"/>
+            <a:ext cx="270000" cy="270000"/>
+          </a:xfrm>
+          <a:prstGeom prst="rect">
+            <a:avLst/>
+          </a:prstGeom>
+        </p:spPr>
+        <p:style>
+          <a:lnRef idx="2">
+            <a:schemeClr val="dk1"/>
+          </a:lnRef>
+          <a:fillRef idx="1">
+            <a:schemeClr val="lt1"/>
+          </a:fillRef>
+          <a:effectRef idx="0">
+            <a:schemeClr val="dk1"/>
+          </a:effectRef>
+          <a:fontRef idx="minor">
+            <a:schemeClr val="dk1"/>
+          </a:fontRef>
+        </p:style>
+        <p:txBody>
+          <a:bodyPr rtlCol="0" anchor="ctr"/>
+          <a:lstStyle/>
+          <a:p>
+            <a:pPr algn="ctr"/>
+            <a:endParaRPr lang="en-IN" sz="1350"/>
+          </a:p>
+        </p:txBody>
+      </p:sp>
+      <p:sp>
+        <p:nvSpPr>
+          <p:cNvPr id="18" name="Rectangle 17">
+            <a:extLst>
+              <a:ext uri="{FF2B5EF4-FFF2-40B4-BE49-F238E27FC236}">
+                <a16:creationId xmlns:a16="http://schemas.microsoft.com/office/drawing/2014/main" id="{DED66CEE-0AB5-80B1-C381-A0E2D3B6A115}"/>
+              </a:ext>
+            </a:extLst>
+          </p:cNvPr>
+          <p:cNvSpPr/>
+          <p:nvPr/>
+        </p:nvSpPr>
+        <p:spPr>
+          <a:xfrm>
+            <a:off x="4230446" y="1220252"/>
+            <a:ext cx="270000" cy="270000"/>
+          </a:xfrm>
+          <a:prstGeom prst="rect">
+            <a:avLst/>
+          </a:prstGeom>
+        </p:spPr>
+        <p:style>
+          <a:lnRef idx="2">
+            <a:schemeClr val="dk1"/>
+          </a:lnRef>
+          <a:fillRef idx="1">
+            <a:schemeClr val="lt1"/>
+          </a:fillRef>
+          <a:effectRef idx="0">
+            <a:schemeClr val="dk1"/>
+          </a:effectRef>
+          <a:fontRef idx="minor">
+            <a:schemeClr val="dk1"/>
+          </a:fontRef>
+        </p:style>
+        <p:txBody>
+          <a:bodyPr rtlCol="0" anchor="ctr"/>
+          <a:lstStyle/>
+          <a:p>
+            <a:pPr algn="ctr"/>
+            <a:endParaRPr lang="en-IN" sz="1350"/>
+          </a:p>
+        </p:txBody>
+      </p:sp>
+      <p:sp>
+        <p:nvSpPr>
+          <p:cNvPr id="19" name="Rectangle 18">
+            <a:extLst>
+              <a:ext uri="{FF2B5EF4-FFF2-40B4-BE49-F238E27FC236}">
+                <a16:creationId xmlns:a16="http://schemas.microsoft.com/office/drawing/2014/main" id="{10968C33-9F5C-A222-2B57-6B88FE92EB71}"/>
+              </a:ext>
+            </a:extLst>
+          </p:cNvPr>
+          <p:cNvSpPr/>
+          <p:nvPr/>
+        </p:nvSpPr>
+        <p:spPr>
+          <a:xfrm>
+            <a:off x="4492571" y="1220252"/>
+            <a:ext cx="270000" cy="270000"/>
+          </a:xfrm>
+          <a:prstGeom prst="rect">
+            <a:avLst/>
+          </a:prstGeom>
+        </p:spPr>
+        <p:style>
+          <a:lnRef idx="2">
+            <a:schemeClr val="dk1"/>
+          </a:lnRef>
+          <a:fillRef idx="1">
+            <a:schemeClr val="lt1"/>
+          </a:fillRef>
+          <a:effectRef idx="0">
+            <a:schemeClr val="dk1"/>
+          </a:effectRef>
+          <a:fontRef idx="minor">
+            <a:schemeClr val="dk1"/>
+          </a:fontRef>
+        </p:style>
+        <p:txBody>
+          <a:bodyPr rtlCol="0" anchor="ctr"/>
+          <a:lstStyle/>
+          <a:p>
+            <a:pPr algn="ctr"/>
+            <a:endParaRPr lang="en-IN" sz="1350"/>
+          </a:p>
+        </p:txBody>
+      </p:sp>
+      <p:sp>
+        <p:nvSpPr>
+          <p:cNvPr id="20" name="Rectangle 19">
+            <a:extLst>
+              <a:ext uri="{FF2B5EF4-FFF2-40B4-BE49-F238E27FC236}">
+                <a16:creationId xmlns:a16="http://schemas.microsoft.com/office/drawing/2014/main" id="{D2FFD25A-42C1-B639-BB8C-DE939AAB0A9E}"/>
+              </a:ext>
+            </a:extLst>
+          </p:cNvPr>
+          <p:cNvSpPr/>
+          <p:nvPr/>
+        </p:nvSpPr>
+        <p:spPr>
+          <a:xfrm>
+            <a:off x="8087330" y="954572"/>
+            <a:ext cx="270000" cy="270000"/>
+          </a:xfrm>
+          <a:prstGeom prst="rect">
+            <a:avLst/>
+          </a:prstGeom>
+        </p:spPr>
+        <p:style>
+          <a:lnRef idx="2">
+            <a:schemeClr val="dk1"/>
+          </a:lnRef>
+          <a:fillRef idx="1">
+            <a:schemeClr val="lt1"/>
+          </a:fillRef>
+          <a:effectRef idx="0">
+            <a:schemeClr val="dk1"/>
+          </a:effectRef>
+          <a:fontRef idx="minor">
+            <a:schemeClr val="dk1"/>
+          </a:fontRef>
+        </p:style>
+        <p:txBody>
+          <a:bodyPr rtlCol="0" anchor="ctr"/>
+          <a:lstStyle/>
+          <a:p>
+            <a:pPr algn="ctr"/>
+            <a:endParaRPr lang="en-IN" sz="1350"/>
+          </a:p>
+        </p:txBody>
+      </p:sp>
+      <p:sp>
+        <p:nvSpPr>
+          <p:cNvPr id="21" name="Rectangle 20">
+            <a:extLst>
+              <a:ext uri="{FF2B5EF4-FFF2-40B4-BE49-F238E27FC236}">
+                <a16:creationId xmlns:a16="http://schemas.microsoft.com/office/drawing/2014/main" id="{B3C9E8DE-4213-4664-4B24-5DAD93EA4E57}"/>
+              </a:ext>
+            </a:extLst>
+          </p:cNvPr>
+          <p:cNvSpPr/>
+          <p:nvPr/>
+        </p:nvSpPr>
+        <p:spPr>
+          <a:xfrm>
+            <a:off x="8349455" y="954572"/>
+            <a:ext cx="270000" cy="270000"/>
+          </a:xfrm>
+          <a:prstGeom prst="rect">
+            <a:avLst/>
+          </a:prstGeom>
+        </p:spPr>
+        <p:style>
+          <a:lnRef idx="2">
+            <a:schemeClr val="dk1"/>
+          </a:lnRef>
+          <a:fillRef idx="1">
+            <a:schemeClr val="lt1"/>
+          </a:fillRef>
+          <a:effectRef idx="0">
+            <a:schemeClr val="dk1"/>
+          </a:effectRef>
+          <a:fontRef idx="minor">
+            <a:schemeClr val="dk1"/>
+          </a:fontRef>
+        </p:style>
+        <p:txBody>
+          <a:bodyPr rtlCol="0" anchor="ctr"/>
+          <a:lstStyle/>
+          <a:p>
+            <a:pPr algn="ctr"/>
+            <a:endParaRPr lang="en-IN" sz="1350"/>
+          </a:p>
+        </p:txBody>
+      </p:sp>
+      <p:sp>
+        <p:nvSpPr>
+          <p:cNvPr id="22" name="Rectangle 21">
+            <a:extLst>
+              <a:ext uri="{FF2B5EF4-FFF2-40B4-BE49-F238E27FC236}">
+                <a16:creationId xmlns:a16="http://schemas.microsoft.com/office/drawing/2014/main" id="{B0F41A40-4C3C-1989-F9ED-C834115A7B4A}"/>
+              </a:ext>
+            </a:extLst>
+          </p:cNvPr>
+          <p:cNvSpPr/>
+          <p:nvPr/>
+        </p:nvSpPr>
+        <p:spPr>
+          <a:xfrm>
+            <a:off x="8087330" y="1220252"/>
+            <a:ext cx="270000" cy="270000"/>
+          </a:xfrm>
+          <a:prstGeom prst="rect">
+            <a:avLst/>
+          </a:prstGeom>
+        </p:spPr>
+        <p:style>
+          <a:lnRef idx="2">
+            <a:schemeClr val="dk1"/>
+          </a:lnRef>
+          <a:fillRef idx="1">
+            <a:schemeClr val="lt1"/>
+          </a:fillRef>
+          <a:effectRef idx="0">
+            <a:schemeClr val="dk1"/>
+          </a:effectRef>
+          <a:fontRef idx="minor">
+            <a:schemeClr val="dk1"/>
+          </a:fontRef>
+        </p:style>
+        <p:txBody>
+          <a:bodyPr rtlCol="0" anchor="ctr"/>
+          <a:lstStyle/>
+          <a:p>
+            <a:pPr algn="ctr"/>
+            <a:endParaRPr lang="en-IN" sz="1350"/>
+          </a:p>
+        </p:txBody>
+      </p:sp>
+      <p:sp>
+        <p:nvSpPr>
+          <p:cNvPr id="23" name="Rectangle 22">
+            <a:extLst>
+              <a:ext uri="{FF2B5EF4-FFF2-40B4-BE49-F238E27FC236}">
+                <a16:creationId xmlns:a16="http://schemas.microsoft.com/office/drawing/2014/main" id="{749261C3-C14E-BB64-4FA3-38A185C4E5F2}"/>
+              </a:ext>
+            </a:extLst>
+          </p:cNvPr>
+          <p:cNvSpPr/>
+          <p:nvPr/>
+        </p:nvSpPr>
+        <p:spPr>
+          <a:xfrm>
+            <a:off x="8349455" y="1220252"/>
+            <a:ext cx="270000" cy="270000"/>
+          </a:xfrm>
+          <a:prstGeom prst="rect">
+            <a:avLst/>
+          </a:prstGeom>
+        </p:spPr>
+        <p:style>
+          <a:lnRef idx="2">
+            <a:schemeClr val="dk1"/>
+          </a:lnRef>
+          <a:fillRef idx="1">
+            <a:schemeClr val="lt1"/>
+          </a:fillRef>
+          <a:effectRef idx="0">
+            <a:schemeClr val="dk1"/>
+          </a:effectRef>
+          <a:fontRef idx="minor">
+            <a:schemeClr val="dk1"/>
+          </a:fontRef>
+        </p:style>
+        <p:txBody>
+          <a:bodyPr rtlCol="0" anchor="ctr"/>
+          <a:lstStyle/>
+          <a:p>
+            <a:pPr algn="ctr"/>
+            <a:endParaRPr lang="en-IN" sz="1350"/>
+          </a:p>
+        </p:txBody>
+      </p:sp>
+      <p:cxnSp>
+        <p:nvCxnSpPr>
+          <p:cNvPr id="24" name="Straight Arrow Connector 23">
+            <a:extLst>
+              <a:ext uri="{FF2B5EF4-FFF2-40B4-BE49-F238E27FC236}">
+                <a16:creationId xmlns:a16="http://schemas.microsoft.com/office/drawing/2014/main" id="{DA7B43A6-3E57-43BD-887B-976668D282CA}"/>
+              </a:ext>
+            </a:extLst>
+          </p:cNvPr>
+          <p:cNvCxnSpPr>
+            <a:cxnSpLocks/>
+            <a:stCxn id="2" idx="2"/>
+          </p:cNvCxnSpPr>
+          <p:nvPr/>
+        </p:nvCxnSpPr>
+        <p:spPr>
+          <a:xfrm>
+            <a:off x="4499852" y="362929"/>
+            <a:ext cx="0" cy="591644"/>
+          </a:xfrm>
+          <a:prstGeom prst="straightConnector1">
+            <a:avLst/>
+          </a:prstGeom>
+          <a:ln>
+            <a:tailEnd type="triangle"/>
+          </a:ln>
+        </p:spPr>
+        <p:style>
+          <a:lnRef idx="2">
+            <a:schemeClr val="dk1"/>
+          </a:lnRef>
+          <a:fillRef idx="1">
+            <a:schemeClr val="lt1"/>
+          </a:fillRef>
+          <a:effectRef idx="0">
+            <a:schemeClr val="dk1"/>
+          </a:effectRef>
+          <a:fontRef idx="minor">
+            <a:schemeClr val="dk1"/>
+          </a:fontRef>
+        </p:style>
+      </p:cxnSp>
+      <p:cxnSp>
+        <p:nvCxnSpPr>
+          <p:cNvPr id="27" name="Straight Arrow Connector 26">
+            <a:extLst>
+              <a:ext uri="{FF2B5EF4-FFF2-40B4-BE49-F238E27FC236}">
+                <a16:creationId xmlns:a16="http://schemas.microsoft.com/office/drawing/2014/main" id="{5FFF448E-EDAA-A12F-A44D-8C5AC35CF55C}"/>
+              </a:ext>
+            </a:extLst>
+          </p:cNvPr>
+          <p:cNvCxnSpPr>
+            <a:cxnSpLocks/>
+          </p:cNvCxnSpPr>
+          <p:nvPr/>
+        </p:nvCxnSpPr>
+        <p:spPr>
+          <a:xfrm>
+            <a:off x="8349455" y="362929"/>
+            <a:ext cx="0" cy="591644"/>
+          </a:xfrm>
+          <a:prstGeom prst="straightConnector1">
+            <a:avLst/>
+          </a:prstGeom>
+          <a:ln>
+            <a:tailEnd type="triangle"/>
+          </a:ln>
+        </p:spPr>
+        <p:style>
+          <a:lnRef idx="2">
+            <a:schemeClr val="dk1"/>
+          </a:lnRef>
+          <a:fillRef idx="1">
+            <a:schemeClr val="lt1"/>
+          </a:fillRef>
+          <a:effectRef idx="0">
+            <a:schemeClr val="dk1"/>
+          </a:effectRef>
+          <a:fontRef idx="minor">
+            <a:schemeClr val="dk1"/>
+          </a:fontRef>
+        </p:style>
+      </p:cxnSp>
+      <p:sp>
+        <p:nvSpPr>
+          <p:cNvPr id="28" name="Rectangle 27">
+            <a:extLst>
+              <a:ext uri="{FF2B5EF4-FFF2-40B4-BE49-F238E27FC236}">
+                <a16:creationId xmlns:a16="http://schemas.microsoft.com/office/drawing/2014/main" id="{85D0CD79-2354-5DD5-554A-99223252B7A1}"/>
+              </a:ext>
+            </a:extLst>
+          </p:cNvPr>
+          <p:cNvSpPr/>
+          <p:nvPr/>
+        </p:nvSpPr>
+        <p:spPr>
+          <a:xfrm>
+            <a:off x="4577128" y="537936"/>
+            <a:ext cx="585421" cy="232961"/>
+          </a:xfrm>
+          <a:prstGeom prst="rect">
+            <a:avLst/>
+          </a:prstGeom>
+        </p:spPr>
+        <p:style>
+          <a:lnRef idx="2">
+            <a:schemeClr val="dk1"/>
+          </a:lnRef>
+          <a:fillRef idx="1">
+            <a:schemeClr val="lt1"/>
+          </a:fillRef>
+          <a:effectRef idx="0">
+            <a:schemeClr val="dk1"/>
+          </a:effectRef>
+          <a:fontRef idx="minor">
+            <a:schemeClr val="dk1"/>
+          </a:fontRef>
+        </p:style>
+        <p:txBody>
+          <a:bodyPr rtlCol="0" anchor="ctr"/>
+          <a:lstStyle/>
+          <a:p>
+            <a:pPr algn="ctr"/>
+            <a:r>
+              <a:rPr lang="en-US" sz="1350" dirty="0"/>
+              <a:t>DWT</a:t>
+            </a:r>
+            <a:endParaRPr lang="en-IN" sz="1350" dirty="0"/>
+          </a:p>
+        </p:txBody>
+      </p:sp>
+      <p:sp>
+        <p:nvSpPr>
+          <p:cNvPr id="29" name="Rectangle 28">
+            <a:extLst>
+              <a:ext uri="{FF2B5EF4-FFF2-40B4-BE49-F238E27FC236}">
+                <a16:creationId xmlns:a16="http://schemas.microsoft.com/office/drawing/2014/main" id="{7C0E8780-164F-CFC5-2C1F-FB788C520A9C}"/>
+              </a:ext>
+            </a:extLst>
+          </p:cNvPr>
+          <p:cNvSpPr/>
+          <p:nvPr/>
+        </p:nvSpPr>
+        <p:spPr>
+          <a:xfrm>
+            <a:off x="8426732" y="537936"/>
+            <a:ext cx="583918" cy="270000"/>
+          </a:xfrm>
+          <a:prstGeom prst="rect">
+            <a:avLst/>
+          </a:prstGeom>
+        </p:spPr>
+        <p:style>
+          <a:lnRef idx="2">
+            <a:schemeClr val="dk1"/>
+          </a:lnRef>
+          <a:fillRef idx="1">
+            <a:schemeClr val="lt1"/>
+          </a:fillRef>
+          <a:effectRef idx="0">
+            <a:schemeClr val="dk1"/>
+          </a:effectRef>
+          <a:fontRef idx="minor">
+            <a:schemeClr val="dk1"/>
+          </a:fontRef>
+        </p:style>
+        <p:txBody>
+          <a:bodyPr rtlCol="0" anchor="ctr"/>
+          <a:lstStyle/>
+          <a:p>
+            <a:pPr algn="ctr"/>
+            <a:r>
+              <a:rPr lang="en-US" sz="1350" dirty="0"/>
+              <a:t>DWT</a:t>
+            </a:r>
+            <a:endParaRPr lang="en-IN" sz="1350" dirty="0"/>
+          </a:p>
+        </p:txBody>
+      </p:sp>
+      <p:sp>
+        <p:nvSpPr>
+          <p:cNvPr id="35" name="Diamond 34">
+            <a:extLst>
+              <a:ext uri="{FF2B5EF4-FFF2-40B4-BE49-F238E27FC236}">
+                <a16:creationId xmlns:a16="http://schemas.microsoft.com/office/drawing/2014/main" id="{456EAF92-285E-CED8-8076-7563879C14D8}"/>
+              </a:ext>
+            </a:extLst>
+          </p:cNvPr>
+          <p:cNvSpPr/>
+          <p:nvPr/>
+        </p:nvSpPr>
+        <p:spPr>
+          <a:xfrm>
+            <a:off x="6750794" y="1495593"/>
+            <a:ext cx="1140452" cy="906500"/>
+          </a:xfrm>
+          <a:prstGeom prst="diamond">
+            <a:avLst/>
+          </a:prstGeom>
+        </p:spPr>
+        <p:style>
+          <a:lnRef idx="2">
+            <a:schemeClr val="dk1"/>
+          </a:lnRef>
+          <a:fillRef idx="1">
+            <a:schemeClr val="lt1"/>
+          </a:fillRef>
+          <a:effectRef idx="0">
+            <a:schemeClr val="dk1"/>
+          </a:effectRef>
+          <a:fontRef idx="minor">
+            <a:schemeClr val="dk1"/>
+          </a:fontRef>
+        </p:style>
+        <p:txBody>
+          <a:bodyPr rtlCol="0" anchor="ctr"/>
+          <a:lstStyle/>
+          <a:p>
+            <a:pPr algn="ctr"/>
+            <a:r>
+              <a:rPr lang="en-US" sz="788" dirty="0"/>
+              <a:t>Fusion Method Based on STD</a:t>
+            </a:r>
+            <a:endParaRPr lang="en-IN" sz="788" dirty="0"/>
+          </a:p>
+        </p:txBody>
+      </p:sp>
+      <p:sp>
+        <p:nvSpPr>
+          <p:cNvPr id="49" name="Rectangle 48">
+            <a:extLst>
+              <a:ext uri="{FF2B5EF4-FFF2-40B4-BE49-F238E27FC236}">
+                <a16:creationId xmlns:a16="http://schemas.microsoft.com/office/drawing/2014/main" id="{20A0CCA5-D0E6-AA85-5208-0326F3DF5E6E}"/>
+              </a:ext>
+            </a:extLst>
+          </p:cNvPr>
+          <p:cNvSpPr/>
+          <p:nvPr/>
+        </p:nvSpPr>
+        <p:spPr>
+          <a:xfrm>
+            <a:off x="7058896" y="2590319"/>
+            <a:ext cx="270000" cy="270000"/>
+          </a:xfrm>
+          <a:prstGeom prst="rect">
+            <a:avLst/>
+          </a:prstGeom>
+        </p:spPr>
+        <p:style>
+          <a:lnRef idx="2">
+            <a:schemeClr val="dk1"/>
+          </a:lnRef>
+          <a:fillRef idx="1">
+            <a:schemeClr val="lt1"/>
+          </a:fillRef>
+          <a:effectRef idx="0">
+            <a:schemeClr val="dk1"/>
+          </a:effectRef>
+          <a:fontRef idx="minor">
+            <a:schemeClr val="dk1"/>
+          </a:fontRef>
+        </p:style>
+        <p:txBody>
+          <a:bodyPr rtlCol="0" anchor="ctr"/>
+          <a:lstStyle/>
+          <a:p>
+            <a:pPr algn="ctr"/>
+            <a:endParaRPr lang="en-IN" sz="1350"/>
+          </a:p>
+        </p:txBody>
+      </p:sp>
+      <p:sp>
+        <p:nvSpPr>
+          <p:cNvPr id="50" name="Rectangle 49">
+            <a:extLst>
+              <a:ext uri="{FF2B5EF4-FFF2-40B4-BE49-F238E27FC236}">
+                <a16:creationId xmlns:a16="http://schemas.microsoft.com/office/drawing/2014/main" id="{90A0FBD1-192E-C7E0-46C0-F64D856045CB}"/>
+              </a:ext>
+            </a:extLst>
+          </p:cNvPr>
+          <p:cNvSpPr/>
+          <p:nvPr/>
+        </p:nvSpPr>
+        <p:spPr>
+          <a:xfrm>
+            <a:off x="7321021" y="2590319"/>
+            <a:ext cx="270000" cy="270000"/>
+          </a:xfrm>
+          <a:prstGeom prst="rect">
+            <a:avLst/>
+          </a:prstGeom>
+        </p:spPr>
+        <p:style>
+          <a:lnRef idx="2">
+            <a:schemeClr val="dk1"/>
+          </a:lnRef>
+          <a:fillRef idx="1">
+            <a:schemeClr val="lt1"/>
+          </a:fillRef>
+          <a:effectRef idx="0">
+            <a:schemeClr val="dk1"/>
+          </a:effectRef>
+          <a:fontRef idx="minor">
+            <a:schemeClr val="dk1"/>
+          </a:fontRef>
+        </p:style>
+        <p:txBody>
+          <a:bodyPr rtlCol="0" anchor="ctr"/>
+          <a:lstStyle/>
+          <a:p>
+            <a:pPr algn="ctr"/>
+            <a:endParaRPr lang="en-IN" sz="1350"/>
+          </a:p>
+        </p:txBody>
+      </p:sp>
+      <p:sp>
+        <p:nvSpPr>
+          <p:cNvPr id="51" name="Rectangle 50">
+            <a:extLst>
+              <a:ext uri="{FF2B5EF4-FFF2-40B4-BE49-F238E27FC236}">
+                <a16:creationId xmlns:a16="http://schemas.microsoft.com/office/drawing/2014/main" id="{1A7184C7-BE6B-361B-9040-179C8A217ACA}"/>
+              </a:ext>
+            </a:extLst>
+          </p:cNvPr>
+          <p:cNvSpPr/>
+          <p:nvPr/>
+        </p:nvSpPr>
+        <p:spPr>
+          <a:xfrm>
+            <a:off x="7058896" y="2855999"/>
+            <a:ext cx="270000" cy="270000"/>
+          </a:xfrm>
+          <a:prstGeom prst="rect">
+            <a:avLst/>
+          </a:prstGeom>
+        </p:spPr>
+        <p:style>
+          <a:lnRef idx="2">
+            <a:schemeClr val="dk1"/>
+          </a:lnRef>
+          <a:fillRef idx="1">
+            <a:schemeClr val="lt1"/>
+          </a:fillRef>
+          <a:effectRef idx="0">
+            <a:schemeClr val="dk1"/>
+          </a:effectRef>
+          <a:fontRef idx="minor">
+            <a:schemeClr val="dk1"/>
+          </a:fontRef>
+        </p:style>
+        <p:txBody>
+          <a:bodyPr rtlCol="0" anchor="ctr"/>
+          <a:lstStyle/>
+          <a:p>
+            <a:pPr algn="ctr"/>
+            <a:endParaRPr lang="en-IN" sz="1350"/>
+          </a:p>
+        </p:txBody>
+      </p:sp>
+      <p:sp>
+        <p:nvSpPr>
+          <p:cNvPr id="52" name="Rectangle 51">
+            <a:extLst>
+              <a:ext uri="{FF2B5EF4-FFF2-40B4-BE49-F238E27FC236}">
+                <a16:creationId xmlns:a16="http://schemas.microsoft.com/office/drawing/2014/main" id="{BDE70C63-89DA-7B18-45BB-C7FB695E6B85}"/>
+              </a:ext>
+            </a:extLst>
+          </p:cNvPr>
+          <p:cNvSpPr/>
+          <p:nvPr/>
+        </p:nvSpPr>
+        <p:spPr>
+          <a:xfrm>
+            <a:off x="7321021" y="2855999"/>
+            <a:ext cx="270000" cy="270000"/>
+          </a:xfrm>
+          <a:prstGeom prst="rect">
+            <a:avLst/>
+          </a:prstGeom>
+        </p:spPr>
+        <p:style>
+          <a:lnRef idx="2">
+            <a:schemeClr val="dk1"/>
+          </a:lnRef>
+          <a:fillRef idx="1">
+            <a:schemeClr val="lt1"/>
+          </a:fillRef>
+          <a:effectRef idx="0">
+            <a:schemeClr val="dk1"/>
+          </a:effectRef>
+          <a:fontRef idx="minor">
+            <a:schemeClr val="dk1"/>
+          </a:fontRef>
+        </p:style>
+        <p:txBody>
+          <a:bodyPr rtlCol="0" anchor="ctr"/>
+          <a:lstStyle/>
+          <a:p>
+            <a:pPr algn="ctr"/>
+            <a:endParaRPr lang="en-IN" sz="1350"/>
+          </a:p>
+        </p:txBody>
+      </p:sp>
+      <p:cxnSp>
+        <p:nvCxnSpPr>
+          <p:cNvPr id="53" name="Straight Arrow Connector 52">
+            <a:extLst>
+              <a:ext uri="{FF2B5EF4-FFF2-40B4-BE49-F238E27FC236}">
+                <a16:creationId xmlns:a16="http://schemas.microsoft.com/office/drawing/2014/main" id="{A16DBCA9-F0BD-B283-35D6-81EB3C7D4408}"/>
+              </a:ext>
+            </a:extLst>
+          </p:cNvPr>
+          <p:cNvCxnSpPr>
+            <a:cxnSpLocks/>
+          </p:cNvCxnSpPr>
+          <p:nvPr/>
+        </p:nvCxnSpPr>
+        <p:spPr>
+          <a:xfrm>
+            <a:off x="7321021" y="2415045"/>
+            <a:ext cx="0" cy="176562"/>
+          </a:xfrm>
+          <a:prstGeom prst="straightConnector1">
+            <a:avLst/>
+          </a:prstGeom>
+          <a:ln>
+            <a:tailEnd type="triangle"/>
+          </a:ln>
+        </p:spPr>
+        <p:style>
+          <a:lnRef idx="2">
+            <a:schemeClr val="dk1"/>
+          </a:lnRef>
+          <a:fillRef idx="1">
+            <a:schemeClr val="lt1"/>
+          </a:fillRef>
+          <a:effectRef idx="0">
+            <a:schemeClr val="dk1"/>
+          </a:effectRef>
+          <a:fontRef idx="minor">
+            <a:schemeClr val="dk1"/>
+          </a:fontRef>
+        </p:style>
+      </p:cxnSp>
+      <p:cxnSp>
+        <p:nvCxnSpPr>
+          <p:cNvPr id="60" name="Straight Arrow Connector 59">
+            <a:extLst>
+              <a:ext uri="{FF2B5EF4-FFF2-40B4-BE49-F238E27FC236}">
+                <a16:creationId xmlns:a16="http://schemas.microsoft.com/office/drawing/2014/main" id="{128A3B24-802E-3B6C-2617-874340258E05}"/>
+              </a:ext>
+            </a:extLst>
+          </p:cNvPr>
+          <p:cNvCxnSpPr>
+            <a:cxnSpLocks/>
+          </p:cNvCxnSpPr>
+          <p:nvPr/>
+        </p:nvCxnSpPr>
+        <p:spPr>
+          <a:xfrm>
+            <a:off x="7321021" y="3125999"/>
+            <a:ext cx="0" cy="380576"/>
+          </a:xfrm>
+          <a:prstGeom prst="straightConnector1">
+            <a:avLst/>
+          </a:prstGeom>
+          <a:ln>
+            <a:tailEnd type="triangle"/>
+          </a:ln>
+        </p:spPr>
+        <p:style>
+          <a:lnRef idx="2">
+            <a:schemeClr val="dk1"/>
+          </a:lnRef>
+          <a:fillRef idx="1">
+            <a:schemeClr val="lt1"/>
+          </a:fillRef>
+          <a:effectRef idx="0">
+            <a:schemeClr val="dk1"/>
+          </a:effectRef>
+          <a:fontRef idx="minor">
+            <a:schemeClr val="dk1"/>
+          </a:fontRef>
+        </p:style>
+      </p:cxnSp>
+      <p:sp>
+        <p:nvSpPr>
+          <p:cNvPr id="65" name="Rectangle 64">
+            <a:extLst>
+              <a:ext uri="{FF2B5EF4-FFF2-40B4-BE49-F238E27FC236}">
+                <a16:creationId xmlns:a16="http://schemas.microsoft.com/office/drawing/2014/main" id="{181DDB7E-64E4-6247-167E-94C17BCA5660}"/>
+              </a:ext>
+            </a:extLst>
+          </p:cNvPr>
+          <p:cNvSpPr/>
+          <p:nvPr/>
+        </p:nvSpPr>
+        <p:spPr>
+          <a:xfrm>
+            <a:off x="7448146" y="3185584"/>
+            <a:ext cx="585421" cy="232961"/>
+          </a:xfrm>
+          <a:prstGeom prst="rect">
+            <a:avLst/>
+          </a:prstGeom>
+        </p:spPr>
+        <p:style>
+          <a:lnRef idx="2">
+            <a:schemeClr val="dk1"/>
+          </a:lnRef>
+          <a:fillRef idx="1">
+            <a:schemeClr val="lt1"/>
+          </a:fillRef>
+          <a:effectRef idx="0">
+            <a:schemeClr val="dk1"/>
+          </a:effectRef>
+          <a:fontRef idx="minor">
+            <a:schemeClr val="dk1"/>
+          </a:fontRef>
+        </p:style>
+        <p:txBody>
+          <a:bodyPr rtlCol="0" anchor="ctr"/>
+          <a:lstStyle/>
+          <a:p>
+            <a:pPr algn="ctr"/>
+            <a:r>
+              <a:rPr lang="en-US" sz="1350"/>
+              <a:t>IDWT</a:t>
+            </a:r>
+            <a:endParaRPr lang="en-IN" sz="1350" dirty="0"/>
+          </a:p>
+        </p:txBody>
+      </p:sp>
+      <p:sp>
+        <p:nvSpPr>
+          <p:cNvPr id="68" name="Rectangle 67">
+            <a:extLst>
+              <a:ext uri="{FF2B5EF4-FFF2-40B4-BE49-F238E27FC236}">
+                <a16:creationId xmlns:a16="http://schemas.microsoft.com/office/drawing/2014/main" id="{3D321BA5-3040-039A-1193-8339EDD1495E}"/>
+              </a:ext>
+            </a:extLst>
+          </p:cNvPr>
+          <p:cNvSpPr/>
+          <p:nvPr/>
+        </p:nvSpPr>
+        <p:spPr>
+          <a:xfrm>
+            <a:off x="6912827" y="3532479"/>
+            <a:ext cx="816387" cy="232961"/>
+          </a:xfrm>
+          <a:prstGeom prst="rect">
+            <a:avLst/>
+          </a:prstGeom>
+        </p:spPr>
+        <p:style>
+          <a:lnRef idx="2">
+            <a:schemeClr val="dk1"/>
+          </a:lnRef>
+          <a:fillRef idx="1">
+            <a:schemeClr val="lt1"/>
+          </a:fillRef>
+          <a:effectRef idx="0">
+            <a:schemeClr val="dk1"/>
+          </a:effectRef>
+          <a:fontRef idx="minor">
+            <a:schemeClr val="dk1"/>
+          </a:fontRef>
+        </p:style>
+        <p:txBody>
+          <a:bodyPr rtlCol="0" anchor="ctr"/>
+          <a:lstStyle/>
+          <a:p>
+            <a:pPr algn="ctr"/>
+            <a:r>
+              <a:rPr lang="en-US" sz="1350" dirty="0"/>
+              <a:t>Image-2</a:t>
+            </a:r>
+            <a:endParaRPr lang="en-IN" sz="1350" dirty="0"/>
+          </a:p>
+        </p:txBody>
+      </p:sp>
+      <p:sp>
+        <p:nvSpPr>
+          <p:cNvPr id="70" name="Diamond 69">
+            <a:extLst>
+              <a:ext uri="{FF2B5EF4-FFF2-40B4-BE49-F238E27FC236}">
+                <a16:creationId xmlns:a16="http://schemas.microsoft.com/office/drawing/2014/main" id="{A0A3EB90-8537-AA4C-1BA8-33736A000B9A}"/>
+              </a:ext>
+            </a:extLst>
+          </p:cNvPr>
+          <p:cNvSpPr/>
+          <p:nvPr/>
+        </p:nvSpPr>
+        <p:spPr>
+          <a:xfrm>
+            <a:off x="2945931" y="1490252"/>
+            <a:ext cx="1140452" cy="906500"/>
+          </a:xfrm>
+          <a:prstGeom prst="diamond">
+            <a:avLst/>
+          </a:prstGeom>
+        </p:spPr>
+        <p:style>
+          <a:lnRef idx="2">
+            <a:schemeClr val="dk1"/>
+          </a:lnRef>
+          <a:fillRef idx="1">
+            <a:schemeClr val="lt1"/>
+          </a:fillRef>
+          <a:effectRef idx="0">
+            <a:schemeClr val="dk1"/>
+          </a:effectRef>
+          <a:fontRef idx="minor">
+            <a:schemeClr val="dk1"/>
+          </a:fontRef>
+        </p:style>
+        <p:txBody>
+          <a:bodyPr rtlCol="0" anchor="ctr"/>
+          <a:lstStyle/>
+          <a:p>
+            <a:pPr algn="ctr"/>
+            <a:r>
+              <a:rPr lang="en-US" sz="788" dirty="0"/>
+              <a:t>Fusion Method Based on STD</a:t>
+            </a:r>
+            <a:endParaRPr lang="en-IN" sz="788" dirty="0"/>
+          </a:p>
+        </p:txBody>
+      </p:sp>
+      <p:sp>
+        <p:nvSpPr>
+          <p:cNvPr id="71" name="Rectangle 70">
+            <a:extLst>
+              <a:ext uri="{FF2B5EF4-FFF2-40B4-BE49-F238E27FC236}">
+                <a16:creationId xmlns:a16="http://schemas.microsoft.com/office/drawing/2014/main" id="{AE667532-C8FB-B340-C62B-A22B6DCD1B9C}"/>
+              </a:ext>
+            </a:extLst>
+          </p:cNvPr>
+          <p:cNvSpPr/>
+          <p:nvPr/>
+        </p:nvSpPr>
+        <p:spPr>
+          <a:xfrm>
+            <a:off x="3257276" y="2577974"/>
+            <a:ext cx="270000" cy="270000"/>
+          </a:xfrm>
+          <a:prstGeom prst="rect">
+            <a:avLst/>
+          </a:prstGeom>
+        </p:spPr>
+        <p:style>
+          <a:lnRef idx="2">
+            <a:schemeClr val="dk1"/>
+          </a:lnRef>
+          <a:fillRef idx="1">
+            <a:schemeClr val="lt1"/>
+          </a:fillRef>
+          <a:effectRef idx="0">
+            <a:schemeClr val="dk1"/>
+          </a:effectRef>
+          <a:fontRef idx="minor">
+            <a:schemeClr val="dk1"/>
+          </a:fontRef>
+        </p:style>
+        <p:txBody>
+          <a:bodyPr rtlCol="0" anchor="ctr"/>
+          <a:lstStyle/>
+          <a:p>
+            <a:pPr algn="ctr"/>
+            <a:endParaRPr lang="en-IN" sz="1350"/>
+          </a:p>
+        </p:txBody>
+      </p:sp>
+      <p:sp>
+        <p:nvSpPr>
+          <p:cNvPr id="72" name="Rectangle 71">
+            <a:extLst>
+              <a:ext uri="{FF2B5EF4-FFF2-40B4-BE49-F238E27FC236}">
+                <a16:creationId xmlns:a16="http://schemas.microsoft.com/office/drawing/2014/main" id="{A297DFFD-0BA5-B3DD-0E01-AFDA86DB9B84}"/>
+              </a:ext>
+            </a:extLst>
+          </p:cNvPr>
+          <p:cNvSpPr/>
+          <p:nvPr/>
+        </p:nvSpPr>
+        <p:spPr>
+          <a:xfrm>
+            <a:off x="3519401" y="2577974"/>
+            <a:ext cx="270000" cy="270000"/>
+          </a:xfrm>
+          <a:prstGeom prst="rect">
+            <a:avLst/>
+          </a:prstGeom>
+        </p:spPr>
+        <p:style>
+          <a:lnRef idx="2">
+            <a:schemeClr val="dk1"/>
+          </a:lnRef>
+          <a:fillRef idx="1">
+            <a:schemeClr val="lt1"/>
+          </a:fillRef>
+          <a:effectRef idx="0">
+            <a:schemeClr val="dk1"/>
+          </a:effectRef>
+          <a:fontRef idx="minor">
+            <a:schemeClr val="dk1"/>
+          </a:fontRef>
+        </p:style>
+        <p:txBody>
+          <a:bodyPr rtlCol="0" anchor="ctr"/>
+          <a:lstStyle/>
+          <a:p>
+            <a:pPr algn="ctr"/>
+            <a:endParaRPr lang="en-IN" sz="1350"/>
+          </a:p>
+        </p:txBody>
+      </p:sp>
+      <p:sp>
+        <p:nvSpPr>
+          <p:cNvPr id="73" name="Rectangle 72">
+            <a:extLst>
+              <a:ext uri="{FF2B5EF4-FFF2-40B4-BE49-F238E27FC236}">
+                <a16:creationId xmlns:a16="http://schemas.microsoft.com/office/drawing/2014/main" id="{6109633F-19B4-3BE4-93B1-F395E0DBD7B1}"/>
+              </a:ext>
+            </a:extLst>
+          </p:cNvPr>
+          <p:cNvSpPr/>
+          <p:nvPr/>
+        </p:nvSpPr>
+        <p:spPr>
+          <a:xfrm>
+            <a:off x="3257276" y="2843654"/>
+            <a:ext cx="270000" cy="270000"/>
+          </a:xfrm>
+          <a:prstGeom prst="rect">
+            <a:avLst/>
+          </a:prstGeom>
+        </p:spPr>
+        <p:style>
+          <a:lnRef idx="2">
+            <a:schemeClr val="dk1"/>
+          </a:lnRef>
+          <a:fillRef idx="1">
+            <a:schemeClr val="lt1"/>
+          </a:fillRef>
+          <a:effectRef idx="0">
+            <a:schemeClr val="dk1"/>
+          </a:effectRef>
+          <a:fontRef idx="minor">
+            <a:schemeClr val="dk1"/>
+          </a:fontRef>
+        </p:style>
+        <p:txBody>
+          <a:bodyPr rtlCol="0" anchor="ctr"/>
+          <a:lstStyle/>
+          <a:p>
+            <a:pPr algn="ctr"/>
+            <a:endParaRPr lang="en-IN" sz="1350"/>
+          </a:p>
+        </p:txBody>
+      </p:sp>
+      <p:sp>
+        <p:nvSpPr>
+          <p:cNvPr id="74" name="Rectangle 73">
+            <a:extLst>
+              <a:ext uri="{FF2B5EF4-FFF2-40B4-BE49-F238E27FC236}">
+                <a16:creationId xmlns:a16="http://schemas.microsoft.com/office/drawing/2014/main" id="{1E8ADD12-2914-66D2-7379-02A1D456DEB3}"/>
+              </a:ext>
+            </a:extLst>
+          </p:cNvPr>
+          <p:cNvSpPr/>
+          <p:nvPr/>
+        </p:nvSpPr>
+        <p:spPr>
+          <a:xfrm>
+            <a:off x="3519401" y="2843654"/>
+            <a:ext cx="270000" cy="270000"/>
+          </a:xfrm>
+          <a:prstGeom prst="rect">
+            <a:avLst/>
+          </a:prstGeom>
+        </p:spPr>
+        <p:style>
+          <a:lnRef idx="2">
+            <a:schemeClr val="dk1"/>
+          </a:lnRef>
+          <a:fillRef idx="1">
+            <a:schemeClr val="lt1"/>
+          </a:fillRef>
+          <a:effectRef idx="0">
+            <a:schemeClr val="dk1"/>
+          </a:effectRef>
+          <a:fontRef idx="minor">
+            <a:schemeClr val="dk1"/>
+          </a:fontRef>
+        </p:style>
+        <p:txBody>
+          <a:bodyPr rtlCol="0" anchor="ctr"/>
+          <a:lstStyle/>
+          <a:p>
+            <a:pPr algn="ctr"/>
+            <a:endParaRPr lang="en-IN" sz="1350"/>
+          </a:p>
+        </p:txBody>
+      </p:sp>
+      <p:cxnSp>
+        <p:nvCxnSpPr>
+          <p:cNvPr id="75" name="Straight Arrow Connector 74">
+            <a:extLst>
+              <a:ext uri="{FF2B5EF4-FFF2-40B4-BE49-F238E27FC236}">
+                <a16:creationId xmlns:a16="http://schemas.microsoft.com/office/drawing/2014/main" id="{1F72D189-D4C9-DE4D-6FEE-32A11753DBFA}"/>
+              </a:ext>
+            </a:extLst>
+          </p:cNvPr>
+          <p:cNvCxnSpPr>
+            <a:cxnSpLocks/>
+          </p:cNvCxnSpPr>
+          <p:nvPr/>
+        </p:nvCxnSpPr>
+        <p:spPr>
+          <a:xfrm>
+            <a:off x="3519401" y="2402700"/>
+            <a:ext cx="0" cy="176562"/>
+          </a:xfrm>
+          <a:prstGeom prst="straightConnector1">
+            <a:avLst/>
+          </a:prstGeom>
+          <a:ln>
+            <a:tailEnd type="triangle"/>
+          </a:ln>
+        </p:spPr>
+        <p:style>
+          <a:lnRef idx="2">
+            <a:schemeClr val="dk1"/>
+          </a:lnRef>
+          <a:fillRef idx="1">
+            <a:schemeClr val="lt1"/>
+          </a:fillRef>
+          <a:effectRef idx="0">
+            <a:schemeClr val="dk1"/>
+          </a:effectRef>
+          <a:fontRef idx="minor">
+            <a:schemeClr val="dk1"/>
+          </a:fontRef>
+        </p:style>
+      </p:cxnSp>
+      <p:cxnSp>
+        <p:nvCxnSpPr>
+          <p:cNvPr id="76" name="Straight Arrow Connector 75">
+            <a:extLst>
+              <a:ext uri="{FF2B5EF4-FFF2-40B4-BE49-F238E27FC236}">
+                <a16:creationId xmlns:a16="http://schemas.microsoft.com/office/drawing/2014/main" id="{B43788BA-566B-0348-D34F-C9828B0AC175}"/>
+              </a:ext>
+            </a:extLst>
+          </p:cNvPr>
+          <p:cNvCxnSpPr>
+            <a:cxnSpLocks/>
+          </p:cNvCxnSpPr>
+          <p:nvPr/>
+        </p:nvCxnSpPr>
+        <p:spPr>
+          <a:xfrm>
+            <a:off x="3519401" y="3113654"/>
+            <a:ext cx="0" cy="380576"/>
+          </a:xfrm>
+          <a:prstGeom prst="straightConnector1">
+            <a:avLst/>
+          </a:prstGeom>
+          <a:ln>
+            <a:tailEnd type="triangle"/>
+          </a:ln>
+        </p:spPr>
+        <p:style>
+          <a:lnRef idx="2">
+            <a:schemeClr val="dk1"/>
+          </a:lnRef>
+          <a:fillRef idx="1">
+            <a:schemeClr val="lt1"/>
+          </a:fillRef>
+          <a:effectRef idx="0">
+            <a:schemeClr val="dk1"/>
+          </a:effectRef>
+          <a:fontRef idx="minor">
+            <a:schemeClr val="dk1"/>
+          </a:fontRef>
+        </p:style>
+      </p:cxnSp>
+      <p:sp>
+        <p:nvSpPr>
+          <p:cNvPr id="77" name="Rectangle 76">
+            <a:extLst>
+              <a:ext uri="{FF2B5EF4-FFF2-40B4-BE49-F238E27FC236}">
+                <a16:creationId xmlns:a16="http://schemas.microsoft.com/office/drawing/2014/main" id="{72E813FC-E309-2246-BB6A-3D22AAE67DC9}"/>
+              </a:ext>
+            </a:extLst>
+          </p:cNvPr>
+          <p:cNvSpPr/>
+          <p:nvPr/>
+        </p:nvSpPr>
+        <p:spPr>
+          <a:xfrm>
+            <a:off x="3646526" y="3173239"/>
+            <a:ext cx="585421" cy="232961"/>
+          </a:xfrm>
+          <a:prstGeom prst="rect">
+            <a:avLst/>
+          </a:prstGeom>
+        </p:spPr>
+        <p:style>
+          <a:lnRef idx="2">
+            <a:schemeClr val="dk1"/>
+          </a:lnRef>
+          <a:fillRef idx="1">
+            <a:schemeClr val="lt1"/>
+          </a:fillRef>
+          <a:effectRef idx="0">
+            <a:schemeClr val="dk1"/>
+          </a:effectRef>
+          <a:fontRef idx="minor">
+            <a:schemeClr val="dk1"/>
+          </a:fontRef>
+        </p:style>
+        <p:txBody>
+          <a:bodyPr rtlCol="0" anchor="ctr"/>
+          <a:lstStyle/>
+          <a:p>
+            <a:pPr algn="ctr"/>
+            <a:r>
+              <a:rPr lang="en-US" sz="1350" dirty="0"/>
+              <a:t>IDWT</a:t>
+            </a:r>
+            <a:endParaRPr lang="en-IN" sz="1350" dirty="0"/>
+          </a:p>
+        </p:txBody>
+      </p:sp>
+      <p:sp>
+        <p:nvSpPr>
+          <p:cNvPr id="78" name="Rectangle 77">
+            <a:extLst>
+              <a:ext uri="{FF2B5EF4-FFF2-40B4-BE49-F238E27FC236}">
+                <a16:creationId xmlns:a16="http://schemas.microsoft.com/office/drawing/2014/main" id="{0FEAD6F3-AA71-A80D-1D0D-A2CE79E624E4}"/>
+              </a:ext>
+            </a:extLst>
+          </p:cNvPr>
+          <p:cNvSpPr/>
+          <p:nvPr/>
+        </p:nvSpPr>
+        <p:spPr>
+          <a:xfrm>
+            <a:off x="3111207" y="3520134"/>
+            <a:ext cx="816387" cy="232961"/>
+          </a:xfrm>
+          <a:prstGeom prst="rect">
+            <a:avLst/>
+          </a:prstGeom>
+        </p:spPr>
+        <p:style>
+          <a:lnRef idx="2">
+            <a:schemeClr val="dk1"/>
+          </a:lnRef>
+          <a:fillRef idx="1">
+            <a:schemeClr val="lt1"/>
+          </a:fillRef>
+          <a:effectRef idx="0">
+            <a:schemeClr val="dk1"/>
+          </a:effectRef>
+          <a:fontRef idx="minor">
+            <a:schemeClr val="dk1"/>
+          </a:fontRef>
+        </p:style>
+        <p:txBody>
+          <a:bodyPr rtlCol="0" anchor="ctr"/>
+          <a:lstStyle/>
+          <a:p>
+            <a:pPr algn="ctr"/>
+            <a:r>
+              <a:rPr lang="en-US" sz="1350" dirty="0"/>
+              <a:t>Image-1</a:t>
+            </a:r>
+            <a:endParaRPr lang="en-IN" sz="1350" dirty="0"/>
+          </a:p>
+        </p:txBody>
+      </p:sp>
+      <p:sp>
+        <p:nvSpPr>
+          <p:cNvPr id="79" name="Diamond 78">
+            <a:extLst>
+              <a:ext uri="{FF2B5EF4-FFF2-40B4-BE49-F238E27FC236}">
+                <a16:creationId xmlns:a16="http://schemas.microsoft.com/office/drawing/2014/main" id="{B55722F2-56CE-BFEC-C932-26ED01A145A2}"/>
+              </a:ext>
+            </a:extLst>
+          </p:cNvPr>
+          <p:cNvSpPr/>
+          <p:nvPr/>
+        </p:nvSpPr>
+        <p:spPr>
+          <a:xfrm>
+            <a:off x="5014202" y="4020092"/>
+            <a:ext cx="1140452" cy="906500"/>
+          </a:xfrm>
+          <a:prstGeom prst="diamond">
+            <a:avLst/>
+          </a:prstGeom>
+        </p:spPr>
+        <p:style>
+          <a:lnRef idx="2">
+            <a:schemeClr val="dk1"/>
+          </a:lnRef>
+          <a:fillRef idx="1">
+            <a:schemeClr val="lt1"/>
+          </a:fillRef>
+          <a:effectRef idx="0">
+            <a:schemeClr val="dk1"/>
+          </a:effectRef>
+          <a:fontRef idx="minor">
+            <a:schemeClr val="dk1"/>
+          </a:fontRef>
+        </p:style>
+        <p:txBody>
+          <a:bodyPr rtlCol="0" anchor="ctr"/>
+          <a:lstStyle/>
+          <a:p>
+            <a:pPr algn="ctr"/>
+            <a:r>
+              <a:rPr lang="en-US" sz="788" dirty="0"/>
+              <a:t>Fusion Method Based on STD</a:t>
+            </a:r>
+            <a:endParaRPr lang="en-IN" sz="788" dirty="0"/>
+          </a:p>
+        </p:txBody>
+      </p:sp>
+      <p:cxnSp>
+        <p:nvCxnSpPr>
+          <p:cNvPr id="80" name="Straight Arrow Connector 79">
+            <a:extLst>
+              <a:ext uri="{FF2B5EF4-FFF2-40B4-BE49-F238E27FC236}">
+                <a16:creationId xmlns:a16="http://schemas.microsoft.com/office/drawing/2014/main" id="{874C1BD2-C4F0-4B9C-F997-99D7A30932E7}"/>
+              </a:ext>
+            </a:extLst>
+          </p:cNvPr>
+          <p:cNvCxnSpPr>
+            <a:cxnSpLocks/>
+          </p:cNvCxnSpPr>
+          <p:nvPr/>
+        </p:nvCxnSpPr>
+        <p:spPr>
+          <a:xfrm>
+            <a:off x="2863172" y="1089573"/>
+            <a:ext cx="394104" cy="611211"/>
+          </a:xfrm>
+          <a:prstGeom prst="straightConnector1">
+            <a:avLst/>
+          </a:prstGeom>
+          <a:ln>
+            <a:tailEnd type="triangle"/>
+          </a:ln>
+        </p:spPr>
+        <p:style>
+          <a:lnRef idx="2">
+            <a:schemeClr val="dk1"/>
+          </a:lnRef>
+          <a:fillRef idx="1">
+            <a:schemeClr val="lt1"/>
+          </a:fillRef>
+          <a:effectRef idx="0">
+            <a:schemeClr val="dk1"/>
+          </a:effectRef>
+          <a:fontRef idx="minor">
+            <a:schemeClr val="dk1"/>
+          </a:fontRef>
+        </p:style>
+      </p:cxnSp>
+      <p:cxnSp>
+        <p:nvCxnSpPr>
+          <p:cNvPr id="82" name="Straight Arrow Connector 81">
+            <a:extLst>
+              <a:ext uri="{FF2B5EF4-FFF2-40B4-BE49-F238E27FC236}">
+                <a16:creationId xmlns:a16="http://schemas.microsoft.com/office/drawing/2014/main" id="{B624752B-0870-D8A3-4E38-6B2D94EA16B8}"/>
+              </a:ext>
+            </a:extLst>
+          </p:cNvPr>
+          <p:cNvCxnSpPr>
+            <a:cxnSpLocks/>
+          </p:cNvCxnSpPr>
+          <p:nvPr/>
+        </p:nvCxnSpPr>
+        <p:spPr>
+          <a:xfrm flipH="1">
+            <a:off x="3829200" y="1493079"/>
+            <a:ext cx="670652" cy="237981"/>
+          </a:xfrm>
+          <a:prstGeom prst="straightConnector1">
+            <a:avLst/>
+          </a:prstGeom>
+          <a:ln>
+            <a:tailEnd type="triangle"/>
+          </a:ln>
+        </p:spPr>
+        <p:style>
+          <a:lnRef idx="2">
+            <a:schemeClr val="dk1"/>
+          </a:lnRef>
+          <a:fillRef idx="1">
+            <a:schemeClr val="lt1"/>
+          </a:fillRef>
+          <a:effectRef idx="0">
+            <a:schemeClr val="dk1"/>
+          </a:effectRef>
+          <a:fontRef idx="minor">
+            <a:schemeClr val="dk1"/>
+          </a:fontRef>
+        </p:style>
+      </p:cxnSp>
+      <p:cxnSp>
+        <p:nvCxnSpPr>
+          <p:cNvPr id="85" name="Straight Arrow Connector 84">
+            <a:extLst>
+              <a:ext uri="{FF2B5EF4-FFF2-40B4-BE49-F238E27FC236}">
+                <a16:creationId xmlns:a16="http://schemas.microsoft.com/office/drawing/2014/main" id="{5837CE26-DC62-4719-E391-1E5192CFAB9B}"/>
+              </a:ext>
+            </a:extLst>
+          </p:cNvPr>
+          <p:cNvCxnSpPr>
+            <a:cxnSpLocks/>
+          </p:cNvCxnSpPr>
+          <p:nvPr/>
+        </p:nvCxnSpPr>
+        <p:spPr>
+          <a:xfrm>
+            <a:off x="6154654" y="1192600"/>
+            <a:ext cx="858265" cy="538460"/>
+          </a:xfrm>
+          <a:prstGeom prst="straightConnector1">
+            <a:avLst/>
+          </a:prstGeom>
+          <a:ln>
+            <a:tailEnd type="triangle"/>
+          </a:ln>
+        </p:spPr>
+        <p:style>
+          <a:lnRef idx="2">
+            <a:schemeClr val="dk1"/>
+          </a:lnRef>
+          <a:fillRef idx="1">
+            <a:schemeClr val="lt1"/>
+          </a:fillRef>
+          <a:effectRef idx="0">
+            <a:schemeClr val="dk1"/>
+          </a:effectRef>
+          <a:fontRef idx="minor">
+            <a:schemeClr val="dk1"/>
+          </a:fontRef>
+        </p:style>
+      </p:cxnSp>
+      <p:cxnSp>
+        <p:nvCxnSpPr>
+          <p:cNvPr id="87" name="Straight Arrow Connector 86">
+            <a:extLst>
+              <a:ext uri="{FF2B5EF4-FFF2-40B4-BE49-F238E27FC236}">
+                <a16:creationId xmlns:a16="http://schemas.microsoft.com/office/drawing/2014/main" id="{AE76DC8E-FE82-B200-CE71-AB5F56EDEFBD}"/>
+              </a:ext>
+            </a:extLst>
+          </p:cNvPr>
+          <p:cNvCxnSpPr>
+            <a:cxnSpLocks/>
+          </p:cNvCxnSpPr>
+          <p:nvPr/>
+        </p:nvCxnSpPr>
+        <p:spPr>
+          <a:xfrm flipH="1">
+            <a:off x="7609059" y="1490251"/>
+            <a:ext cx="747303" cy="240809"/>
+          </a:xfrm>
+          <a:prstGeom prst="straightConnector1">
+            <a:avLst/>
+          </a:prstGeom>
+          <a:ln>
+            <a:tailEnd type="triangle"/>
+          </a:ln>
+        </p:spPr>
+        <p:style>
+          <a:lnRef idx="2">
+            <a:schemeClr val="dk1"/>
+          </a:lnRef>
+          <a:fillRef idx="1">
+            <a:schemeClr val="lt1"/>
+          </a:fillRef>
+          <a:effectRef idx="0">
+            <a:schemeClr val="dk1"/>
+          </a:effectRef>
+          <a:fontRef idx="minor">
+            <a:schemeClr val="dk1"/>
+          </a:fontRef>
+        </p:style>
+      </p:cxnSp>
+      <p:cxnSp>
+        <p:nvCxnSpPr>
+          <p:cNvPr id="89" name="Straight Arrow Connector 88">
+            <a:extLst>
+              <a:ext uri="{FF2B5EF4-FFF2-40B4-BE49-F238E27FC236}">
+                <a16:creationId xmlns:a16="http://schemas.microsoft.com/office/drawing/2014/main" id="{9286A2CB-B6C7-35DC-6B35-7FDAEAE91606}"/>
+              </a:ext>
+            </a:extLst>
+          </p:cNvPr>
+          <p:cNvCxnSpPr>
+            <a:cxnSpLocks/>
+          </p:cNvCxnSpPr>
+          <p:nvPr/>
+        </p:nvCxnSpPr>
+        <p:spPr>
+          <a:xfrm>
+            <a:off x="3516157" y="3753095"/>
+            <a:ext cx="1763017" cy="483941"/>
+          </a:xfrm>
+          <a:prstGeom prst="straightConnector1">
+            <a:avLst/>
+          </a:prstGeom>
+          <a:ln>
+            <a:tailEnd type="triangle"/>
+          </a:ln>
+        </p:spPr>
+        <p:style>
+          <a:lnRef idx="2">
+            <a:schemeClr val="dk1"/>
+          </a:lnRef>
+          <a:fillRef idx="1">
+            <a:schemeClr val="lt1"/>
+          </a:fillRef>
+          <a:effectRef idx="0">
+            <a:schemeClr val="dk1"/>
+          </a:effectRef>
+          <a:fontRef idx="minor">
+            <a:schemeClr val="dk1"/>
+          </a:fontRef>
+        </p:style>
+      </p:cxnSp>
+      <p:cxnSp>
+        <p:nvCxnSpPr>
+          <p:cNvPr id="91" name="Straight Arrow Connector 90">
+            <a:extLst>
+              <a:ext uri="{FF2B5EF4-FFF2-40B4-BE49-F238E27FC236}">
+                <a16:creationId xmlns:a16="http://schemas.microsoft.com/office/drawing/2014/main" id="{6CAF2D46-6903-0DDA-36C6-E95AA8F05B57}"/>
+              </a:ext>
+            </a:extLst>
+          </p:cNvPr>
+          <p:cNvCxnSpPr>
+            <a:cxnSpLocks/>
+          </p:cNvCxnSpPr>
+          <p:nvPr/>
+        </p:nvCxnSpPr>
+        <p:spPr>
+          <a:xfrm flipH="1">
+            <a:off x="5888736" y="3778121"/>
+            <a:ext cx="1440160" cy="458915"/>
+          </a:xfrm>
+          <a:prstGeom prst="straightConnector1">
+            <a:avLst/>
+          </a:prstGeom>
+          <a:ln>
+            <a:tailEnd type="triangle"/>
+          </a:ln>
+        </p:spPr>
+        <p:style>
+          <a:lnRef idx="2">
+            <a:schemeClr val="dk1"/>
+          </a:lnRef>
+          <a:fillRef idx="1">
+            <a:schemeClr val="lt1"/>
+          </a:fillRef>
+          <a:effectRef idx="0">
+            <a:schemeClr val="dk1"/>
+          </a:effectRef>
+          <a:fontRef idx="minor">
+            <a:schemeClr val="dk1"/>
+          </a:fontRef>
+        </p:style>
+      </p:cxnSp>
+      <p:cxnSp>
+        <p:nvCxnSpPr>
+          <p:cNvPr id="94" name="Straight Arrow Connector 93">
+            <a:extLst>
+              <a:ext uri="{FF2B5EF4-FFF2-40B4-BE49-F238E27FC236}">
+                <a16:creationId xmlns:a16="http://schemas.microsoft.com/office/drawing/2014/main" id="{8FA3C83D-E1D2-F463-D766-B7209739D6C6}"/>
+              </a:ext>
+            </a:extLst>
+          </p:cNvPr>
+          <p:cNvCxnSpPr>
+            <a:cxnSpLocks/>
+          </p:cNvCxnSpPr>
+          <p:nvPr/>
+        </p:nvCxnSpPr>
+        <p:spPr>
+          <a:xfrm>
+            <a:off x="5582602" y="4926592"/>
+            <a:ext cx="14388" cy="652735"/>
+          </a:xfrm>
+          <a:prstGeom prst="straightConnector1">
+            <a:avLst/>
+          </a:prstGeom>
+          <a:ln>
+            <a:tailEnd type="triangle"/>
+          </a:ln>
+        </p:spPr>
+        <p:style>
+          <a:lnRef idx="2">
+            <a:schemeClr val="dk1"/>
+          </a:lnRef>
+          <a:fillRef idx="1">
+            <a:schemeClr val="lt1"/>
+          </a:fillRef>
+          <a:effectRef idx="0">
+            <a:schemeClr val="dk1"/>
+          </a:effectRef>
+          <a:fontRef idx="minor">
+            <a:schemeClr val="dk1"/>
+          </a:fontRef>
+        </p:style>
+      </p:cxnSp>
+      <p:sp>
+        <p:nvSpPr>
+          <p:cNvPr id="95" name="Rectangle 94">
+            <a:extLst>
+              <a:ext uri="{FF2B5EF4-FFF2-40B4-BE49-F238E27FC236}">
+                <a16:creationId xmlns:a16="http://schemas.microsoft.com/office/drawing/2014/main" id="{430B16BD-3DDF-6363-3C53-82861E2709EC}"/>
+              </a:ext>
+            </a:extLst>
+          </p:cNvPr>
+          <p:cNvSpPr/>
+          <p:nvPr/>
+        </p:nvSpPr>
+        <p:spPr>
+          <a:xfrm>
+            <a:off x="5182575" y="5579327"/>
+            <a:ext cx="828829" cy="436663"/>
+          </a:xfrm>
+          <a:prstGeom prst="rect">
+            <a:avLst/>
+          </a:prstGeom>
+        </p:spPr>
+        <p:style>
+          <a:lnRef idx="2">
+            <a:schemeClr val="dk1"/>
+          </a:lnRef>
+          <a:fillRef idx="1">
+            <a:schemeClr val="lt1"/>
+          </a:fillRef>
+          <a:effectRef idx="0">
+            <a:schemeClr val="dk1"/>
+          </a:effectRef>
+          <a:fontRef idx="minor">
+            <a:schemeClr val="dk1"/>
+          </a:fontRef>
+        </p:style>
+        <p:txBody>
+          <a:bodyPr rtlCol="0" anchor="ctr"/>
+          <a:lstStyle/>
+          <a:p>
+            <a:pPr algn="ctr"/>
+            <a:r>
+              <a:rPr lang="en-US" sz="1350" dirty="0"/>
+              <a:t>Fused Image</a:t>
+            </a:r>
+            <a:endParaRPr lang="en-IN" sz="1350" dirty="0"/>
+          </a:p>
+        </p:txBody>
+      </p:sp>
+      <p:sp>
+        <p:nvSpPr>
+          <p:cNvPr id="98" name="Rectangle 97">
+            <a:extLst>
+              <a:ext uri="{FF2B5EF4-FFF2-40B4-BE49-F238E27FC236}">
+                <a16:creationId xmlns:a16="http://schemas.microsoft.com/office/drawing/2014/main" id="{91F7464E-2EB1-5950-A795-092728EE2E4A}"/>
+              </a:ext>
+            </a:extLst>
+          </p:cNvPr>
+          <p:cNvSpPr/>
+          <p:nvPr/>
+        </p:nvSpPr>
+        <p:spPr>
+          <a:xfrm>
+            <a:off x="5718693" y="5136479"/>
+            <a:ext cx="585421" cy="232961"/>
+          </a:xfrm>
+          <a:prstGeom prst="rect">
+            <a:avLst/>
+          </a:prstGeom>
+        </p:spPr>
+        <p:style>
+          <a:lnRef idx="2">
+            <a:schemeClr val="dk1"/>
+          </a:lnRef>
+          <a:fillRef idx="1">
+            <a:schemeClr val="lt1"/>
+          </a:fillRef>
+          <a:effectRef idx="0">
+            <a:schemeClr val="dk1"/>
+          </a:effectRef>
+          <a:fontRef idx="minor">
+            <a:schemeClr val="dk1"/>
+          </a:fontRef>
+        </p:style>
+        <p:txBody>
+          <a:bodyPr rtlCol="0" anchor="ctr"/>
+          <a:lstStyle/>
+          <a:p>
+            <a:pPr algn="ctr"/>
+            <a:r>
+              <a:rPr lang="en-US" sz="1350" dirty="0"/>
+              <a:t>IDWT</a:t>
+            </a:r>
+            <a:endParaRPr lang="en-IN" sz="1350" dirty="0"/>
+          </a:p>
+        </p:txBody>
+      </p:sp>
+    </p:spTree>
+    <p:extLst>
+      <p:ext uri="{BB962C8B-B14F-4D97-AF65-F5344CB8AC3E}">
+        <p14:creationId xmlns:p14="http://schemas.microsoft.com/office/powerpoint/2010/main" val="4122443266"/>
+      </p:ext>
+    </p:extLst>
+  </p:cSld>
+  <p:clrMapOvr>
+    <a:masterClrMapping/>
+  </p:clrMapOvr>
+</p:sld>
+</file>
+
 <file path=ppt/theme/theme1.xml><?xml version="1.0" encoding="utf-8"?>
 <a:theme xmlns:a="http://schemas.openxmlformats.org/drawingml/2006/main" name="Office Theme">
   <a:themeElements>
-    <a:clrScheme name="Office">
+    <a:clrScheme name="Office Theme">
       <a:dk1>
         <a:sysClr val="windowText" lastClr="000000"/>
       </a:dk1>
@@ -6898,7 +8677,7 @@
         <a:srgbClr val="954F72"/>
       </a:folHlink>
     </a:clrScheme>
-    <a:fontScheme name="Office">
+    <a:fontScheme name="Office Theme">
       <a:majorFont>
         <a:latin typeface="Calibri Light" panose="020F0302020204030204"/>
         <a:ea typeface=""/>
@@ -6933,23 +8712,6 @@
         <a:font script="Viet" typeface="Times New Roman"/>
         <a:font script="Uigh" typeface="Microsoft Uighur"/>
         <a:font script="Geor" typeface="Sylfaen"/>
-        <a:font script="Armn" typeface="Arial"/>
-        <a:font script="Bugi" typeface="Leelawadee UI"/>
-        <a:font script="Bopo" typeface="Microsoft JhengHei"/>
-        <a:font script="Java" typeface="Javanese Text"/>
-        <a:font script="Lisu" typeface="Segoe UI"/>
-        <a:font script="Mymr" typeface="Myanmar Text"/>
-        <a:font script="Nkoo" typeface="Ebrima"/>
-        <a:font script="Olck" typeface="Nirmala UI"/>
-        <a:font script="Osma" typeface="Ebrima"/>
-        <a:font script="Phag" typeface="Phagspa"/>
-        <a:font script="Syrn" typeface="Estrangelo Edessa"/>
-        <a:font script="Syrj" typeface="Estrangelo Edessa"/>
-        <a:font script="Syre" typeface="Estrangelo Edessa"/>
-        <a:font script="Sora" typeface="Nirmala UI"/>
-        <a:font script="Tale" typeface="Microsoft Tai Le"/>
-        <a:font script="Talu" typeface="Microsoft New Tai Lue"/>
-        <a:font script="Tfng" typeface="Ebrima"/>
       </a:majorFont>
       <a:minorFont>
         <a:latin typeface="Calibri" panose="020F0502020204030204"/>
@@ -6985,26 +8747,9 @@
         <a:font script="Viet" typeface="Arial"/>
         <a:font script="Uigh" typeface="Microsoft Uighur"/>
         <a:font script="Geor" typeface="Sylfaen"/>
-        <a:font script="Armn" typeface="Arial"/>
-        <a:font script="Bugi" typeface="Leelawadee UI"/>
-        <a:font script="Bopo" typeface="Microsoft JhengHei"/>
-        <a:font script="Java" typeface="Javanese Text"/>
-        <a:font script="Lisu" typeface="Segoe UI"/>
-        <a:font script="Mymr" typeface="Myanmar Text"/>
-        <a:font script="Nkoo" typeface="Ebrima"/>
-        <a:font script="Olck" typeface="Nirmala UI"/>
-        <a:font script="Osma" typeface="Ebrima"/>
-        <a:font script="Phag" typeface="Phagspa"/>
-        <a:font script="Syrn" typeface="Estrangelo Edessa"/>
-        <a:font script="Syrj" typeface="Estrangelo Edessa"/>
-        <a:font script="Syre" typeface="Estrangelo Edessa"/>
-        <a:font script="Sora" typeface="Nirmala UI"/>
-        <a:font script="Tale" typeface="Microsoft Tai Le"/>
-        <a:font script="Talu" typeface="Microsoft New Tai Lue"/>
-        <a:font script="Tfng" typeface="Ebrima"/>
       </a:minorFont>
     </a:fontScheme>
-    <a:fmtScheme name="Office">
+    <a:fmtScheme name="Office Theme">
       <a:fillStyleLst>
         <a:solidFill>
           <a:schemeClr val="phClr"/>
@@ -7146,7 +8891,7 @@
   <a:extraClrSchemeLst/>
   <a:extLst>
     <a:ext uri="{05A4C25C-085E-4340-85A3-A5531E510DB2}">
-      <thm15:themeFamily xmlns:thm15="http://schemas.microsoft.com/office/thememl/2012/main" name="Office Theme" id="{62F939B6-93AF-4DB8-9C6B-D6C7DFDC589F}" vid="{4A3C46E8-61CC-4603-A589-7422A47A8E4A}"/>
+      <thm15:themeFamily xmlns:thm15="http://schemas.microsoft.com/office/thememl/2012/main" name="Office 2013 - 2022 Theme" id="{62F939B6-93AF-4DB8-9C6B-D6C7DFDC589F}" vid="{4A3C46E8-61CC-4603-A589-7422A47A8E4A}"/>
     </a:ext>
   </a:extLst>
 </a:theme>

--- a/Final_Paper/flowchart.pptx
+++ b/Final_Paper/flowchart.pptx
@@ -198,7 +198,7 @@
           <a:p>
             <a:fld id="{0A1B1EB5-AD17-4B12-8CBC-EC8266648CFD}" type="datetimeFigureOut">
               <a:rPr lang="en-IN" smtClean="0"/>
-              <a:t>29-11-2025</a:t>
+              <a:t>02-12-2025</a:t>
             </a:fld>
             <a:endParaRPr lang="en-IN"/>
           </a:p>
@@ -686,7 +686,7 @@
           <a:p>
             <a:fld id="{7A059AC8-D1E1-47FC-89C7-8CFEDBB34742}" type="datetimeFigureOut">
               <a:rPr lang="en-IN" smtClean="0"/>
-              <a:t>29-11-2025</a:t>
+              <a:t>02-12-2025</a:t>
             </a:fld>
             <a:endParaRPr lang="en-IN"/>
           </a:p>
@@ -856,7 +856,7 @@
           <a:p>
             <a:fld id="{7A059AC8-D1E1-47FC-89C7-8CFEDBB34742}" type="datetimeFigureOut">
               <a:rPr lang="en-IN" smtClean="0"/>
-              <a:t>29-11-2025</a:t>
+              <a:t>02-12-2025</a:t>
             </a:fld>
             <a:endParaRPr lang="en-IN"/>
           </a:p>
@@ -1036,7 +1036,7 @@
           <a:p>
             <a:fld id="{7A059AC8-D1E1-47FC-89C7-8CFEDBB34742}" type="datetimeFigureOut">
               <a:rPr lang="en-IN" smtClean="0"/>
-              <a:t>29-11-2025</a:t>
+              <a:t>02-12-2025</a:t>
             </a:fld>
             <a:endParaRPr lang="en-IN"/>
           </a:p>
@@ -1206,7 +1206,7 @@
           <a:p>
             <a:fld id="{7A059AC8-D1E1-47FC-89C7-8CFEDBB34742}" type="datetimeFigureOut">
               <a:rPr lang="en-IN" smtClean="0"/>
-              <a:t>29-11-2025</a:t>
+              <a:t>02-12-2025</a:t>
             </a:fld>
             <a:endParaRPr lang="en-IN"/>
           </a:p>
@@ -1452,7 +1452,7 @@
           <a:p>
             <a:fld id="{7A059AC8-D1E1-47FC-89C7-8CFEDBB34742}" type="datetimeFigureOut">
               <a:rPr lang="en-IN" smtClean="0"/>
-              <a:t>29-11-2025</a:t>
+              <a:t>02-12-2025</a:t>
             </a:fld>
             <a:endParaRPr lang="en-IN"/>
           </a:p>
@@ -1684,7 +1684,7 @@
           <a:p>
             <a:fld id="{7A059AC8-D1E1-47FC-89C7-8CFEDBB34742}" type="datetimeFigureOut">
               <a:rPr lang="en-IN" smtClean="0"/>
-              <a:t>29-11-2025</a:t>
+              <a:t>02-12-2025</a:t>
             </a:fld>
             <a:endParaRPr lang="en-IN"/>
           </a:p>
@@ -2051,7 +2051,7 @@
           <a:p>
             <a:fld id="{7A059AC8-D1E1-47FC-89C7-8CFEDBB34742}" type="datetimeFigureOut">
               <a:rPr lang="en-IN" smtClean="0"/>
-              <a:t>29-11-2025</a:t>
+              <a:t>02-12-2025</a:t>
             </a:fld>
             <a:endParaRPr lang="en-IN"/>
           </a:p>
@@ -2169,7 +2169,7 @@
           <a:p>
             <a:fld id="{7A059AC8-D1E1-47FC-89C7-8CFEDBB34742}" type="datetimeFigureOut">
               <a:rPr lang="en-IN" smtClean="0"/>
-              <a:t>29-11-2025</a:t>
+              <a:t>02-12-2025</a:t>
             </a:fld>
             <a:endParaRPr lang="en-IN"/>
           </a:p>
@@ -2264,7 +2264,7 @@
           <a:p>
             <a:fld id="{7A059AC8-D1E1-47FC-89C7-8CFEDBB34742}" type="datetimeFigureOut">
               <a:rPr lang="en-IN" smtClean="0"/>
-              <a:t>29-11-2025</a:t>
+              <a:t>02-12-2025</a:t>
             </a:fld>
             <a:endParaRPr lang="en-IN"/>
           </a:p>
@@ -2541,7 +2541,7 @@
           <a:p>
             <a:fld id="{7A059AC8-D1E1-47FC-89C7-8CFEDBB34742}" type="datetimeFigureOut">
               <a:rPr lang="en-IN" smtClean="0"/>
-              <a:t>29-11-2025</a:t>
+              <a:t>02-12-2025</a:t>
             </a:fld>
             <a:endParaRPr lang="en-IN"/>
           </a:p>
@@ -2798,7 +2798,7 @@
           <a:p>
             <a:fld id="{7A059AC8-D1E1-47FC-89C7-8CFEDBB34742}" type="datetimeFigureOut">
               <a:rPr lang="en-IN" smtClean="0"/>
-              <a:t>29-11-2025</a:t>
+              <a:t>02-12-2025</a:t>
             </a:fld>
             <a:endParaRPr lang="en-IN"/>
           </a:p>
@@ -3011,7 +3011,7 @@
           <a:p>
             <a:fld id="{7A059AC8-D1E1-47FC-89C7-8CFEDBB34742}" type="datetimeFigureOut">
               <a:rPr lang="en-IN" smtClean="0"/>
-              <a:t>29-11-2025</a:t>
+              <a:t>02-12-2025</a:t>
             </a:fld>
             <a:endParaRPr lang="en-IN"/>
           </a:p>

--- a/Final_Paper/flowchart.pptx
+++ b/Final_Paper/flowchart.pptx
@@ -198,7 +198,7 @@
           <a:p>
             <a:fld id="{0A1B1EB5-AD17-4B12-8CBC-EC8266648CFD}" type="datetimeFigureOut">
               <a:rPr lang="en-IN" smtClean="0"/>
-              <a:t>02-12-2025</a:t>
+              <a:t>03-12-2025</a:t>
             </a:fld>
             <a:endParaRPr lang="en-IN"/>
           </a:p>
@@ -686,7 +686,7 @@
           <a:p>
             <a:fld id="{7A059AC8-D1E1-47FC-89C7-8CFEDBB34742}" type="datetimeFigureOut">
               <a:rPr lang="en-IN" smtClean="0"/>
-              <a:t>02-12-2025</a:t>
+              <a:t>03-12-2025</a:t>
             </a:fld>
             <a:endParaRPr lang="en-IN"/>
           </a:p>
@@ -856,7 +856,7 @@
           <a:p>
             <a:fld id="{7A059AC8-D1E1-47FC-89C7-8CFEDBB34742}" type="datetimeFigureOut">
               <a:rPr lang="en-IN" smtClean="0"/>
-              <a:t>02-12-2025</a:t>
+              <a:t>03-12-2025</a:t>
             </a:fld>
             <a:endParaRPr lang="en-IN"/>
           </a:p>
@@ -1036,7 +1036,7 @@
           <a:p>
             <a:fld id="{7A059AC8-D1E1-47FC-89C7-8CFEDBB34742}" type="datetimeFigureOut">
               <a:rPr lang="en-IN" smtClean="0"/>
-              <a:t>02-12-2025</a:t>
+              <a:t>03-12-2025</a:t>
             </a:fld>
             <a:endParaRPr lang="en-IN"/>
           </a:p>
@@ -1206,7 +1206,7 @@
           <a:p>
             <a:fld id="{7A059AC8-D1E1-47FC-89C7-8CFEDBB34742}" type="datetimeFigureOut">
               <a:rPr lang="en-IN" smtClean="0"/>
-              <a:t>02-12-2025</a:t>
+              <a:t>03-12-2025</a:t>
             </a:fld>
             <a:endParaRPr lang="en-IN"/>
           </a:p>
@@ -1452,7 +1452,7 @@
           <a:p>
             <a:fld id="{7A059AC8-D1E1-47FC-89C7-8CFEDBB34742}" type="datetimeFigureOut">
               <a:rPr lang="en-IN" smtClean="0"/>
-              <a:t>02-12-2025</a:t>
+              <a:t>03-12-2025</a:t>
             </a:fld>
             <a:endParaRPr lang="en-IN"/>
           </a:p>
@@ -1684,7 +1684,7 @@
           <a:p>
             <a:fld id="{7A059AC8-D1E1-47FC-89C7-8CFEDBB34742}" type="datetimeFigureOut">
               <a:rPr lang="en-IN" smtClean="0"/>
-              <a:t>02-12-2025</a:t>
+              <a:t>03-12-2025</a:t>
             </a:fld>
             <a:endParaRPr lang="en-IN"/>
           </a:p>
@@ -2051,7 +2051,7 @@
           <a:p>
             <a:fld id="{7A059AC8-D1E1-47FC-89C7-8CFEDBB34742}" type="datetimeFigureOut">
               <a:rPr lang="en-IN" smtClean="0"/>
-              <a:t>02-12-2025</a:t>
+              <a:t>03-12-2025</a:t>
             </a:fld>
             <a:endParaRPr lang="en-IN"/>
           </a:p>
@@ -2169,7 +2169,7 @@
           <a:p>
             <a:fld id="{7A059AC8-D1E1-47FC-89C7-8CFEDBB34742}" type="datetimeFigureOut">
               <a:rPr lang="en-IN" smtClean="0"/>
-              <a:t>02-12-2025</a:t>
+              <a:t>03-12-2025</a:t>
             </a:fld>
             <a:endParaRPr lang="en-IN"/>
           </a:p>
@@ -2264,7 +2264,7 @@
           <a:p>
             <a:fld id="{7A059AC8-D1E1-47FC-89C7-8CFEDBB34742}" type="datetimeFigureOut">
               <a:rPr lang="en-IN" smtClean="0"/>
-              <a:t>02-12-2025</a:t>
+              <a:t>03-12-2025</a:t>
             </a:fld>
             <a:endParaRPr lang="en-IN"/>
           </a:p>
@@ -2541,7 +2541,7 @@
           <a:p>
             <a:fld id="{7A059AC8-D1E1-47FC-89C7-8CFEDBB34742}" type="datetimeFigureOut">
               <a:rPr lang="en-IN" smtClean="0"/>
-              <a:t>02-12-2025</a:t>
+              <a:t>03-12-2025</a:t>
             </a:fld>
             <a:endParaRPr lang="en-IN"/>
           </a:p>
@@ -2798,7 +2798,7 @@
           <a:p>
             <a:fld id="{7A059AC8-D1E1-47FC-89C7-8CFEDBB34742}" type="datetimeFigureOut">
               <a:rPr lang="en-IN" smtClean="0"/>
-              <a:t>02-12-2025</a:t>
+              <a:t>03-12-2025</a:t>
             </a:fld>
             <a:endParaRPr lang="en-IN"/>
           </a:p>
@@ -3011,7 +3011,7 @@
           <a:p>
             <a:fld id="{7A059AC8-D1E1-47FC-89C7-8CFEDBB34742}" type="datetimeFigureOut">
               <a:rPr lang="en-IN" smtClean="0"/>
-              <a:t>02-12-2025</a:t>
+              <a:t>03-12-2025</a:t>
             </a:fld>
             <a:endParaRPr lang="en-IN"/>
           </a:p>
@@ -3601,10 +3601,10 @@
           <a:p>
             <a:pPr algn="ctr"/>
             <a:r>
-              <a:rPr lang="en-US" sz="1050" dirty="0"/>
+              <a:rPr lang="en-US" sz="1000" dirty="0"/>
               <a:t>Background Mask</a:t>
             </a:r>
-            <a:endParaRPr lang="en-IN" sz="1050" dirty="0"/>
+            <a:endParaRPr lang="en-IN" sz="1000" dirty="0"/>
           </a:p>
         </p:txBody>
       </p:sp>
@@ -5660,10 +5660,10 @@
           <a:p>
             <a:pPr algn="ctr"/>
             <a:r>
-              <a:rPr lang="en-US" sz="1350" dirty="0"/>
+              <a:rPr lang="en-US" sz="1200" dirty="0"/>
               <a:t>DWT</a:t>
             </a:r>
-            <a:endParaRPr lang="en-IN" sz="1350" dirty="0"/>
+            <a:endParaRPr lang="en-IN" sz="1200" dirty="0"/>
           </a:p>
         </p:txBody>
       </p:sp>
@@ -5708,10 +5708,10 @@
           <a:p>
             <a:pPr algn="ctr"/>
             <a:r>
-              <a:rPr lang="en-US" sz="1350" dirty="0"/>
+              <a:rPr lang="en-US" sz="1200" dirty="0"/>
               <a:t>DWT</a:t>
             </a:r>
-            <a:endParaRPr lang="en-IN" sz="1350" dirty="0"/>
+            <a:endParaRPr lang="en-IN" sz="1200" dirty="0"/>
           </a:p>
         </p:txBody>
       </p:sp>
@@ -5756,10 +5756,10 @@
           <a:p>
             <a:pPr algn="ctr"/>
             <a:r>
-              <a:rPr lang="en-US" sz="1350" dirty="0"/>
+              <a:rPr lang="en-US" sz="1200" dirty="0"/>
               <a:t>DWT</a:t>
             </a:r>
-            <a:endParaRPr lang="en-IN" sz="1350" dirty="0"/>
+            <a:endParaRPr lang="en-IN" sz="1200" dirty="0"/>
           </a:p>
         </p:txBody>
       </p:sp>
@@ -5804,10 +5804,10 @@
           <a:p>
             <a:pPr algn="ctr"/>
             <a:r>
-              <a:rPr lang="en-US" sz="1350" dirty="0"/>
+              <a:rPr lang="en-US" sz="1200" dirty="0"/>
               <a:t>DWT</a:t>
             </a:r>
-            <a:endParaRPr lang="en-IN" sz="1350" dirty="0"/>
+            <a:endParaRPr lang="en-IN" sz="1200" dirty="0"/>
           </a:p>
         </p:txBody>
       </p:sp>
@@ -6394,7 +6394,7 @@
         </p:nvSpPr>
         <p:spPr>
           <a:xfrm>
-            <a:off x="1749941" y="5530830"/>
+            <a:off x="3145764" y="5517519"/>
             <a:ext cx="231716" cy="232965"/>
           </a:xfrm>
           <a:prstGeom prst="flowChartSummingJunction">
@@ -6438,7 +6438,7 @@
         </p:nvSpPr>
         <p:spPr>
           <a:xfrm>
-            <a:off x="1985686" y="5530830"/>
+            <a:off x="3330818" y="5542406"/>
             <a:ext cx="1711263" cy="232949"/>
           </a:xfrm>
           <a:prstGeom prst="rect">
